--- a/Slides/9_DDD_Diseño.pptx
+++ b/Slides/9_DDD_Diseño.pptx
@@ -4,6 +4,9 @@
   <p:sldMasterIdLst>
     <p:sldMasterId id="2147483649" r:id="rId1"/>
   </p:sldMasterIdLst>
+  <p:notesMasterIdLst>
+    <p:notesMasterId r:id="rId55"/>
+  </p:notesMasterIdLst>
   <p:sldIdLst>
     <p:sldId id="265" r:id="rId2"/>
     <p:sldId id="305" r:id="rId3"/>
@@ -23,36 +26,41 @@
     <p:sldId id="311" r:id="rId17"/>
     <p:sldId id="350" r:id="rId18"/>
     <p:sldId id="344" r:id="rId19"/>
-    <p:sldId id="351" r:id="rId20"/>
-    <p:sldId id="352" r:id="rId21"/>
-    <p:sldId id="353" r:id="rId22"/>
-    <p:sldId id="321" r:id="rId23"/>
-    <p:sldId id="322" r:id="rId24"/>
-    <p:sldId id="354" r:id="rId25"/>
-    <p:sldId id="313" r:id="rId26"/>
-    <p:sldId id="358" r:id="rId27"/>
-    <p:sldId id="335" r:id="rId28"/>
-    <p:sldId id="315" r:id="rId29"/>
-    <p:sldId id="355" r:id="rId30"/>
-    <p:sldId id="312" r:id="rId31"/>
-    <p:sldId id="356" r:id="rId32"/>
-    <p:sldId id="316" r:id="rId33"/>
-    <p:sldId id="319" r:id="rId34"/>
-    <p:sldId id="320" r:id="rId35"/>
-    <p:sldId id="323" r:id="rId36"/>
-    <p:sldId id="325" r:id="rId37"/>
-    <p:sldId id="327" r:id="rId38"/>
-    <p:sldId id="326" r:id="rId39"/>
-    <p:sldId id="328" r:id="rId40"/>
-    <p:sldId id="314" r:id="rId41"/>
-    <p:sldId id="329" r:id="rId42"/>
-    <p:sldId id="330" r:id="rId43"/>
-    <p:sldId id="331" r:id="rId44"/>
-    <p:sldId id="332" r:id="rId45"/>
-    <p:sldId id="360" r:id="rId46"/>
-    <p:sldId id="366" r:id="rId47"/>
-    <p:sldId id="324" r:id="rId48"/>
-    <p:sldId id="273" r:id="rId49"/>
+    <p:sldId id="370" r:id="rId20"/>
+    <p:sldId id="353" r:id="rId21"/>
+    <p:sldId id="351" r:id="rId22"/>
+    <p:sldId id="352" r:id="rId23"/>
+    <p:sldId id="321" r:id="rId24"/>
+    <p:sldId id="322" r:id="rId25"/>
+    <p:sldId id="354" r:id="rId26"/>
+    <p:sldId id="313" r:id="rId27"/>
+    <p:sldId id="367" r:id="rId28"/>
+    <p:sldId id="358" r:id="rId29"/>
+    <p:sldId id="368" r:id="rId30"/>
+    <p:sldId id="369" r:id="rId31"/>
+    <p:sldId id="335" r:id="rId32"/>
+    <p:sldId id="315" r:id="rId33"/>
+    <p:sldId id="355" r:id="rId34"/>
+    <p:sldId id="312" r:id="rId35"/>
+    <p:sldId id="356" r:id="rId36"/>
+    <p:sldId id="316" r:id="rId37"/>
+    <p:sldId id="319" r:id="rId38"/>
+    <p:sldId id="320" r:id="rId39"/>
+    <p:sldId id="323" r:id="rId40"/>
+    <p:sldId id="325" r:id="rId41"/>
+    <p:sldId id="327" r:id="rId42"/>
+    <p:sldId id="326" r:id="rId43"/>
+    <p:sldId id="328" r:id="rId44"/>
+    <p:sldId id="314" r:id="rId45"/>
+    <p:sldId id="329" r:id="rId46"/>
+    <p:sldId id="330" r:id="rId47"/>
+    <p:sldId id="331" r:id="rId48"/>
+    <p:sldId id="332" r:id="rId49"/>
+    <p:sldId id="360" r:id="rId50"/>
+    <p:sldId id="366" r:id="rId51"/>
+    <p:sldId id="324" r:id="rId52"/>
+    <p:sldId id="273" r:id="rId53"/>
+    <p:sldId id="371" r:id="rId54"/>
   </p:sldIdLst>
   <p:sldSz cx="12192000" cy="6858000"/>
   <p:notesSz cx="6858000" cy="9144000"/>
@@ -3602,7 +3610,7 @@
   <pc:docChgLst>
     <pc:chgData name="Cesar Augusto Lopez Gallego" userId="0dfa9112-9251-4882-b472-cf2dfcee09d1" providerId="ADAL" clId="{F3DF07A2-6BA1-431D-A078-C1C471A99DDE}"/>
     <pc:docChg chg="undo custSel addSld delSld modSld">
-      <pc:chgData name="Cesar Augusto Lopez Gallego" userId="0dfa9112-9251-4882-b472-cf2dfcee09d1" providerId="ADAL" clId="{F3DF07A2-6BA1-431D-A078-C1C471A99DDE}" dt="2026-04-07T12:17:55.839" v="371" actId="20577"/>
+      <pc:chgData name="Cesar Augusto Lopez Gallego" userId="0dfa9112-9251-4882-b472-cf2dfcee09d1" providerId="ADAL" clId="{F3DF07A2-6BA1-431D-A078-C1C471A99DDE}" dt="2026-04-08T12:29:56.013" v="1430" actId="20577"/>
       <pc:docMkLst>
         <pc:docMk/>
       </pc:docMkLst>
@@ -3628,6 +3636,164 @@
             <ac:spMk id="4" creationId="{0B93B334-4B15-4D1D-A449-DAB26C3D917E}"/>
           </ac:spMkLst>
         </pc:spChg>
+      </pc:sldChg>
+      <pc:sldChg chg="addSp modSp mod">
+        <pc:chgData name="Cesar Augusto Lopez Gallego" userId="0dfa9112-9251-4882-b472-cf2dfcee09d1" providerId="ADAL" clId="{F3DF07A2-6BA1-431D-A078-C1C471A99DDE}" dt="2026-04-08T12:13:40.164" v="1184" actId="11529"/>
+        <pc:sldMkLst>
+          <pc:docMk/>
+          <pc:sldMk cId="4098487574" sldId="311"/>
+        </pc:sldMkLst>
+        <pc:spChg chg="mod">
+          <ac:chgData name="Cesar Augusto Lopez Gallego" userId="0dfa9112-9251-4882-b472-cf2dfcee09d1" providerId="ADAL" clId="{F3DF07A2-6BA1-431D-A078-C1C471A99DDE}" dt="2026-04-08T12:12:28.341" v="1167"/>
+          <ac:spMkLst>
+            <pc:docMk/>
+            <pc:sldMk cId="4098487574" sldId="311"/>
+            <ac:spMk id="4" creationId="{18424513-0595-4CE1-876E-93D43050C865}"/>
+          </ac:spMkLst>
+        </pc:spChg>
+        <pc:spChg chg="mod">
+          <ac:chgData name="Cesar Augusto Lopez Gallego" userId="0dfa9112-9251-4882-b472-cf2dfcee09d1" providerId="ADAL" clId="{F3DF07A2-6BA1-431D-A078-C1C471A99DDE}" dt="2026-04-08T12:12:05.628" v="1164" actId="404"/>
+          <ac:spMkLst>
+            <pc:docMk/>
+            <pc:sldMk cId="4098487574" sldId="311"/>
+            <ac:spMk id="12" creationId="{4AD7A405-4229-4837-9934-ADFDFFA4CB05}"/>
+          </ac:spMkLst>
+        </pc:spChg>
+        <pc:spChg chg="add mod">
+          <ac:chgData name="Cesar Augusto Lopez Gallego" userId="0dfa9112-9251-4882-b472-cf2dfcee09d1" providerId="ADAL" clId="{F3DF07A2-6BA1-431D-A078-C1C471A99DDE}" dt="2026-04-08T12:11:31.824" v="1156" actId="1076"/>
+          <ac:spMkLst>
+            <pc:docMk/>
+            <pc:sldMk cId="4098487574" sldId="311"/>
+            <ac:spMk id="14" creationId="{973BE036-EED5-4BF7-84B3-22FF38F70366}"/>
+          </ac:spMkLst>
+        </pc:spChg>
+        <pc:spChg chg="add mod">
+          <ac:chgData name="Cesar Augusto Lopez Gallego" userId="0dfa9112-9251-4882-b472-cf2dfcee09d1" providerId="ADAL" clId="{F3DF07A2-6BA1-431D-A078-C1C471A99DDE}" dt="2026-04-08T12:12:10.113" v="1165" actId="1076"/>
+          <ac:spMkLst>
+            <pc:docMk/>
+            <pc:sldMk cId="4098487574" sldId="311"/>
+            <ac:spMk id="16" creationId="{36FFE4D1-3DFB-438E-BB66-5A0A89DBD15A}"/>
+          </ac:spMkLst>
+        </pc:spChg>
+        <pc:spChg chg="add mod">
+          <ac:chgData name="Cesar Augusto Lopez Gallego" userId="0dfa9112-9251-4882-b472-cf2dfcee09d1" providerId="ADAL" clId="{F3DF07A2-6BA1-431D-A078-C1C471A99DDE}" dt="2026-04-08T12:12:39.883" v="1173" actId="1076"/>
+          <ac:spMkLst>
+            <pc:docMk/>
+            <pc:sldMk cId="4098487574" sldId="311"/>
+            <ac:spMk id="22" creationId="{884A93BB-F748-43F4-8DEB-5A3541B93C49}"/>
+          </ac:spMkLst>
+        </pc:spChg>
+        <pc:spChg chg="add mod">
+          <ac:chgData name="Cesar Augusto Lopez Gallego" userId="0dfa9112-9251-4882-b472-cf2dfcee09d1" providerId="ADAL" clId="{F3DF07A2-6BA1-431D-A078-C1C471A99DDE}" dt="2026-04-08T12:13:34.306" v="1183" actId="14100"/>
+          <ac:spMkLst>
+            <pc:docMk/>
+            <pc:sldMk cId="4098487574" sldId="311"/>
+            <ac:spMk id="26" creationId="{040E76A0-9681-43A2-A1D0-EECF02DF7E6A}"/>
+          </ac:spMkLst>
+        </pc:spChg>
+        <pc:cxnChg chg="add mod">
+          <ac:chgData name="Cesar Augusto Lopez Gallego" userId="0dfa9112-9251-4882-b472-cf2dfcee09d1" providerId="ADAL" clId="{F3DF07A2-6BA1-431D-A078-C1C471A99DDE}" dt="2026-04-08T12:11:38.696" v="1159" actId="14100"/>
+          <ac:cxnSpMkLst>
+            <pc:docMk/>
+            <pc:sldMk cId="4098487574" sldId="311"/>
+            <ac:cxnSpMk id="9" creationId="{EFA803EF-6CDD-4B3B-92D7-21100B1818C6}"/>
+          </ac:cxnSpMkLst>
+        </pc:cxnChg>
+        <pc:cxnChg chg="add">
+          <ac:chgData name="Cesar Augusto Lopez Gallego" userId="0dfa9112-9251-4882-b472-cf2dfcee09d1" providerId="ADAL" clId="{F3DF07A2-6BA1-431D-A078-C1C471A99DDE}" dt="2026-04-08T12:11:48.911" v="1161" actId="11529"/>
+          <ac:cxnSpMkLst>
+            <pc:docMk/>
+            <pc:sldMk cId="4098487574" sldId="311"/>
+            <ac:cxnSpMk id="20" creationId="{2E5CEE55-1408-4E0D-BD10-701FFC7C3EDF}"/>
+          </ac:cxnSpMkLst>
+        </pc:cxnChg>
+        <pc:cxnChg chg="add">
+          <ac:chgData name="Cesar Augusto Lopez Gallego" userId="0dfa9112-9251-4882-b472-cf2dfcee09d1" providerId="ADAL" clId="{F3DF07A2-6BA1-431D-A078-C1C471A99DDE}" dt="2026-04-08T12:12:46.360" v="1174" actId="11529"/>
+          <ac:cxnSpMkLst>
+            <pc:docMk/>
+            <pc:sldMk cId="4098487574" sldId="311"/>
+            <ac:cxnSpMk id="24" creationId="{8C0DC80D-C800-4016-B061-D50C4C0D5CB3}"/>
+          </ac:cxnSpMkLst>
+        </pc:cxnChg>
+        <pc:cxnChg chg="add">
+          <ac:chgData name="Cesar Augusto Lopez Gallego" userId="0dfa9112-9251-4882-b472-cf2dfcee09d1" providerId="ADAL" clId="{F3DF07A2-6BA1-431D-A078-C1C471A99DDE}" dt="2026-04-08T12:13:40.164" v="1184" actId="11529"/>
+          <ac:cxnSpMkLst>
+            <pc:docMk/>
+            <pc:sldMk cId="4098487574" sldId="311"/>
+            <ac:cxnSpMk id="28" creationId="{9044D1FF-7D81-4130-947A-16F39EAA0DBB}"/>
+          </ac:cxnSpMkLst>
+        </pc:cxnChg>
+      </pc:sldChg>
+      <pc:sldChg chg="addSp delSp modSp mod">
+        <pc:chgData name="Cesar Augusto Lopez Gallego" userId="0dfa9112-9251-4882-b472-cf2dfcee09d1" providerId="ADAL" clId="{F3DF07A2-6BA1-431D-A078-C1C471A99DDE}" dt="2026-04-08T11:57:13.080" v="962" actId="113"/>
+        <pc:sldMkLst>
+          <pc:docMk/>
+          <pc:sldMk cId="3769389719" sldId="313"/>
+        </pc:sldMkLst>
+        <pc:spChg chg="mod">
+          <ac:chgData name="Cesar Augusto Lopez Gallego" userId="0dfa9112-9251-4882-b472-cf2dfcee09d1" providerId="ADAL" clId="{F3DF07A2-6BA1-431D-A078-C1C471A99DDE}" dt="2026-04-08T11:57:13.080" v="962" actId="113"/>
+          <ac:spMkLst>
+            <pc:docMk/>
+            <pc:sldMk cId="3769389719" sldId="313"/>
+            <ac:spMk id="4" creationId="{ABAA8379-3D4F-49B9-85C2-279184A32E8E}"/>
+          </ac:spMkLst>
+        </pc:spChg>
+        <pc:spChg chg="add mod">
+          <ac:chgData name="Cesar Augusto Lopez Gallego" userId="0dfa9112-9251-4882-b472-cf2dfcee09d1" providerId="ADAL" clId="{F3DF07A2-6BA1-431D-A078-C1C471A99DDE}" dt="2026-04-08T11:28:10.431" v="468" actId="13926"/>
+          <ac:spMkLst>
+            <pc:docMk/>
+            <pc:sldMk cId="3769389719" sldId="313"/>
+            <ac:spMk id="6" creationId="{19F2E941-166E-4F70-B6B8-889B1AD7F38C}"/>
+          </ac:spMkLst>
+        </pc:spChg>
+        <pc:spChg chg="add del mod">
+          <ac:chgData name="Cesar Augusto Lopez Gallego" userId="0dfa9112-9251-4882-b472-cf2dfcee09d1" providerId="ADAL" clId="{F3DF07A2-6BA1-431D-A078-C1C471A99DDE}" dt="2026-04-08T11:25:39.807" v="430" actId="478"/>
+          <ac:spMkLst>
+            <pc:docMk/>
+            <pc:sldMk cId="3769389719" sldId="313"/>
+            <ac:spMk id="9" creationId="{E0CFC9ED-A29F-47A2-8BAC-5D8CB6DDDA4E}"/>
+          </ac:spMkLst>
+        </pc:spChg>
+        <pc:spChg chg="add mod">
+          <ac:chgData name="Cesar Augusto Lopez Gallego" userId="0dfa9112-9251-4882-b472-cf2dfcee09d1" providerId="ADAL" clId="{F3DF07A2-6BA1-431D-A078-C1C471A99DDE}" dt="2026-04-08T11:26:39.871" v="460" actId="404"/>
+          <ac:spMkLst>
+            <pc:docMk/>
+            <pc:sldMk cId="3769389719" sldId="313"/>
+            <ac:spMk id="12" creationId="{1FCEE48B-8ADA-4D10-ABEF-F19CDA252420}"/>
+          </ac:spMkLst>
+        </pc:spChg>
+        <pc:picChg chg="del mod">
+          <ac:chgData name="Cesar Augusto Lopez Gallego" userId="0dfa9112-9251-4882-b472-cf2dfcee09d1" providerId="ADAL" clId="{F3DF07A2-6BA1-431D-A078-C1C471A99DDE}" dt="2026-04-08T11:25:35.684" v="428" actId="478"/>
+          <ac:picMkLst>
+            <pc:docMk/>
+            <pc:sldMk cId="3769389719" sldId="313"/>
+            <ac:picMk id="5" creationId="{1F5E2949-D2CC-4FB1-8C76-9C17BA611859}"/>
+          </ac:picMkLst>
+        </pc:picChg>
+        <pc:picChg chg="add del mod">
+          <ac:chgData name="Cesar Augusto Lopez Gallego" userId="0dfa9112-9251-4882-b472-cf2dfcee09d1" providerId="ADAL" clId="{F3DF07A2-6BA1-431D-A078-C1C471A99DDE}" dt="2026-04-08T11:25:35.684" v="428" actId="478"/>
+          <ac:picMkLst>
+            <pc:docMk/>
+            <pc:sldMk cId="3769389719" sldId="313"/>
+            <ac:picMk id="8" creationId="{8B836193-E7B1-4DA1-9BC7-F2E1AFC99A86}"/>
+          </ac:picMkLst>
+        </pc:picChg>
+        <pc:picChg chg="add mod">
+          <ac:chgData name="Cesar Augusto Lopez Gallego" userId="0dfa9112-9251-4882-b472-cf2dfcee09d1" providerId="ADAL" clId="{F3DF07A2-6BA1-431D-A078-C1C471A99DDE}" dt="2026-04-08T11:25:48.293" v="433" actId="1076"/>
+          <ac:picMkLst>
+            <pc:docMk/>
+            <pc:sldMk cId="3769389719" sldId="313"/>
+            <ac:picMk id="11" creationId="{A17707C5-D7BD-4B4D-9F4E-0AD23817D043}"/>
+          </ac:picMkLst>
+        </pc:picChg>
+        <pc:picChg chg="add mod">
+          <ac:chgData name="Cesar Augusto Lopez Gallego" userId="0dfa9112-9251-4882-b472-cf2dfcee09d1" providerId="ADAL" clId="{F3DF07A2-6BA1-431D-A078-C1C471A99DDE}" dt="2026-04-08T11:42:26.035" v="794" actId="1076"/>
+          <ac:picMkLst>
+            <pc:docMk/>
+            <pc:sldMk cId="3769389719" sldId="313"/>
+            <ac:picMk id="13" creationId="{5421F90F-F853-486B-B12A-C12A1ECE7C24}"/>
+          </ac:picMkLst>
+        </pc:picChg>
       </pc:sldChg>
       <pc:sldChg chg="add">
         <pc:chgData name="Cesar Augusto Lopez Gallego" userId="0dfa9112-9251-4882-b472-cf2dfcee09d1" providerId="ADAL" clId="{F3DF07A2-6BA1-431D-A078-C1C471A99DDE}" dt="2026-04-07T12:00:49.810" v="16"/>
@@ -3642,6 +3808,21 @@
           <pc:docMk/>
           <pc:sldMk cId="2710980677" sldId="314"/>
         </pc:sldMkLst>
+      </pc:sldChg>
+      <pc:sldChg chg="modSp mod">
+        <pc:chgData name="Cesar Augusto Lopez Gallego" userId="0dfa9112-9251-4882-b472-cf2dfcee09d1" providerId="ADAL" clId="{F3DF07A2-6BA1-431D-A078-C1C471A99DDE}" dt="2026-04-08T12:05:10.931" v="1135" actId="20577"/>
+        <pc:sldMkLst>
+          <pc:docMk/>
+          <pc:sldMk cId="2626635672" sldId="315"/>
+        </pc:sldMkLst>
+        <pc:spChg chg="mod">
+          <ac:chgData name="Cesar Augusto Lopez Gallego" userId="0dfa9112-9251-4882-b472-cf2dfcee09d1" providerId="ADAL" clId="{F3DF07A2-6BA1-431D-A078-C1C471A99DDE}" dt="2026-04-08T12:05:10.931" v="1135" actId="20577"/>
+          <ac:spMkLst>
+            <pc:docMk/>
+            <pc:sldMk cId="2626635672" sldId="315"/>
+            <ac:spMk id="5" creationId="{BCEA23F5-CE36-4211-A746-CA1482C62824}"/>
+          </ac:spMkLst>
+        </pc:spChg>
       </pc:sldChg>
       <pc:sldChg chg="add">
         <pc:chgData name="Cesar Augusto Lopez Gallego" userId="0dfa9112-9251-4882-b472-cf2dfcee09d1" providerId="ADAL" clId="{F3DF07A2-6BA1-431D-A078-C1C471A99DDE}" dt="2026-04-07T11:59:55.206" v="13"/>
@@ -3743,6 +3924,97 @@
           </ac:spMkLst>
         </pc:spChg>
       </pc:sldChg>
+      <pc:sldChg chg="modSp mod">
+        <pc:chgData name="Cesar Augusto Lopez Gallego" userId="0dfa9112-9251-4882-b472-cf2dfcee09d1" providerId="ADAL" clId="{F3DF07A2-6BA1-431D-A078-C1C471A99DDE}" dt="2026-04-08T12:29:56.013" v="1430" actId="20577"/>
+        <pc:sldMkLst>
+          <pc:docMk/>
+          <pc:sldMk cId="2959916279" sldId="344"/>
+        </pc:sldMkLst>
+        <pc:spChg chg="mod">
+          <ac:chgData name="Cesar Augusto Lopez Gallego" userId="0dfa9112-9251-4882-b472-cf2dfcee09d1" providerId="ADAL" clId="{F3DF07A2-6BA1-431D-A078-C1C471A99DDE}" dt="2026-04-08T12:15:05.687" v="1187" actId="1076"/>
+          <ac:spMkLst>
+            <pc:docMk/>
+            <pc:sldMk cId="2959916279" sldId="344"/>
+            <ac:spMk id="9" creationId="{D6821C5A-AC45-4456-8D0A-BA2966CE9908}"/>
+          </ac:spMkLst>
+        </pc:spChg>
+        <pc:spChg chg="mod">
+          <ac:chgData name="Cesar Augusto Lopez Gallego" userId="0dfa9112-9251-4882-b472-cf2dfcee09d1" providerId="ADAL" clId="{F3DF07A2-6BA1-431D-A078-C1C471A99DDE}" dt="2026-04-08T12:29:56.013" v="1430" actId="20577"/>
+          <ac:spMkLst>
+            <pc:docMk/>
+            <pc:sldMk cId="2959916279" sldId="344"/>
+            <ac:spMk id="11" creationId="{531F6FBD-3889-41D1-8E91-FBF7CD591165}"/>
+          </ac:spMkLst>
+        </pc:spChg>
+        <pc:picChg chg="mod">
+          <ac:chgData name="Cesar Augusto Lopez Gallego" userId="0dfa9112-9251-4882-b472-cf2dfcee09d1" providerId="ADAL" clId="{F3DF07A2-6BA1-431D-A078-C1C471A99DDE}" dt="2026-04-08T12:15:00.434" v="1185" actId="1076"/>
+          <ac:picMkLst>
+            <pc:docMk/>
+            <pc:sldMk cId="2959916279" sldId="344"/>
+            <ac:picMk id="4" creationId="{F0CCE04C-F15B-4AC5-B340-426F983AA82F}"/>
+          </ac:picMkLst>
+        </pc:picChg>
+      </pc:sldChg>
+      <pc:sldChg chg="modSp mod">
+        <pc:chgData name="Cesar Augusto Lopez Gallego" userId="0dfa9112-9251-4882-b472-cf2dfcee09d1" providerId="ADAL" clId="{F3DF07A2-6BA1-431D-A078-C1C471A99DDE}" dt="2026-04-08T12:18:38.174" v="1255" actId="404"/>
+        <pc:sldMkLst>
+          <pc:docMk/>
+          <pc:sldMk cId="1422279637" sldId="351"/>
+        </pc:sldMkLst>
+        <pc:spChg chg="mod">
+          <ac:chgData name="Cesar Augusto Lopez Gallego" userId="0dfa9112-9251-4882-b472-cf2dfcee09d1" providerId="ADAL" clId="{F3DF07A2-6BA1-431D-A078-C1C471A99DDE}" dt="2026-04-08T12:18:38.174" v="1255" actId="404"/>
+          <ac:spMkLst>
+            <pc:docMk/>
+            <pc:sldMk cId="1422279637" sldId="351"/>
+            <ac:spMk id="7" creationId="{48A0B6F0-1EF6-40F1-A6A1-E5D911F0D077}"/>
+          </ac:spMkLst>
+        </pc:spChg>
+      </pc:sldChg>
+      <pc:sldChg chg="add">
+        <pc:chgData name="Cesar Augusto Lopez Gallego" userId="0dfa9112-9251-4882-b472-cf2dfcee09d1" providerId="ADAL" clId="{F3DF07A2-6BA1-431D-A078-C1C471A99DDE}" dt="2026-04-08T11:20:13.313" v="373"/>
+        <pc:sldMkLst>
+          <pc:docMk/>
+          <pc:sldMk cId="1748489983" sldId="353"/>
+        </pc:sldMkLst>
+      </pc:sldChg>
+      <pc:sldChg chg="del">
+        <pc:chgData name="Cesar Augusto Lopez Gallego" userId="0dfa9112-9251-4882-b472-cf2dfcee09d1" providerId="ADAL" clId="{F3DF07A2-6BA1-431D-A078-C1C471A99DDE}" dt="2026-04-08T11:20:10.301" v="372" actId="2696"/>
+        <pc:sldMkLst>
+          <pc:docMk/>
+          <pc:sldMk cId="2977100372" sldId="353"/>
+        </pc:sldMkLst>
+      </pc:sldChg>
+      <pc:sldChg chg="addSp delSp modSp mod">
+        <pc:chgData name="Cesar Augusto Lopez Gallego" userId="0dfa9112-9251-4882-b472-cf2dfcee09d1" providerId="ADAL" clId="{F3DF07A2-6BA1-431D-A078-C1C471A99DDE}" dt="2026-04-08T12:04:22.598" v="1110" actId="6549"/>
+        <pc:sldMkLst>
+          <pc:docMk/>
+          <pc:sldMk cId="808027135" sldId="358"/>
+        </pc:sldMkLst>
+        <pc:spChg chg="add mod">
+          <ac:chgData name="Cesar Augusto Lopez Gallego" userId="0dfa9112-9251-4882-b472-cf2dfcee09d1" providerId="ADAL" clId="{F3DF07A2-6BA1-431D-A078-C1C471A99DDE}" dt="2026-04-08T12:04:22.598" v="1110" actId="6549"/>
+          <ac:spMkLst>
+            <pc:docMk/>
+            <pc:sldMk cId="808027135" sldId="358"/>
+            <ac:spMk id="5" creationId="{1CC7339D-50B0-413A-ABE5-C379773AF4B5}"/>
+          </ac:spMkLst>
+        </pc:spChg>
+        <pc:picChg chg="del">
+          <ac:chgData name="Cesar Augusto Lopez Gallego" userId="0dfa9112-9251-4882-b472-cf2dfcee09d1" providerId="ADAL" clId="{F3DF07A2-6BA1-431D-A078-C1C471A99DDE}" dt="2026-04-08T11:39:05.742" v="774" actId="478"/>
+          <ac:picMkLst>
+            <pc:docMk/>
+            <pc:sldMk cId="808027135" sldId="358"/>
+            <ac:picMk id="4" creationId="{6280915E-F0C7-4604-B912-80A75232357A}"/>
+          </ac:picMkLst>
+        </pc:picChg>
+        <pc:picChg chg="add mod">
+          <ac:chgData name="Cesar Augusto Lopez Gallego" userId="0dfa9112-9251-4882-b472-cf2dfcee09d1" providerId="ADAL" clId="{F3DF07A2-6BA1-431D-A078-C1C471A99DDE}" dt="2026-04-08T12:03:42.170" v="1101" actId="1076"/>
+          <ac:picMkLst>
+            <pc:docMk/>
+            <pc:sldMk cId="808027135" sldId="358"/>
+            <ac:picMk id="1026" creationId="{15ACA91B-8D2E-475C-B60E-67EC16E49798}"/>
+          </ac:picMkLst>
+        </pc:picChg>
+      </pc:sldChg>
       <pc:sldChg chg="del">
         <pc:chgData name="Cesar Augusto Lopez Gallego" userId="0dfa9112-9251-4882-b472-cf2dfcee09d1" providerId="ADAL" clId="{F3DF07A2-6BA1-431D-A078-C1C471A99DDE}" dt="2026-04-07T12:00:25.622" v="14" actId="47"/>
         <pc:sldMkLst>
@@ -3824,12 +4096,114 @@
           </ac:graphicFrameMkLst>
         </pc:graphicFrameChg>
       </pc:sldChg>
+      <pc:sldChg chg="addSp delSp modSp add mod">
+        <pc:chgData name="Cesar Augusto Lopez Gallego" userId="0dfa9112-9251-4882-b472-cf2dfcee09d1" providerId="ADAL" clId="{F3DF07A2-6BA1-431D-A078-C1C471A99DDE}" dt="2026-04-08T11:55:53.378" v="931" actId="1076"/>
+        <pc:sldMkLst>
+          <pc:docMk/>
+          <pc:sldMk cId="1073201942" sldId="367"/>
+        </pc:sldMkLst>
+        <pc:spChg chg="del">
+          <ac:chgData name="Cesar Augusto Lopez Gallego" userId="0dfa9112-9251-4882-b472-cf2dfcee09d1" providerId="ADAL" clId="{F3DF07A2-6BA1-431D-A078-C1C471A99DDE}" dt="2026-04-08T11:25:21.552" v="425" actId="478"/>
+          <ac:spMkLst>
+            <pc:docMk/>
+            <pc:sldMk cId="1073201942" sldId="367"/>
+            <ac:spMk id="4" creationId="{ABAA8379-3D4F-49B9-85C2-279184A32E8E}"/>
+          </ac:spMkLst>
+        </pc:spChg>
+        <pc:spChg chg="del">
+          <ac:chgData name="Cesar Augusto Lopez Gallego" userId="0dfa9112-9251-4882-b472-cf2dfcee09d1" providerId="ADAL" clId="{F3DF07A2-6BA1-431D-A078-C1C471A99DDE}" dt="2026-04-08T11:25:21.552" v="425" actId="478"/>
+          <ac:spMkLst>
+            <pc:docMk/>
+            <pc:sldMk cId="1073201942" sldId="367"/>
+            <ac:spMk id="6" creationId="{19F2E941-166E-4F70-B6B8-889B1AD7F38C}"/>
+          </ac:spMkLst>
+        </pc:spChg>
+        <pc:spChg chg="mod">
+          <ac:chgData name="Cesar Augusto Lopez Gallego" userId="0dfa9112-9251-4882-b472-cf2dfcee09d1" providerId="ADAL" clId="{F3DF07A2-6BA1-431D-A078-C1C471A99DDE}" dt="2026-04-08T11:25:27.502" v="426" actId="1076"/>
+          <ac:spMkLst>
+            <pc:docMk/>
+            <pc:sldMk cId="1073201942" sldId="367"/>
+            <ac:spMk id="9" creationId="{E0CFC9ED-A29F-47A2-8BAC-5D8CB6DDDA4E}"/>
+          </ac:spMkLst>
+        </pc:spChg>
+        <pc:spChg chg="add mod">
+          <ac:chgData name="Cesar Augusto Lopez Gallego" userId="0dfa9112-9251-4882-b472-cf2dfcee09d1" providerId="ADAL" clId="{F3DF07A2-6BA1-431D-A078-C1C471A99DDE}" dt="2026-04-08T11:53:51.910" v="922" actId="1076"/>
+          <ac:spMkLst>
+            <pc:docMk/>
+            <pc:sldMk cId="1073201942" sldId="367"/>
+            <ac:spMk id="10" creationId="{AB63E22A-07B2-40D6-8F48-5B25D5C3DE43}"/>
+          </ac:spMkLst>
+        </pc:spChg>
+        <pc:spChg chg="add mod">
+          <ac:chgData name="Cesar Augusto Lopez Gallego" userId="0dfa9112-9251-4882-b472-cf2dfcee09d1" providerId="ADAL" clId="{F3DF07A2-6BA1-431D-A078-C1C471A99DDE}" dt="2026-04-08T11:54:24.058" v="930" actId="1076"/>
+          <ac:spMkLst>
+            <pc:docMk/>
+            <pc:sldMk cId="1073201942" sldId="367"/>
+            <ac:spMk id="12" creationId="{54D11CFB-957C-4FB8-BC72-C13953381A8F}"/>
+          </ac:spMkLst>
+        </pc:spChg>
+        <pc:picChg chg="del mod">
+          <ac:chgData name="Cesar Augusto Lopez Gallego" userId="0dfa9112-9251-4882-b472-cf2dfcee09d1" providerId="ADAL" clId="{F3DF07A2-6BA1-431D-A078-C1C471A99DDE}" dt="2026-04-08T11:27:42.408" v="461" actId="21"/>
+          <ac:picMkLst>
+            <pc:docMk/>
+            <pc:sldMk cId="1073201942" sldId="367"/>
+            <ac:picMk id="5" creationId="{1F5E2949-D2CC-4FB1-8C76-9C17BA611859}"/>
+          </ac:picMkLst>
+        </pc:picChg>
+        <pc:picChg chg="mod">
+          <ac:chgData name="Cesar Augusto Lopez Gallego" userId="0dfa9112-9251-4882-b472-cf2dfcee09d1" providerId="ADAL" clId="{F3DF07A2-6BA1-431D-A078-C1C471A99DDE}" dt="2026-04-08T11:55:53.378" v="931" actId="1076"/>
+          <ac:picMkLst>
+            <pc:docMk/>
+            <pc:sldMk cId="1073201942" sldId="367"/>
+            <ac:picMk id="8" creationId="{8B836193-E7B1-4DA1-9BC7-F2E1AFC99A86}"/>
+          </ac:picMkLst>
+        </pc:picChg>
+        <pc:picChg chg="del">
+          <ac:chgData name="Cesar Augusto Lopez Gallego" userId="0dfa9112-9251-4882-b472-cf2dfcee09d1" providerId="ADAL" clId="{F3DF07A2-6BA1-431D-A078-C1C471A99DDE}" dt="2026-04-08T11:25:21.552" v="425" actId="478"/>
+          <ac:picMkLst>
+            <pc:docMk/>
+            <pc:sldMk cId="1073201942" sldId="367"/>
+            <ac:picMk id="11" creationId="{A17707C5-D7BD-4B4D-9F4E-0AD23817D043}"/>
+          </ac:picMkLst>
+        </pc:picChg>
+      </pc:sldChg>
       <pc:sldChg chg="new del">
         <pc:chgData name="Cesar Augusto Lopez Gallego" userId="0dfa9112-9251-4882-b472-cf2dfcee09d1" providerId="ADAL" clId="{F3DF07A2-6BA1-431D-A078-C1C471A99DDE}" dt="2026-04-07T12:15:17.515" v="190" actId="47"/>
         <pc:sldMkLst>
           <pc:docMk/>
           <pc:sldMk cId="2568902502" sldId="367"/>
         </pc:sldMkLst>
+      </pc:sldChg>
+      <pc:sldChg chg="addSp delSp modSp new mod">
+        <pc:chgData name="Cesar Augusto Lopez Gallego" userId="0dfa9112-9251-4882-b472-cf2dfcee09d1" providerId="ADAL" clId="{F3DF07A2-6BA1-431D-A078-C1C471A99DDE}" dt="2026-04-08T12:04:05.118" v="1107" actId="403"/>
+        <pc:sldMkLst>
+          <pc:docMk/>
+          <pc:sldMk cId="253266768" sldId="368"/>
+        </pc:sldMkLst>
+        <pc:spChg chg="add mod">
+          <ac:chgData name="Cesar Augusto Lopez Gallego" userId="0dfa9112-9251-4882-b472-cf2dfcee09d1" providerId="ADAL" clId="{F3DF07A2-6BA1-431D-A078-C1C471A99DDE}" dt="2026-04-08T11:43:07.173" v="796"/>
+          <ac:spMkLst>
+            <pc:docMk/>
+            <pc:sldMk cId="253266768" sldId="368"/>
+            <ac:spMk id="2" creationId="{29F9292A-145B-41E7-B5FC-919E280565E6}"/>
+          </ac:spMkLst>
+        </pc:spChg>
+        <pc:spChg chg="add mod">
+          <ac:chgData name="Cesar Augusto Lopez Gallego" userId="0dfa9112-9251-4882-b472-cf2dfcee09d1" providerId="ADAL" clId="{F3DF07A2-6BA1-431D-A078-C1C471A99DDE}" dt="2026-04-08T12:04:05.118" v="1107" actId="403"/>
+          <ac:spMkLst>
+            <pc:docMk/>
+            <pc:sldMk cId="253266768" sldId="368"/>
+            <ac:spMk id="4" creationId="{F5FE530D-B654-42E2-8CA0-BDB9A2F75086}"/>
+          </ac:spMkLst>
+        </pc:spChg>
+        <pc:spChg chg="add del mod">
+          <ac:chgData name="Cesar Augusto Lopez Gallego" userId="0dfa9112-9251-4882-b472-cf2dfcee09d1" providerId="ADAL" clId="{F3DF07A2-6BA1-431D-A078-C1C471A99DDE}" dt="2026-04-08T11:50:03.090" v="913" actId="478"/>
+          <ac:spMkLst>
+            <pc:docMk/>
+            <pc:sldMk cId="253266768" sldId="368"/>
+            <ac:spMk id="6" creationId="{C47E4BC6-7194-4B3C-A219-EC8022B7F756}"/>
+          </ac:spMkLst>
+        </pc:spChg>
       </pc:sldChg>
       <pc:sldChg chg="del">
         <pc:chgData name="Cesar Augusto Lopez Gallego" userId="0dfa9112-9251-4882-b472-cf2dfcee09d1" providerId="ADAL" clId="{F3DF07A2-6BA1-431D-A078-C1C471A99DDE}" dt="2026-04-07T11:57:59.125" v="1" actId="47"/>
@@ -3844,6 +4218,91 @@
           <pc:docMk/>
           <pc:sldMk cId="2977865576" sldId="368"/>
         </pc:sldMkLst>
+      </pc:sldChg>
+      <pc:sldChg chg="delSp modSp add mod">
+        <pc:chgData name="Cesar Augusto Lopez Gallego" userId="0dfa9112-9251-4882-b472-cf2dfcee09d1" providerId="ADAL" clId="{F3DF07A2-6BA1-431D-A078-C1C471A99DDE}" dt="2026-04-08T12:04:10.995" v="1109" actId="14100"/>
+        <pc:sldMkLst>
+          <pc:docMk/>
+          <pc:sldMk cId="1288681944" sldId="369"/>
+        </pc:sldMkLst>
+        <pc:spChg chg="del">
+          <ac:chgData name="Cesar Augusto Lopez Gallego" userId="0dfa9112-9251-4882-b472-cf2dfcee09d1" providerId="ADAL" clId="{F3DF07A2-6BA1-431D-A078-C1C471A99DDE}" dt="2026-04-08T11:49:17.006" v="908" actId="478"/>
+          <ac:spMkLst>
+            <pc:docMk/>
+            <pc:sldMk cId="1288681944" sldId="369"/>
+            <ac:spMk id="4" creationId="{F5FE530D-B654-42E2-8CA0-BDB9A2F75086}"/>
+          </ac:spMkLst>
+        </pc:spChg>
+        <pc:spChg chg="mod">
+          <ac:chgData name="Cesar Augusto Lopez Gallego" userId="0dfa9112-9251-4882-b472-cf2dfcee09d1" providerId="ADAL" clId="{F3DF07A2-6BA1-431D-A078-C1C471A99DDE}" dt="2026-04-08T12:04:10.995" v="1109" actId="14100"/>
+          <ac:spMkLst>
+            <pc:docMk/>
+            <pc:sldMk cId="1288681944" sldId="369"/>
+            <ac:spMk id="6" creationId="{C47E4BC6-7194-4B3C-A219-EC8022B7F756}"/>
+          </ac:spMkLst>
+        </pc:spChg>
+      </pc:sldChg>
+      <pc:sldChg chg="addSp modSp new mod">
+        <pc:chgData name="Cesar Augusto Lopez Gallego" userId="0dfa9112-9251-4882-b472-cf2dfcee09d1" providerId="ADAL" clId="{F3DF07A2-6BA1-431D-A078-C1C471A99DDE}" dt="2026-04-08T12:17:34.709" v="1253" actId="1076"/>
+        <pc:sldMkLst>
+          <pc:docMk/>
+          <pc:sldMk cId="967725097" sldId="370"/>
+        </pc:sldMkLst>
+        <pc:spChg chg="add mod">
+          <ac:chgData name="Cesar Augusto Lopez Gallego" userId="0dfa9112-9251-4882-b472-cf2dfcee09d1" providerId="ADAL" clId="{F3DF07A2-6BA1-431D-A078-C1C471A99DDE}" dt="2026-04-08T12:15:50.390" v="1229" actId="20577"/>
+          <ac:spMkLst>
+            <pc:docMk/>
+            <pc:sldMk cId="967725097" sldId="370"/>
+            <ac:spMk id="2" creationId="{53427CE9-077C-48E8-9DF4-7233B2C94763}"/>
+          </ac:spMkLst>
+        </pc:spChg>
+        <pc:spChg chg="add mod">
+          <ac:chgData name="Cesar Augusto Lopez Gallego" userId="0dfa9112-9251-4882-b472-cf2dfcee09d1" providerId="ADAL" clId="{F3DF07A2-6BA1-431D-A078-C1C471A99DDE}" dt="2026-04-08T12:17:34.709" v="1253" actId="1076"/>
+          <ac:spMkLst>
+            <pc:docMk/>
+            <pc:sldMk cId="967725097" sldId="370"/>
+            <ac:spMk id="4" creationId="{075A0D92-90DB-4CAD-A05D-8E49ACBFE3B1}"/>
+          </ac:spMkLst>
+        </pc:spChg>
+      </pc:sldChg>
+      <pc:sldChg chg="addSp delSp modSp new mod">
+        <pc:chgData name="Cesar Augusto Lopez Gallego" userId="0dfa9112-9251-4882-b472-cf2dfcee09d1" providerId="ADAL" clId="{F3DF07A2-6BA1-431D-A078-C1C471A99DDE}" dt="2026-04-08T12:25:34.529" v="1425"/>
+        <pc:sldMkLst>
+          <pc:docMk/>
+          <pc:sldMk cId="1489446861" sldId="371"/>
+        </pc:sldMkLst>
+        <pc:spChg chg="del">
+          <ac:chgData name="Cesar Augusto Lopez Gallego" userId="0dfa9112-9251-4882-b472-cf2dfcee09d1" providerId="ADAL" clId="{F3DF07A2-6BA1-431D-A078-C1C471A99DDE}" dt="2026-04-08T12:19:14.466" v="1257" actId="478"/>
+          <ac:spMkLst>
+            <pc:docMk/>
+            <pc:sldMk cId="1489446861" sldId="371"/>
+            <ac:spMk id="2" creationId="{72A7FD01-583E-4755-A756-A64A303FCD3E}"/>
+          </ac:spMkLst>
+        </pc:spChg>
+        <pc:spChg chg="del">
+          <ac:chgData name="Cesar Augusto Lopez Gallego" userId="0dfa9112-9251-4882-b472-cf2dfcee09d1" providerId="ADAL" clId="{F3DF07A2-6BA1-431D-A078-C1C471A99DDE}" dt="2026-04-08T12:19:14.466" v="1257" actId="478"/>
+          <ac:spMkLst>
+            <pc:docMk/>
+            <pc:sldMk cId="1489446861" sldId="371"/>
+            <ac:spMk id="3" creationId="{F8F5DF4A-D00A-45EC-81A4-6CC8FF9DA845}"/>
+          </ac:spMkLst>
+        </pc:spChg>
+        <pc:spChg chg="add mod">
+          <ac:chgData name="Cesar Augusto Lopez Gallego" userId="0dfa9112-9251-4882-b472-cf2dfcee09d1" providerId="ADAL" clId="{F3DF07A2-6BA1-431D-A078-C1C471A99DDE}" dt="2026-04-08T12:19:24.053" v="1269" actId="20577"/>
+          <ac:spMkLst>
+            <pc:docMk/>
+            <pc:sldMk cId="1489446861" sldId="371"/>
+            <ac:spMk id="4" creationId="{3B93B27B-A88B-4D6F-9ED4-9E1A1F08BCB4}"/>
+          </ac:spMkLst>
+        </pc:spChg>
+        <pc:spChg chg="add mod">
+          <ac:chgData name="Cesar Augusto Lopez Gallego" userId="0dfa9112-9251-4882-b472-cf2dfcee09d1" providerId="ADAL" clId="{F3DF07A2-6BA1-431D-A078-C1C471A99DDE}" dt="2026-04-08T12:25:34.529" v="1425"/>
+          <ac:spMkLst>
+            <pc:docMk/>
+            <pc:sldMk cId="1489446861" sldId="371"/>
+            <ac:spMk id="6" creationId="{82E1F28B-AD52-46D2-91AA-E1E5F0983C88}"/>
+          </ac:spMkLst>
+        </pc:spChg>
       </pc:sldChg>
     </pc:docChg>
   </pc:docChgLst>
@@ -9296,6 +9755,440 @@
 </dgm:styleDef>
 </file>
 
+<file path=ppt/notesMasters/notesMaster1.xml><?xml version="1.0" encoding="utf-8"?>
+<p:notesMaster xmlns:a="http://schemas.openxmlformats.org/drawingml/2006/main" xmlns:r="http://schemas.openxmlformats.org/officeDocument/2006/relationships" xmlns:p="http://schemas.openxmlformats.org/presentationml/2006/main">
+  <p:cSld>
+    <p:bg>
+      <p:bgRef idx="1001">
+        <a:schemeClr val="bg1"/>
+      </p:bgRef>
+    </p:bg>
+    <p:spTree>
+      <p:nvGrpSpPr>
+        <p:cNvPr id="1" name=""/>
+        <p:cNvGrpSpPr/>
+        <p:nvPr/>
+      </p:nvGrpSpPr>
+      <p:grpSpPr>
+        <a:xfrm>
+          <a:off x="0" y="0"/>
+          <a:ext cx="0" cy="0"/>
+          <a:chOff x="0" y="0"/>
+          <a:chExt cx="0" cy="0"/>
+        </a:xfrm>
+      </p:grpSpPr>
+      <p:sp>
+        <p:nvSpPr>
+          <p:cNvPr id="2" name="Marcador de encabezado 1"/>
+          <p:cNvSpPr>
+            <a:spLocks noGrp="1"/>
+          </p:cNvSpPr>
+          <p:nvPr>
+            <p:ph type="hdr" sz="quarter"/>
+          </p:nvPr>
+        </p:nvSpPr>
+        <p:spPr>
+          <a:xfrm>
+            <a:off x="0" y="0"/>
+            <a:ext cx="2971800" cy="458788"/>
+          </a:xfrm>
+          <a:prstGeom prst="rect">
+            <a:avLst/>
+          </a:prstGeom>
+        </p:spPr>
+        <p:txBody>
+          <a:bodyPr vert="horz" lIns="91440" tIns="45720" rIns="91440" bIns="45720" rtlCol="0"/>
+          <a:lstStyle>
+            <a:lvl1pPr algn="l">
+              <a:defRPr sz="1200"/>
+            </a:lvl1pPr>
+          </a:lstStyle>
+          <a:p>
+            <a:endParaRPr lang="es-419"/>
+          </a:p>
+        </p:txBody>
+      </p:sp>
+      <p:sp>
+        <p:nvSpPr>
+          <p:cNvPr id="3" name="Marcador de fecha 2"/>
+          <p:cNvSpPr>
+            <a:spLocks noGrp="1"/>
+          </p:cNvSpPr>
+          <p:nvPr>
+            <p:ph type="dt" idx="1"/>
+          </p:nvPr>
+        </p:nvSpPr>
+        <p:spPr>
+          <a:xfrm>
+            <a:off x="3884613" y="0"/>
+            <a:ext cx="2971800" cy="458788"/>
+          </a:xfrm>
+          <a:prstGeom prst="rect">
+            <a:avLst/>
+          </a:prstGeom>
+        </p:spPr>
+        <p:txBody>
+          <a:bodyPr vert="horz" lIns="91440" tIns="45720" rIns="91440" bIns="45720" rtlCol="0"/>
+          <a:lstStyle>
+            <a:lvl1pPr algn="r">
+              <a:defRPr sz="1200"/>
+            </a:lvl1pPr>
+          </a:lstStyle>
+          <a:p>
+            <a:fld id="{CCA65693-5799-4CFB-871D-82DD9DDF31BB}" type="datetimeFigureOut">
+              <a:rPr lang="es-419" smtClean="0"/>
+              <a:t>8/4/2026</a:t>
+            </a:fld>
+            <a:endParaRPr lang="es-419"/>
+          </a:p>
+        </p:txBody>
+      </p:sp>
+      <p:sp>
+        <p:nvSpPr>
+          <p:cNvPr id="4" name="Marcador de imagen de diapositiva 3"/>
+          <p:cNvSpPr>
+            <a:spLocks noGrp="1" noRot="1" noChangeAspect="1"/>
+          </p:cNvSpPr>
+          <p:nvPr>
+            <p:ph type="sldImg" idx="2"/>
+          </p:nvPr>
+        </p:nvSpPr>
+        <p:spPr>
+          <a:xfrm>
+            <a:off x="685800" y="1143000"/>
+            <a:ext cx="5486400" cy="3086100"/>
+          </a:xfrm>
+          <a:prstGeom prst="rect">
+            <a:avLst/>
+          </a:prstGeom>
+          <a:noFill/>
+          <a:ln w="12700">
+            <a:solidFill>
+              <a:prstClr val="black"/>
+            </a:solidFill>
+          </a:ln>
+        </p:spPr>
+        <p:txBody>
+          <a:bodyPr vert="horz" lIns="91440" tIns="45720" rIns="91440" bIns="45720" rtlCol="0" anchor="ctr"/>
+          <a:lstStyle/>
+          <a:p>
+            <a:endParaRPr lang="es-419"/>
+          </a:p>
+        </p:txBody>
+      </p:sp>
+      <p:sp>
+        <p:nvSpPr>
+          <p:cNvPr id="5" name="Marcador de notas 4"/>
+          <p:cNvSpPr>
+            <a:spLocks noGrp="1"/>
+          </p:cNvSpPr>
+          <p:nvPr>
+            <p:ph type="body" sz="quarter" idx="3"/>
+          </p:nvPr>
+        </p:nvSpPr>
+        <p:spPr>
+          <a:xfrm>
+            <a:off x="685800" y="4400550"/>
+            <a:ext cx="5486400" cy="3600450"/>
+          </a:xfrm>
+          <a:prstGeom prst="rect">
+            <a:avLst/>
+          </a:prstGeom>
+        </p:spPr>
+        <p:txBody>
+          <a:bodyPr vert="horz" lIns="91440" tIns="45720" rIns="91440" bIns="45720" rtlCol="0"/>
+          <a:lstStyle/>
+          <a:p>
+            <a:pPr lvl="0"/>
+            <a:r>
+              <a:rPr lang="es-ES"/>
+              <a:t>Haga clic para modificar los estilos de texto del patrón</a:t>
+            </a:r>
+          </a:p>
+          <a:p>
+            <a:pPr lvl="1"/>
+            <a:r>
+              <a:rPr lang="es-ES"/>
+              <a:t>Segundo nivel</a:t>
+            </a:r>
+          </a:p>
+          <a:p>
+            <a:pPr lvl="2"/>
+            <a:r>
+              <a:rPr lang="es-ES"/>
+              <a:t>Tercer nivel</a:t>
+            </a:r>
+          </a:p>
+          <a:p>
+            <a:pPr lvl="3"/>
+            <a:r>
+              <a:rPr lang="es-ES"/>
+              <a:t>Cuarto nivel</a:t>
+            </a:r>
+          </a:p>
+          <a:p>
+            <a:pPr lvl="4"/>
+            <a:r>
+              <a:rPr lang="es-ES"/>
+              <a:t>Quinto nivel</a:t>
+            </a:r>
+            <a:endParaRPr lang="es-419"/>
+          </a:p>
+        </p:txBody>
+      </p:sp>
+      <p:sp>
+        <p:nvSpPr>
+          <p:cNvPr id="6" name="Marcador de pie de página 5"/>
+          <p:cNvSpPr>
+            <a:spLocks noGrp="1"/>
+          </p:cNvSpPr>
+          <p:nvPr>
+            <p:ph type="ftr" sz="quarter" idx="4"/>
+          </p:nvPr>
+        </p:nvSpPr>
+        <p:spPr>
+          <a:xfrm>
+            <a:off x="0" y="8685213"/>
+            <a:ext cx="2971800" cy="458787"/>
+          </a:xfrm>
+          <a:prstGeom prst="rect">
+            <a:avLst/>
+          </a:prstGeom>
+        </p:spPr>
+        <p:txBody>
+          <a:bodyPr vert="horz" lIns="91440" tIns="45720" rIns="91440" bIns="45720" rtlCol="0" anchor="b"/>
+          <a:lstStyle>
+            <a:lvl1pPr algn="l">
+              <a:defRPr sz="1200"/>
+            </a:lvl1pPr>
+          </a:lstStyle>
+          <a:p>
+            <a:endParaRPr lang="es-419"/>
+          </a:p>
+        </p:txBody>
+      </p:sp>
+      <p:sp>
+        <p:nvSpPr>
+          <p:cNvPr id="7" name="Marcador de número de diapositiva 6"/>
+          <p:cNvSpPr>
+            <a:spLocks noGrp="1"/>
+          </p:cNvSpPr>
+          <p:nvPr>
+            <p:ph type="sldNum" sz="quarter" idx="5"/>
+          </p:nvPr>
+        </p:nvSpPr>
+        <p:spPr>
+          <a:xfrm>
+            <a:off x="3884613" y="8685213"/>
+            <a:ext cx="2971800" cy="458787"/>
+          </a:xfrm>
+          <a:prstGeom prst="rect">
+            <a:avLst/>
+          </a:prstGeom>
+        </p:spPr>
+        <p:txBody>
+          <a:bodyPr vert="horz" lIns="91440" tIns="45720" rIns="91440" bIns="45720" rtlCol="0" anchor="b"/>
+          <a:lstStyle>
+            <a:lvl1pPr algn="r">
+              <a:defRPr sz="1200"/>
+            </a:lvl1pPr>
+          </a:lstStyle>
+          <a:p>
+            <a:fld id="{31C31D06-F856-4F43-925B-995799FE3431}" type="slidenum">
+              <a:rPr lang="es-419" smtClean="0"/>
+              <a:t>‹Nº›</a:t>
+            </a:fld>
+            <a:endParaRPr lang="es-419"/>
+          </a:p>
+        </p:txBody>
+      </p:sp>
+    </p:spTree>
+    <p:extLst>
+      <p:ext uri="{BB962C8B-B14F-4D97-AF65-F5344CB8AC3E}">
+        <p14:creationId xmlns:p14="http://schemas.microsoft.com/office/powerpoint/2010/main" val="93721269"/>
+      </p:ext>
+    </p:extLst>
+  </p:cSld>
+  <p:clrMap bg1="lt1" tx1="dk1" bg2="lt2" tx2="dk2" accent1="accent1" accent2="accent2" accent3="accent3" accent4="accent4" accent5="accent5" accent6="accent6" hlink="hlink" folHlink="folHlink"/>
+  <p:notesStyle>
+    <a:lvl1pPr marL="0" algn="l" defTabSz="914400" rtl="0" eaLnBrk="1" latinLnBrk="0" hangingPunct="1">
+      <a:defRPr sz="1200" kern="1200">
+        <a:solidFill>
+          <a:schemeClr val="tx1"/>
+        </a:solidFill>
+        <a:latin typeface="+mn-lt"/>
+        <a:ea typeface="+mn-ea"/>
+        <a:cs typeface="+mn-cs"/>
+      </a:defRPr>
+    </a:lvl1pPr>
+    <a:lvl2pPr marL="457200" algn="l" defTabSz="914400" rtl="0" eaLnBrk="1" latinLnBrk="0" hangingPunct="1">
+      <a:defRPr sz="1200" kern="1200">
+        <a:solidFill>
+          <a:schemeClr val="tx1"/>
+        </a:solidFill>
+        <a:latin typeface="+mn-lt"/>
+        <a:ea typeface="+mn-ea"/>
+        <a:cs typeface="+mn-cs"/>
+      </a:defRPr>
+    </a:lvl2pPr>
+    <a:lvl3pPr marL="914400" algn="l" defTabSz="914400" rtl="0" eaLnBrk="1" latinLnBrk="0" hangingPunct="1">
+      <a:defRPr sz="1200" kern="1200">
+        <a:solidFill>
+          <a:schemeClr val="tx1"/>
+        </a:solidFill>
+        <a:latin typeface="+mn-lt"/>
+        <a:ea typeface="+mn-ea"/>
+        <a:cs typeface="+mn-cs"/>
+      </a:defRPr>
+    </a:lvl3pPr>
+    <a:lvl4pPr marL="1371600" algn="l" defTabSz="914400" rtl="0" eaLnBrk="1" latinLnBrk="0" hangingPunct="1">
+      <a:defRPr sz="1200" kern="1200">
+        <a:solidFill>
+          <a:schemeClr val="tx1"/>
+        </a:solidFill>
+        <a:latin typeface="+mn-lt"/>
+        <a:ea typeface="+mn-ea"/>
+        <a:cs typeface="+mn-cs"/>
+      </a:defRPr>
+    </a:lvl4pPr>
+    <a:lvl5pPr marL="1828800" algn="l" defTabSz="914400" rtl="0" eaLnBrk="1" latinLnBrk="0" hangingPunct="1">
+      <a:defRPr sz="1200" kern="1200">
+        <a:solidFill>
+          <a:schemeClr val="tx1"/>
+        </a:solidFill>
+        <a:latin typeface="+mn-lt"/>
+        <a:ea typeface="+mn-ea"/>
+        <a:cs typeface="+mn-cs"/>
+      </a:defRPr>
+    </a:lvl5pPr>
+    <a:lvl6pPr marL="2286000" algn="l" defTabSz="914400" rtl="0" eaLnBrk="1" latinLnBrk="0" hangingPunct="1">
+      <a:defRPr sz="1200" kern="1200">
+        <a:solidFill>
+          <a:schemeClr val="tx1"/>
+        </a:solidFill>
+        <a:latin typeface="+mn-lt"/>
+        <a:ea typeface="+mn-ea"/>
+        <a:cs typeface="+mn-cs"/>
+      </a:defRPr>
+    </a:lvl6pPr>
+    <a:lvl7pPr marL="2743200" algn="l" defTabSz="914400" rtl="0" eaLnBrk="1" latinLnBrk="0" hangingPunct="1">
+      <a:defRPr sz="1200" kern="1200">
+        <a:solidFill>
+          <a:schemeClr val="tx1"/>
+        </a:solidFill>
+        <a:latin typeface="+mn-lt"/>
+        <a:ea typeface="+mn-ea"/>
+        <a:cs typeface="+mn-cs"/>
+      </a:defRPr>
+    </a:lvl7pPr>
+    <a:lvl8pPr marL="3200400" algn="l" defTabSz="914400" rtl="0" eaLnBrk="1" latinLnBrk="0" hangingPunct="1">
+      <a:defRPr sz="1200" kern="1200">
+        <a:solidFill>
+          <a:schemeClr val="tx1"/>
+        </a:solidFill>
+        <a:latin typeface="+mn-lt"/>
+        <a:ea typeface="+mn-ea"/>
+        <a:cs typeface="+mn-cs"/>
+      </a:defRPr>
+    </a:lvl8pPr>
+    <a:lvl9pPr marL="3657600" algn="l" defTabSz="914400" rtl="0" eaLnBrk="1" latinLnBrk="0" hangingPunct="1">
+      <a:defRPr sz="1200" kern="1200">
+        <a:solidFill>
+          <a:schemeClr val="tx1"/>
+        </a:solidFill>
+        <a:latin typeface="+mn-lt"/>
+        <a:ea typeface="+mn-ea"/>
+        <a:cs typeface="+mn-cs"/>
+      </a:defRPr>
+    </a:lvl9pPr>
+  </p:notesStyle>
+</p:notesMaster>
+</file>
+
+<file path=ppt/notesSlides/notesSlide1.xml><?xml version="1.0" encoding="utf-8"?>
+<p:notes xmlns:a="http://schemas.openxmlformats.org/drawingml/2006/main" xmlns:r="http://schemas.openxmlformats.org/officeDocument/2006/relationships" xmlns:p="http://schemas.openxmlformats.org/presentationml/2006/main">
+  <p:cSld>
+    <p:spTree>
+      <p:nvGrpSpPr>
+        <p:cNvPr id="1" name=""/>
+        <p:cNvGrpSpPr/>
+        <p:nvPr/>
+      </p:nvGrpSpPr>
+      <p:grpSpPr>
+        <a:xfrm>
+          <a:off x="0" y="0"/>
+          <a:ext cx="0" cy="0"/>
+          <a:chOff x="0" y="0"/>
+          <a:chExt cx="0" cy="0"/>
+        </a:xfrm>
+      </p:grpSpPr>
+      <p:sp>
+        <p:nvSpPr>
+          <p:cNvPr id="2" name="Marcador de imagen de diapositiva 1"/>
+          <p:cNvSpPr>
+            <a:spLocks noGrp="1" noRot="1" noChangeAspect="1"/>
+          </p:cNvSpPr>
+          <p:nvPr>
+            <p:ph type="sldImg"/>
+          </p:nvPr>
+        </p:nvSpPr>
+        <p:spPr/>
+      </p:sp>
+      <p:sp>
+        <p:nvSpPr>
+          <p:cNvPr id="3" name="Marcador de notas 2"/>
+          <p:cNvSpPr>
+            <a:spLocks noGrp="1"/>
+          </p:cNvSpPr>
+          <p:nvPr>
+            <p:ph type="body" idx="1"/>
+          </p:nvPr>
+        </p:nvSpPr>
+        <p:spPr/>
+        <p:txBody>
+          <a:bodyPr/>
+          <a:lstStyle/>
+          <a:p>
+            <a:endParaRPr lang="es-419" dirty="0"/>
+          </a:p>
+        </p:txBody>
+      </p:sp>
+      <p:sp>
+        <p:nvSpPr>
+          <p:cNvPr id="4" name="Marcador de número de diapositiva 3"/>
+          <p:cNvSpPr>
+            <a:spLocks noGrp="1"/>
+          </p:cNvSpPr>
+          <p:nvPr>
+            <p:ph type="sldNum" sz="quarter" idx="5"/>
+          </p:nvPr>
+        </p:nvSpPr>
+        <p:spPr/>
+        <p:txBody>
+          <a:bodyPr/>
+          <a:lstStyle/>
+          <a:p>
+            <a:fld id="{31C31D06-F856-4F43-925B-995799FE3431}" type="slidenum">
+              <a:rPr lang="es-419" smtClean="0"/>
+              <a:t>21</a:t>
+            </a:fld>
+            <a:endParaRPr lang="es-419"/>
+          </a:p>
+        </p:txBody>
+      </p:sp>
+    </p:spTree>
+    <p:extLst>
+      <p:ext uri="{BB962C8B-B14F-4D97-AF65-F5344CB8AC3E}">
+        <p14:creationId xmlns:p14="http://schemas.microsoft.com/office/powerpoint/2010/main" val="807572689"/>
+      </p:ext>
+    </p:extLst>
+  </p:cSld>
+  <p:clrMapOvr>
+    <a:masterClrMapping/>
+  </p:clrMapOvr>
+</p:notes>
+</file>
+
 <file path=ppt/slideLayouts/slideLayout1.xml><?xml version="1.0" encoding="utf-8"?>
 <p:sldLayout xmlns:a="http://schemas.openxmlformats.org/drawingml/2006/main" xmlns:r="http://schemas.openxmlformats.org/officeDocument/2006/relationships" xmlns:p="http://schemas.openxmlformats.org/presentationml/2006/main" preserve="1">
   <p:cSld name="Diapositiva de título Medellín">
@@ -10564,7 +11457,7 @@
           <a:p>
             <a:fld id="{6B86245D-015E-46AE-96CC-32E8A5E9A1DF}" type="datetimeFigureOut">
               <a:rPr lang="es-CO" smtClean="0"/>
-              <a:t>7/04/2026</a:t>
+              <a:t>8/04/2026</a:t>
             </a:fld>
             <a:endParaRPr lang="es-CO"/>
           </a:p>
@@ -10734,7 +11627,7 @@
           <a:p>
             <a:fld id="{6B86245D-015E-46AE-96CC-32E8A5E9A1DF}" type="datetimeFigureOut">
               <a:rPr lang="es-CO" smtClean="0"/>
-              <a:t>7/04/2026</a:t>
+              <a:t>8/04/2026</a:t>
             </a:fld>
             <a:endParaRPr lang="es-CO"/>
           </a:p>
@@ -10966,7 +11859,7 @@
           <a:p>
             <a:fld id="{6B86245D-015E-46AE-96CC-32E8A5E9A1DF}" type="datetimeFigureOut">
               <a:rPr lang="es-CO" smtClean="0"/>
-              <a:t>7/04/2026</a:t>
+              <a:t>8/04/2026</a:t>
             </a:fld>
             <a:endParaRPr lang="es-CO"/>
           </a:p>
@@ -11158,7 +12051,7 @@
           <a:p>
             <a:fld id="{6B86245D-015E-46AE-96CC-32E8A5E9A1DF}" type="datetimeFigureOut">
               <a:rPr lang="es-CO" smtClean="0"/>
-              <a:t>7/04/2026</a:t>
+              <a:t>8/04/2026</a:t>
             </a:fld>
             <a:endParaRPr lang="es-CO"/>
           </a:p>
@@ -14916,8 +15809,8 @@
         </p:nvSpPr>
         <p:spPr>
           <a:xfrm>
-            <a:off x="7670536" y="5615456"/>
-            <a:ext cx="3730128" cy="307777"/>
+            <a:off x="0" y="5593641"/>
+            <a:ext cx="3730128" cy="261610"/>
           </a:xfrm>
           <a:prstGeom prst="rect">
             <a:avLst/>
@@ -14931,12 +15824,386 @@
           <a:lstStyle/>
           <a:p>
             <a:r>
-              <a:rPr lang="es-419" sz="1400" dirty="0"/>
+              <a:rPr lang="es-419" sz="1100" dirty="0"/>
               <a:t>Fuente: https://kevin-van-ingen.medium.com/</a:t>
             </a:r>
           </a:p>
         </p:txBody>
       </p:sp>
+      <p:cxnSp>
+        <p:nvCxnSpPr>
+          <p:cNvPr id="9" name="Conector recto de flecha 8">
+            <a:extLst>
+              <a:ext uri="{FF2B5EF4-FFF2-40B4-BE49-F238E27FC236}">
+                <a16:creationId xmlns:a16="http://schemas.microsoft.com/office/drawing/2014/main" id="{EFA803EF-6CDD-4B3B-92D7-21100B1818C6}"/>
+              </a:ext>
+            </a:extLst>
+          </p:cNvPr>
+          <p:cNvCxnSpPr>
+            <a:cxnSpLocks/>
+          </p:cNvCxnSpPr>
+          <p:nvPr/>
+        </p:nvCxnSpPr>
+        <p:spPr>
+          <a:xfrm flipH="1" flipV="1">
+            <a:off x="3128211" y="3648645"/>
+            <a:ext cx="1569131" cy="810062"/>
+          </a:xfrm>
+          <a:prstGeom prst="straightConnector1">
+            <a:avLst/>
+          </a:prstGeom>
+          <a:ln>
+            <a:tailEnd type="triangle"/>
+          </a:ln>
+        </p:spPr>
+        <p:style>
+          <a:lnRef idx="1">
+            <a:schemeClr val="accent1"/>
+          </a:lnRef>
+          <a:fillRef idx="0">
+            <a:schemeClr val="accent1"/>
+          </a:fillRef>
+          <a:effectRef idx="0">
+            <a:schemeClr val="accent1"/>
+          </a:effectRef>
+          <a:fontRef idx="minor">
+            <a:schemeClr val="tx1"/>
+          </a:fontRef>
+        </p:style>
+      </p:cxnSp>
+      <p:sp>
+        <p:nvSpPr>
+          <p:cNvPr id="14" name="CuadroTexto 13">
+            <a:extLst>
+              <a:ext uri="{FF2B5EF4-FFF2-40B4-BE49-F238E27FC236}">
+                <a16:creationId xmlns:a16="http://schemas.microsoft.com/office/drawing/2014/main" id="{973BE036-EED5-4BF7-84B3-22FF38F70366}"/>
+              </a:ext>
+            </a:extLst>
+          </p:cNvPr>
+          <p:cNvSpPr txBox="1"/>
+          <p:nvPr/>
+        </p:nvSpPr>
+        <p:spPr>
+          <a:xfrm>
+            <a:off x="901283" y="3252752"/>
+            <a:ext cx="2534789" cy="600164"/>
+          </a:xfrm>
+          <a:prstGeom prst="rect">
+            <a:avLst/>
+          </a:prstGeom>
+          <a:noFill/>
+        </p:spPr>
+        <p:txBody>
+          <a:bodyPr wrap="square">
+            <a:spAutoFit/>
+          </a:bodyPr>
+          <a:lstStyle/>
+          <a:p>
+            <a:r>
+              <a:rPr lang="es-ES" sz="1100" b="0" i="0" dirty="0">
+                <a:solidFill>
+                  <a:srgbClr val="0A0A0A"/>
+                </a:solidFill>
+                <a:effectLst/>
+                <a:latin typeface="Google Sans"/>
+              </a:rPr>
+              <a:t>Su comportamiento se centra en la </a:t>
+            </a:r>
+            <a:r>
+              <a:rPr lang="es-ES" sz="1100" b="0" i="1" dirty="0">
+                <a:solidFill>
+                  <a:srgbClr val="0A0A0A"/>
+                </a:solidFill>
+                <a:effectLst/>
+                <a:latin typeface="Google Sans"/>
+              </a:rPr>
+              <a:t>intención de compra</a:t>
+            </a:r>
+            <a:r>
+              <a:rPr lang="es-ES" sz="1100" b="0" i="0" dirty="0">
+                <a:solidFill>
+                  <a:srgbClr val="0A0A0A"/>
+                </a:solidFill>
+                <a:effectLst/>
+                <a:latin typeface="Google Sans"/>
+              </a:rPr>
+              <a:t>, su historial de cotizaciones y sus preferencias</a:t>
+            </a:r>
+            <a:endParaRPr lang="es-419" sz="1100" dirty="0"/>
+          </a:p>
+        </p:txBody>
+      </p:sp>
+      <p:sp>
+        <p:nvSpPr>
+          <p:cNvPr id="16" name="CuadroTexto 15">
+            <a:extLst>
+              <a:ext uri="{FF2B5EF4-FFF2-40B4-BE49-F238E27FC236}">
+                <a16:creationId xmlns:a16="http://schemas.microsoft.com/office/drawing/2014/main" id="{36FFE4D1-3DFB-438E-BB66-5A0A89DBD15A}"/>
+              </a:ext>
+            </a:extLst>
+          </p:cNvPr>
+          <p:cNvSpPr txBox="1"/>
+          <p:nvPr/>
+        </p:nvSpPr>
+        <p:spPr>
+          <a:xfrm>
+            <a:off x="2936333" y="5855251"/>
+            <a:ext cx="4006515" cy="600164"/>
+          </a:xfrm>
+          <a:prstGeom prst="rect">
+            <a:avLst/>
+          </a:prstGeom>
+          <a:noFill/>
+        </p:spPr>
+        <p:txBody>
+          <a:bodyPr wrap="square">
+            <a:spAutoFit/>
+          </a:bodyPr>
+          <a:lstStyle/>
+          <a:p>
+            <a:r>
+              <a:rPr lang="es-ES" sz="1100" b="0" i="0" dirty="0">
+                <a:solidFill>
+                  <a:srgbClr val="0A0A0A"/>
+                </a:solidFill>
+                <a:effectLst/>
+                <a:latin typeface="Google Sans"/>
+              </a:rPr>
+              <a:t> El Cliente es un </a:t>
+            </a:r>
+            <a:r>
+              <a:rPr lang="es-ES" sz="1100" b="1" i="0" dirty="0">
+                <a:solidFill>
+                  <a:srgbClr val="0A0A0A"/>
+                </a:solidFill>
+                <a:effectLst/>
+                <a:latin typeface="Google Sans"/>
+              </a:rPr>
+              <a:t>Siniestrado</a:t>
+            </a:r>
+            <a:r>
+              <a:rPr lang="es-ES" sz="1100" b="0" i="0" dirty="0">
+                <a:solidFill>
+                  <a:srgbClr val="0A0A0A"/>
+                </a:solidFill>
+                <a:effectLst/>
+                <a:latin typeface="Google Sans"/>
+              </a:rPr>
+              <a:t>. Su comportamiento se define por la </a:t>
+            </a:r>
+            <a:r>
+              <a:rPr lang="es-ES" sz="1100" b="0" i="1" dirty="0">
+                <a:solidFill>
+                  <a:srgbClr val="0A0A0A"/>
+                </a:solidFill>
+                <a:effectLst/>
+                <a:latin typeface="Google Sans"/>
+              </a:rPr>
+              <a:t>notificación de incidentes</a:t>
+            </a:r>
+            <a:r>
+              <a:rPr lang="es-ES" sz="1100" b="0" i="0" dirty="0">
+                <a:solidFill>
+                  <a:srgbClr val="0A0A0A"/>
+                </a:solidFill>
+                <a:effectLst/>
+                <a:latin typeface="Google Sans"/>
+              </a:rPr>
+              <a:t>, el seguimiento de pólizas activas y la validación de coberturas.</a:t>
+            </a:r>
+            <a:endParaRPr lang="es-419" sz="1100" dirty="0"/>
+          </a:p>
+        </p:txBody>
+      </p:sp>
+      <p:cxnSp>
+        <p:nvCxnSpPr>
+          <p:cNvPr id="20" name="Conector recto de flecha 19">
+            <a:extLst>
+              <a:ext uri="{FF2B5EF4-FFF2-40B4-BE49-F238E27FC236}">
+                <a16:creationId xmlns:a16="http://schemas.microsoft.com/office/drawing/2014/main" id="{2E5CEE55-1408-4E0D-BD10-701FFC7C3EDF}"/>
+              </a:ext>
+            </a:extLst>
+          </p:cNvPr>
+          <p:cNvCxnSpPr/>
+          <p:nvPr/>
+        </p:nvCxnSpPr>
+        <p:spPr>
+          <a:xfrm flipH="1">
+            <a:off x="5606426" y="5521412"/>
+            <a:ext cx="1215479" cy="352408"/>
+          </a:xfrm>
+          <a:prstGeom prst="straightConnector1">
+            <a:avLst/>
+          </a:prstGeom>
+          <a:ln>
+            <a:tailEnd type="triangle"/>
+          </a:ln>
+        </p:spPr>
+        <p:style>
+          <a:lnRef idx="1">
+            <a:schemeClr val="accent1"/>
+          </a:lnRef>
+          <a:fillRef idx="0">
+            <a:schemeClr val="accent1"/>
+          </a:fillRef>
+          <a:effectRef idx="0">
+            <a:schemeClr val="accent1"/>
+          </a:effectRef>
+          <a:fontRef idx="minor">
+            <a:schemeClr val="tx1"/>
+          </a:fontRef>
+        </p:style>
+      </p:cxnSp>
+      <p:sp>
+        <p:nvSpPr>
+          <p:cNvPr id="22" name="CuadroTexto 21">
+            <a:extLst>
+              <a:ext uri="{FF2B5EF4-FFF2-40B4-BE49-F238E27FC236}">
+                <a16:creationId xmlns:a16="http://schemas.microsoft.com/office/drawing/2014/main" id="{884A93BB-F748-43F4-8DEB-5A3541B93C49}"/>
+              </a:ext>
+            </a:extLst>
+          </p:cNvPr>
+          <p:cNvSpPr txBox="1"/>
+          <p:nvPr/>
+        </p:nvSpPr>
+        <p:spPr>
+          <a:xfrm>
+            <a:off x="8269936" y="3021919"/>
+            <a:ext cx="3534565" cy="461665"/>
+          </a:xfrm>
+          <a:prstGeom prst="rect">
+            <a:avLst/>
+          </a:prstGeom>
+          <a:noFill/>
+        </p:spPr>
+        <p:txBody>
+          <a:bodyPr wrap="square">
+            <a:spAutoFit/>
+          </a:bodyPr>
+          <a:lstStyle/>
+          <a:p>
+            <a:r>
+              <a:rPr lang="es-ES" sz="1200" dirty="0"/>
+              <a:t>El Cliente es un Sujeto de Derecho. Aquí solo importan sus contratos firmados, litigios pendientes</a:t>
+            </a:r>
+            <a:endParaRPr lang="es-419" sz="1200" dirty="0"/>
+          </a:p>
+        </p:txBody>
+      </p:sp>
+      <p:cxnSp>
+        <p:nvCxnSpPr>
+          <p:cNvPr id="24" name="Conector recto de flecha 23">
+            <a:extLst>
+              <a:ext uri="{FF2B5EF4-FFF2-40B4-BE49-F238E27FC236}">
+                <a16:creationId xmlns:a16="http://schemas.microsoft.com/office/drawing/2014/main" id="{8C0DC80D-C800-4016-B061-D50C4C0D5CB3}"/>
+              </a:ext>
+            </a:extLst>
+          </p:cNvPr>
+          <p:cNvCxnSpPr/>
+          <p:nvPr/>
+        </p:nvCxnSpPr>
+        <p:spPr>
+          <a:xfrm flipV="1">
+            <a:off x="8343670" y="3483584"/>
+            <a:ext cx="951941" cy="693907"/>
+          </a:xfrm>
+          <a:prstGeom prst="straightConnector1">
+            <a:avLst/>
+          </a:prstGeom>
+          <a:ln>
+            <a:tailEnd type="triangle"/>
+          </a:ln>
+        </p:spPr>
+        <p:style>
+          <a:lnRef idx="1">
+            <a:schemeClr val="accent1"/>
+          </a:lnRef>
+          <a:fillRef idx="0">
+            <a:schemeClr val="accent1"/>
+          </a:fillRef>
+          <a:effectRef idx="0">
+            <a:schemeClr val="accent1"/>
+          </a:effectRef>
+          <a:fontRef idx="minor">
+            <a:schemeClr val="tx1"/>
+          </a:fontRef>
+        </p:style>
+      </p:cxnSp>
+      <p:sp>
+        <p:nvSpPr>
+          <p:cNvPr id="26" name="CuadroTexto 25">
+            <a:extLst>
+              <a:ext uri="{FF2B5EF4-FFF2-40B4-BE49-F238E27FC236}">
+                <a16:creationId xmlns:a16="http://schemas.microsoft.com/office/drawing/2014/main" id="{040E76A0-9681-43A2-A1D0-EECF02DF7E6A}"/>
+              </a:ext>
+            </a:extLst>
+          </p:cNvPr>
+          <p:cNvSpPr txBox="1"/>
+          <p:nvPr/>
+        </p:nvSpPr>
+        <p:spPr>
+          <a:xfrm>
+            <a:off x="8268421" y="5741496"/>
+            <a:ext cx="3703000" cy="461665"/>
+          </a:xfrm>
+          <a:prstGeom prst="rect">
+            <a:avLst/>
+          </a:prstGeom>
+          <a:noFill/>
+        </p:spPr>
+        <p:txBody>
+          <a:bodyPr wrap="square">
+            <a:spAutoFit/>
+          </a:bodyPr>
+          <a:lstStyle/>
+          <a:p>
+            <a:r>
+              <a:rPr lang="es-ES" sz="1200" dirty="0"/>
+              <a:t>Comportamiento transaccional: historial de pagos, deudas, facturación y cuentas bancarias.</a:t>
+            </a:r>
+            <a:endParaRPr lang="es-419" sz="1200" dirty="0"/>
+          </a:p>
+        </p:txBody>
+      </p:sp>
+      <p:cxnSp>
+        <p:nvCxnSpPr>
+          <p:cNvPr id="28" name="Conector recto de flecha 27">
+            <a:extLst>
+              <a:ext uri="{FF2B5EF4-FFF2-40B4-BE49-F238E27FC236}">
+                <a16:creationId xmlns:a16="http://schemas.microsoft.com/office/drawing/2014/main" id="{9044D1FF-7D81-4130-947A-16F39EAA0DBB}"/>
+              </a:ext>
+            </a:extLst>
+          </p:cNvPr>
+          <p:cNvCxnSpPr/>
+          <p:nvPr/>
+        </p:nvCxnSpPr>
+        <p:spPr>
+          <a:xfrm>
+            <a:off x="9295611" y="5408045"/>
+            <a:ext cx="371927" cy="447206"/>
+          </a:xfrm>
+          <a:prstGeom prst="straightConnector1">
+            <a:avLst/>
+          </a:prstGeom>
+          <a:ln>
+            <a:tailEnd type="triangle"/>
+          </a:ln>
+        </p:spPr>
+        <p:style>
+          <a:lnRef idx="1">
+            <a:schemeClr val="accent1"/>
+          </a:lnRef>
+          <a:fillRef idx="0">
+            <a:schemeClr val="accent1"/>
+          </a:fillRef>
+          <a:effectRef idx="0">
+            <a:schemeClr val="accent1"/>
+          </a:effectRef>
+          <a:fontRef idx="minor">
+            <a:schemeClr val="tx1"/>
+          </a:fontRef>
+        </p:style>
+      </p:cxnSp>
     </p:spTree>
     <p:extLst>
       <p:ext uri="{BB962C8B-B14F-4D97-AF65-F5344CB8AC3E}">
@@ -15220,7 +16487,7 @@
         </p:blipFill>
         <p:spPr>
           <a:xfrm>
-            <a:off x="4265165" y="3367783"/>
+            <a:off x="2783008" y="3206200"/>
             <a:ext cx="6806187" cy="2032000"/>
           </a:xfrm>
           <a:prstGeom prst="rect">
@@ -15242,8 +16509,8 @@
         </p:nvSpPr>
         <p:spPr>
           <a:xfrm>
-            <a:off x="1348109" y="5499345"/>
-            <a:ext cx="8366895" cy="646331"/>
+            <a:off x="1348109" y="5607630"/>
+            <a:ext cx="10178144" cy="369332"/>
           </a:xfrm>
           <a:prstGeom prst="rect">
             <a:avLst/>
@@ -15295,7 +16562,7 @@
         <p:spPr>
           <a:xfrm>
             <a:off x="599305" y="2021725"/>
-            <a:ext cx="11173595" cy="923330"/>
+            <a:ext cx="11173595" cy="954107"/>
           </a:xfrm>
           <a:prstGeom prst="rect">
             <a:avLst/>
@@ -15329,14 +16596,14 @@
               <a:buChar char="•"/>
             </a:pPr>
             <a:r>
-              <a:rPr lang="es-ES" b="0" i="0" dirty="0">
+              <a:rPr lang="es-ES" sz="2000" b="1" i="0" dirty="0">
                 <a:solidFill>
-                  <a:srgbClr val="242424"/>
+                  <a:schemeClr val="accent6"/>
                 </a:solidFill>
                 <a:effectLst/>
                 <a:latin typeface="source-serif-pro"/>
               </a:rPr>
-              <a:t>Se convierten en límites naturales en el código como microservicios</a:t>
+              <a:t>Se convierten en límites naturales en el código, como microservicios</a:t>
             </a:r>
           </a:p>
           <a:p>
@@ -15386,7 +16653,7 @@
           <p:cNvPr id="2" name="CuadroTexto 1">
             <a:extLst>
               <a:ext uri="{FF2B5EF4-FFF2-40B4-BE49-F238E27FC236}">
-                <a16:creationId xmlns:a16="http://schemas.microsoft.com/office/drawing/2014/main" id="{145468B7-1CA3-4B4A-866F-D6DA2BAF446B}"/>
+                <a16:creationId xmlns:a16="http://schemas.microsoft.com/office/drawing/2014/main" id="{53427CE9-077C-48E8-9DF4-7233B2C94763}"/>
               </a:ext>
             </a:extLst>
           </p:cNvPr>
@@ -15396,7 +16663,7 @@
         <p:spPr>
           <a:xfrm>
             <a:off x="599305" y="613775"/>
-            <a:ext cx="9115699" cy="584775"/>
+            <a:ext cx="9115699" cy="1077218"/>
           </a:xfrm>
           <a:prstGeom prst="rect">
             <a:avLst/>
@@ -15410,6 +16677,14 @@
           <a:lstStyle/>
           <a:p>
             <a:r>
+              <a:rPr lang="es-ES" sz="3200" dirty="0"/>
+              <a:t>Elementos del modelo: </a:t>
+            </a:r>
+            <a:r>
+              <a:rPr lang="es-419" sz="3200" dirty="0"/>
+              <a:t>Contexto Delimitado o </a:t>
+            </a:r>
+            <a:r>
               <a:rPr lang="es-419" sz="3200" dirty="0" err="1"/>
               <a:t>Bounded</a:t>
             </a:r>
@@ -15423,13 +16698,8 @@
             </a:r>
             <a:r>
               <a:rPr lang="es-419" sz="3200" dirty="0"/>
-              <a:t> con </a:t>
-            </a:r>
-            <a:r>
-              <a:rPr lang="es-419" sz="3200" dirty="0" err="1"/>
-              <a:t>Canvas</a:t>
-            </a:r>
-            <a:endParaRPr lang="es-419" sz="3200" dirty="0"/>
+              <a:t> – Tratamiento Conceptual</a:t>
+            </a:r>
           </a:p>
         </p:txBody>
       </p:sp>
@@ -15438,7 +16708,7 @@
           <p:cNvPr id="4" name="CuadroTexto 3">
             <a:extLst>
               <a:ext uri="{FF2B5EF4-FFF2-40B4-BE49-F238E27FC236}">
-                <a16:creationId xmlns:a16="http://schemas.microsoft.com/office/drawing/2014/main" id="{05AE9106-F458-4B71-B723-CE292D5F5F98}"/>
+                <a16:creationId xmlns:a16="http://schemas.microsoft.com/office/drawing/2014/main" id="{075A0D92-90DB-4CAD-A05D-8E49ACBFE3B1}"/>
               </a:ext>
             </a:extLst>
           </p:cNvPr>
@@ -15447,8 +16717,8 @@
         </p:nvSpPr>
         <p:spPr>
           <a:xfrm>
-            <a:off x="342900" y="1682233"/>
-            <a:ext cx="2882900" cy="3970318"/>
+            <a:off x="599305" y="1924447"/>
+            <a:ext cx="11193379" cy="3908762"/>
           </a:xfrm>
           <a:prstGeom prst="rect">
             <a:avLst/>
@@ -15462,156 +16732,76 @@
           <a:lstStyle/>
           <a:p>
             <a:r>
-              <a:rPr lang="es-ES" dirty="0">
-                <a:solidFill>
-                  <a:srgbClr val="1F2328"/>
-                </a:solidFill>
-              </a:rPr>
-              <a:t>E</a:t>
-            </a:r>
-            <a:r>
-              <a:rPr lang="es-ES" b="0" i="0" dirty="0">
-                <a:solidFill>
-                  <a:srgbClr val="1F2328"/>
-                </a:solidFill>
-                <a:effectLst/>
-              </a:rPr>
-              <a:t>s una herramienta colaborativa para diseñar y documentar el diseño de cada contexto delimitado.</a:t>
-            </a:r>
-          </a:p>
-          <a:p>
-            <a:endParaRPr lang="es-ES" dirty="0">
-              <a:solidFill>
-                <a:srgbClr val="1F2328"/>
-              </a:solidFill>
-            </a:endParaRPr>
-          </a:p>
-          <a:p>
-            <a:r>
-              <a:rPr lang="es-ES" b="0" i="0" dirty="0" err="1">
-                <a:solidFill>
-                  <a:srgbClr val="1F2328"/>
-                </a:solidFill>
-                <a:effectLst/>
-              </a:rPr>
-              <a:t>Canvas</a:t>
-            </a:r>
-            <a:r>
-              <a:rPr lang="es-ES" b="0" i="0" dirty="0">
-                <a:solidFill>
-                  <a:srgbClr val="1F2328"/>
-                </a:solidFill>
-                <a:effectLst/>
-              </a:rPr>
+              <a:rPr lang="es-ES" sz="1600" b="1" dirty="0"/>
+              <a:t>Separación de Bases de Datos (o Esquemas): </a:t>
+            </a:r>
+          </a:p>
+          <a:p>
+            <a:r>
+              <a:rPr lang="es-ES" sz="1600" dirty="0"/>
+              <a:t>Cada contexto tiene su propia tabla de "Cliente". La tabla de Ventas solo tiene columnas de marketing; la de Finanzas solo tiene columnas de contabilidad.</a:t>
+            </a:r>
+          </a:p>
+          <a:p>
+            <a:endParaRPr lang="es-ES" sz="1600" dirty="0"/>
+          </a:p>
+          <a:p>
+            <a:r>
+              <a:rPr lang="es-ES" sz="1600" b="1" dirty="0"/>
+              <a:t>Identificador Compartido (ID):</a:t>
+            </a:r>
+            <a:r>
+              <a:rPr lang="es-ES" sz="1600" dirty="0"/>
               <a:t> </a:t>
             </a:r>
-            <a:r>
-              <a:rPr lang="es-ES" dirty="0">
-                <a:solidFill>
-                  <a:srgbClr val="1F2328"/>
-                </a:solidFill>
-              </a:rPr>
+          </a:p>
+          <a:p>
+            <a:r>
+              <a:rPr lang="es-ES" sz="1600" dirty="0"/>
+              <a:t>Todos los contextos usan el mismo ID (por ejemplo, el DNI o un UUID). Esto permite saber que el "Pagador 5" es el mismo que el "Siniestrado 5".</a:t>
+            </a:r>
+          </a:p>
+          <a:p>
+            <a:endParaRPr lang="es-ES" sz="1600" dirty="0"/>
+          </a:p>
+          <a:p>
+            <a:r>
+              <a:rPr lang="es-ES" sz="1600" b="1" dirty="0"/>
+              <a:t>Sincronización mediante Eventos:</a:t>
+            </a:r>
+            <a:r>
+              <a:rPr lang="es-ES" sz="1600" dirty="0"/>
               <a:t> </a:t>
             </a:r>
-            <a:r>
-              <a:rPr lang="es-ES" b="0" i="0" dirty="0">
-                <a:solidFill>
-                  <a:srgbClr val="1F2328"/>
-                </a:solidFill>
-                <a:effectLst/>
-              </a:rPr>
-              <a:t>guía a través del proceso de diseño al requerir que considere y tome decisiones sobre los elementos claves desde el nombre hasta las responsabilidades, su interfaz pública y sus dependencias.</a:t>
-            </a:r>
-            <a:endParaRPr lang="es-419" dirty="0"/>
-          </a:p>
-        </p:txBody>
-      </p:sp>
-      <p:pic>
-        <p:nvPicPr>
-          <p:cNvPr id="2050" name="Picture 2">
-            <a:extLst>
-              <a:ext uri="{FF2B5EF4-FFF2-40B4-BE49-F238E27FC236}">
-                <a16:creationId xmlns:a16="http://schemas.microsoft.com/office/drawing/2014/main" id="{97DB5A3D-3CD7-4ABF-9A64-617A36491312}"/>
-              </a:ext>
-            </a:extLst>
-          </p:cNvPr>
-          <p:cNvPicPr>
-            <a:picLocks noChangeAspect="1" noChangeArrowheads="1"/>
-          </p:cNvPicPr>
-          <p:nvPr/>
-        </p:nvPicPr>
-        <p:blipFill>
-          <a:blip r:embed="rId2">
-            <a:extLst>
-              <a:ext uri="{28A0092B-C50C-407E-A947-70E740481C1C}">
-                <a14:useLocalDpi xmlns:a14="http://schemas.microsoft.com/office/drawing/2010/main" val="0"/>
-              </a:ext>
-            </a:extLst>
-          </a:blip>
-          <a:srcRect/>
-          <a:stretch>
-            <a:fillRect/>
-          </a:stretch>
-        </p:blipFill>
-        <p:spPr bwMode="auto">
-          <a:xfrm>
-            <a:off x="3708400" y="1198550"/>
-            <a:ext cx="7623175" cy="4991984"/>
-          </a:xfrm>
-          <a:prstGeom prst="rect">
-            <a:avLst/>
-          </a:prstGeom>
-          <a:noFill/>
-          <a:extLst>
-            <a:ext uri="{909E8E84-426E-40DD-AFC4-6F175D3DCCD1}">
-              <a14:hiddenFill xmlns:a14="http://schemas.microsoft.com/office/drawing/2010/main">
-                <a:solidFill>
-                  <a:srgbClr val="FFFFFF"/>
-                </a:solidFill>
-              </a14:hiddenFill>
-            </a:ext>
-          </a:extLst>
-        </p:spPr>
-      </p:pic>
-      <p:sp>
-        <p:nvSpPr>
-          <p:cNvPr id="7" name="CuadroTexto 6">
-            <a:extLst>
-              <a:ext uri="{FF2B5EF4-FFF2-40B4-BE49-F238E27FC236}">
-                <a16:creationId xmlns:a16="http://schemas.microsoft.com/office/drawing/2014/main" id="{48A0B6F0-1EF6-40F1-A6A1-E5D911F0D077}"/>
-              </a:ext>
-            </a:extLst>
-          </p:cNvPr>
-          <p:cNvSpPr txBox="1"/>
-          <p:nvPr/>
-        </p:nvSpPr>
-        <p:spPr>
-          <a:xfrm>
-            <a:off x="2032000" y="6190534"/>
-            <a:ext cx="4064000" cy="372475"/>
-          </a:xfrm>
-          <a:prstGeom prst="rect">
-            <a:avLst/>
-          </a:prstGeom>
-          <a:noFill/>
-        </p:spPr>
-        <p:txBody>
-          <a:bodyPr wrap="square">
-            <a:spAutoFit/>
-          </a:bodyPr>
-          <a:lstStyle/>
-          <a:p>
-            <a:r>
-              <a:rPr lang="es-419" dirty="0"/>
-              <a:t>Fuente: https://github.com/ddd-crew/</a:t>
-            </a:r>
+          </a:p>
+          <a:p>
+            <a:r>
+              <a:rPr lang="es-ES" sz="1600" dirty="0"/>
+              <a:t>Si el Cliente cambia su dirección en el portal de Ventas, el sistema de Ventas publica un mensaje: "Dirección de Cliente Actualizada". Los demás dominios (Legal, Finanzas) escuchan ese mensaje y actualizan sus propios datos de cliente si les interesa.</a:t>
+            </a:r>
+          </a:p>
+          <a:p>
+            <a:endParaRPr lang="es-ES" sz="1600" dirty="0"/>
+          </a:p>
+          <a:p>
+            <a:r>
+              <a:rPr lang="es-ES" sz="1600" b="1" dirty="0"/>
+              <a:t>Autonomía: </a:t>
+            </a:r>
+          </a:p>
+          <a:p>
+            <a:r>
+              <a:rPr lang="es-ES" sz="1600" dirty="0"/>
+              <a:t>Si el sistema de Reclamos se cae, el sistema de Ventas debe poder seguir funcionando porque tiene su propia copia/modelo de "Cliente" con los datos que necesita para vender.</a:t>
+            </a:r>
+            <a:endParaRPr lang="es-419" sz="1600" dirty="0"/>
           </a:p>
         </p:txBody>
       </p:sp>
     </p:spTree>
     <p:extLst>
       <p:ext uri="{BB962C8B-B14F-4D97-AF65-F5344CB8AC3E}">
-        <p14:creationId xmlns:p14="http://schemas.microsoft.com/office/powerpoint/2010/main" val="1422279637"/>
+        <p14:creationId xmlns:p14="http://schemas.microsoft.com/office/powerpoint/2010/main" val="967725097"/>
       </p:ext>
     </p:extLst>
   </p:cSld>
@@ -15758,6 +16948,464 @@
           <a:chExt cx="0" cy="0"/>
         </a:xfrm>
       </p:grpSpPr>
+      <p:sp>
+        <p:nvSpPr>
+          <p:cNvPr id="2" name="CuadroTexto 1">
+            <a:extLst>
+              <a:ext uri="{FF2B5EF4-FFF2-40B4-BE49-F238E27FC236}">
+                <a16:creationId xmlns:a16="http://schemas.microsoft.com/office/drawing/2014/main" id="{47658725-9CA2-4FA6-95AC-4E5B14586145}"/>
+              </a:ext>
+            </a:extLst>
+          </p:cNvPr>
+          <p:cNvSpPr txBox="1"/>
+          <p:nvPr/>
+        </p:nvSpPr>
+        <p:spPr>
+          <a:xfrm>
+            <a:off x="672029" y="611919"/>
+            <a:ext cx="6993068" cy="584775"/>
+          </a:xfrm>
+          <a:prstGeom prst="rect">
+            <a:avLst/>
+          </a:prstGeom>
+          <a:noFill/>
+        </p:spPr>
+        <p:txBody>
+          <a:bodyPr wrap="none" rtlCol="0">
+            <a:spAutoFit/>
+          </a:bodyPr>
+          <a:lstStyle/>
+          <a:p>
+            <a:r>
+              <a:rPr lang="es-ES" sz="3200" dirty="0"/>
+              <a:t>Ejemplo: Identificación </a:t>
+            </a:r>
+            <a:r>
+              <a:rPr lang="es-ES" sz="3200" dirty="0" err="1"/>
+              <a:t>Bounded</a:t>
+            </a:r>
+            <a:r>
+              <a:rPr lang="es-ES" sz="3200" dirty="0"/>
+              <a:t> </a:t>
+            </a:r>
+            <a:r>
+              <a:rPr lang="es-ES" sz="3200" dirty="0" err="1"/>
+              <a:t>Context</a:t>
+            </a:r>
+            <a:endParaRPr lang="es-ES" sz="3200" dirty="0"/>
+          </a:p>
+        </p:txBody>
+      </p:sp>
+      <p:pic>
+        <p:nvPicPr>
+          <p:cNvPr id="4" name="Imagen 3">
+            <a:extLst>
+              <a:ext uri="{FF2B5EF4-FFF2-40B4-BE49-F238E27FC236}">
+                <a16:creationId xmlns:a16="http://schemas.microsoft.com/office/drawing/2014/main" id="{40B9C87D-AEF7-4967-9E64-645E24BF9F78}"/>
+              </a:ext>
+            </a:extLst>
+          </p:cNvPr>
+          <p:cNvPicPr>
+            <a:picLocks noChangeAspect="1"/>
+          </p:cNvPicPr>
+          <p:nvPr/>
+        </p:nvPicPr>
+        <p:blipFill>
+          <a:blip r:embed="rId2"/>
+          <a:stretch>
+            <a:fillRect/>
+          </a:stretch>
+        </p:blipFill>
+        <p:spPr>
+          <a:xfrm>
+            <a:off x="1117600" y="1788227"/>
+            <a:ext cx="9697451" cy="2934982"/>
+          </a:xfrm>
+          <a:prstGeom prst="rect">
+            <a:avLst/>
+          </a:prstGeom>
+        </p:spPr>
+      </p:pic>
+      <p:sp>
+        <p:nvSpPr>
+          <p:cNvPr id="6" name="CuadroTexto 5">
+            <a:extLst>
+              <a:ext uri="{FF2B5EF4-FFF2-40B4-BE49-F238E27FC236}">
+                <a16:creationId xmlns:a16="http://schemas.microsoft.com/office/drawing/2014/main" id="{D053EFC6-2ABF-4419-BAA0-9450BE301ADE}"/>
+              </a:ext>
+            </a:extLst>
+          </p:cNvPr>
+          <p:cNvSpPr txBox="1"/>
+          <p:nvPr/>
+        </p:nvSpPr>
+        <p:spPr>
+          <a:xfrm>
+            <a:off x="1460499" y="4853077"/>
+            <a:ext cx="8567151" cy="923330"/>
+          </a:xfrm>
+          <a:prstGeom prst="rect">
+            <a:avLst/>
+          </a:prstGeom>
+          <a:noFill/>
+        </p:spPr>
+        <p:txBody>
+          <a:bodyPr wrap="square">
+            <a:spAutoFit/>
+          </a:bodyPr>
+          <a:lstStyle/>
+          <a:p>
+            <a:pPr marL="285750" indent="-285750">
+              <a:buFont typeface="Wingdings" panose="05000000000000000000" pitchFamily="2" charset="2"/>
+              <a:buChar char="q"/>
+            </a:pPr>
+            <a:r>
+              <a:rPr lang="es-ES" dirty="0"/>
+              <a:t>Cada BC debe tener su propio </a:t>
+            </a:r>
+            <a:r>
+              <a:rPr lang="es-ES" b="1" dirty="0"/>
+              <a:t>modelo de dominio</a:t>
+            </a:r>
+            <a:r>
+              <a:rPr lang="es-ES" dirty="0"/>
+              <a:t>, lógica y base de datos (si aplica).</a:t>
+            </a:r>
+          </a:p>
+          <a:p>
+            <a:pPr marL="285750" indent="-285750">
+              <a:buFont typeface="Wingdings" panose="05000000000000000000" pitchFamily="2" charset="2"/>
+              <a:buChar char="q"/>
+            </a:pPr>
+            <a:endParaRPr lang="es-ES" dirty="0"/>
+          </a:p>
+          <a:p>
+            <a:pPr marL="285750" indent="-285750">
+              <a:buFont typeface="Wingdings" panose="05000000000000000000" pitchFamily="2" charset="2"/>
+              <a:buChar char="q"/>
+            </a:pPr>
+            <a:r>
+              <a:rPr lang="es-ES" dirty="0"/>
+              <a:t>Relación entre </a:t>
+            </a:r>
+            <a:r>
+              <a:rPr lang="es-ES" dirty="0" err="1"/>
+              <a:t>BCs</a:t>
+            </a:r>
+            <a:r>
+              <a:rPr lang="es-ES" dirty="0"/>
+              <a:t> mediante </a:t>
+            </a:r>
+            <a:r>
+              <a:rPr lang="es-ES" b="1" dirty="0"/>
+              <a:t>eventos de dominio</a:t>
+            </a:r>
+            <a:r>
+              <a:rPr lang="es-ES" dirty="0"/>
+              <a:t> o </a:t>
+            </a:r>
+            <a:r>
+              <a:rPr lang="es-ES" b="1" dirty="0" err="1"/>
+              <a:t>APIs</a:t>
+            </a:r>
+            <a:r>
+              <a:rPr lang="es-ES" b="1" dirty="0"/>
+              <a:t> explícitas</a:t>
+            </a:r>
+            <a:r>
+              <a:rPr lang="es-ES" dirty="0"/>
+              <a:t>.</a:t>
+            </a:r>
+            <a:endParaRPr lang="es-419" dirty="0"/>
+          </a:p>
+        </p:txBody>
+      </p:sp>
+    </p:spTree>
+    <p:extLst>
+      <p:ext uri="{BB962C8B-B14F-4D97-AF65-F5344CB8AC3E}">
+        <p14:creationId xmlns:p14="http://schemas.microsoft.com/office/powerpoint/2010/main" val="1748489983"/>
+      </p:ext>
+    </p:extLst>
+  </p:cSld>
+  <p:clrMapOvr>
+    <a:masterClrMapping/>
+  </p:clrMapOvr>
+</p:sld>
+</file>
+
+<file path=ppt/slides/slide21.xml><?xml version="1.0" encoding="utf-8"?>
+<p:sld xmlns:a="http://schemas.openxmlformats.org/drawingml/2006/main" xmlns:r="http://schemas.openxmlformats.org/officeDocument/2006/relationships" xmlns:p="http://schemas.openxmlformats.org/presentationml/2006/main">
+  <p:cSld>
+    <p:spTree>
+      <p:nvGrpSpPr>
+        <p:cNvPr id="1" name=""/>
+        <p:cNvGrpSpPr/>
+        <p:nvPr/>
+      </p:nvGrpSpPr>
+      <p:grpSpPr>
+        <a:xfrm>
+          <a:off x="0" y="0"/>
+          <a:ext cx="0" cy="0"/>
+          <a:chOff x="0" y="0"/>
+          <a:chExt cx="0" cy="0"/>
+        </a:xfrm>
+      </p:grpSpPr>
+      <p:sp>
+        <p:nvSpPr>
+          <p:cNvPr id="2" name="CuadroTexto 1">
+            <a:extLst>
+              <a:ext uri="{FF2B5EF4-FFF2-40B4-BE49-F238E27FC236}">
+                <a16:creationId xmlns:a16="http://schemas.microsoft.com/office/drawing/2014/main" id="{145468B7-1CA3-4B4A-866F-D6DA2BAF446B}"/>
+              </a:ext>
+            </a:extLst>
+          </p:cNvPr>
+          <p:cNvSpPr txBox="1"/>
+          <p:nvPr/>
+        </p:nvSpPr>
+        <p:spPr>
+          <a:xfrm>
+            <a:off x="599305" y="613775"/>
+            <a:ext cx="9115699" cy="584775"/>
+          </a:xfrm>
+          <a:prstGeom prst="rect">
+            <a:avLst/>
+          </a:prstGeom>
+          <a:noFill/>
+        </p:spPr>
+        <p:txBody>
+          <a:bodyPr wrap="square" rtlCol="0">
+            <a:spAutoFit/>
+          </a:bodyPr>
+          <a:lstStyle/>
+          <a:p>
+            <a:r>
+              <a:rPr lang="es-419" sz="3200" dirty="0" err="1"/>
+              <a:t>Bounded</a:t>
+            </a:r>
+            <a:r>
+              <a:rPr lang="es-419" sz="3200" dirty="0"/>
+              <a:t> </a:t>
+            </a:r>
+            <a:r>
+              <a:rPr lang="es-419" sz="3200" dirty="0" err="1"/>
+              <a:t>Context</a:t>
+            </a:r>
+            <a:r>
+              <a:rPr lang="es-419" sz="3200" dirty="0"/>
+              <a:t> con </a:t>
+            </a:r>
+            <a:r>
+              <a:rPr lang="es-419" sz="3200" dirty="0" err="1"/>
+              <a:t>Canvas</a:t>
+            </a:r>
+            <a:endParaRPr lang="es-419" sz="3200" dirty="0"/>
+          </a:p>
+        </p:txBody>
+      </p:sp>
+      <p:sp>
+        <p:nvSpPr>
+          <p:cNvPr id="4" name="CuadroTexto 3">
+            <a:extLst>
+              <a:ext uri="{FF2B5EF4-FFF2-40B4-BE49-F238E27FC236}">
+                <a16:creationId xmlns:a16="http://schemas.microsoft.com/office/drawing/2014/main" id="{05AE9106-F458-4B71-B723-CE292D5F5F98}"/>
+              </a:ext>
+            </a:extLst>
+          </p:cNvPr>
+          <p:cNvSpPr txBox="1"/>
+          <p:nvPr/>
+        </p:nvSpPr>
+        <p:spPr>
+          <a:xfrm>
+            <a:off x="342900" y="1682233"/>
+            <a:ext cx="2882900" cy="3970318"/>
+          </a:xfrm>
+          <a:prstGeom prst="rect">
+            <a:avLst/>
+          </a:prstGeom>
+          <a:noFill/>
+        </p:spPr>
+        <p:txBody>
+          <a:bodyPr wrap="square">
+            <a:spAutoFit/>
+          </a:bodyPr>
+          <a:lstStyle/>
+          <a:p>
+            <a:r>
+              <a:rPr lang="es-ES" dirty="0">
+                <a:solidFill>
+                  <a:srgbClr val="1F2328"/>
+                </a:solidFill>
+              </a:rPr>
+              <a:t>E</a:t>
+            </a:r>
+            <a:r>
+              <a:rPr lang="es-ES" b="0" i="0" dirty="0">
+                <a:solidFill>
+                  <a:srgbClr val="1F2328"/>
+                </a:solidFill>
+                <a:effectLst/>
+              </a:rPr>
+              <a:t>s una herramienta colaborativa para diseñar y documentar el diseño de cada contexto delimitado.</a:t>
+            </a:r>
+          </a:p>
+          <a:p>
+            <a:endParaRPr lang="es-ES" dirty="0">
+              <a:solidFill>
+                <a:srgbClr val="1F2328"/>
+              </a:solidFill>
+            </a:endParaRPr>
+          </a:p>
+          <a:p>
+            <a:r>
+              <a:rPr lang="es-ES" b="0" i="0" dirty="0" err="1">
+                <a:solidFill>
+                  <a:srgbClr val="1F2328"/>
+                </a:solidFill>
+                <a:effectLst/>
+              </a:rPr>
+              <a:t>Canvas</a:t>
+            </a:r>
+            <a:r>
+              <a:rPr lang="es-ES" b="0" i="0" dirty="0">
+                <a:solidFill>
+                  <a:srgbClr val="1F2328"/>
+                </a:solidFill>
+                <a:effectLst/>
+              </a:rPr>
+              <a:t> </a:t>
+            </a:r>
+            <a:r>
+              <a:rPr lang="es-ES" dirty="0">
+                <a:solidFill>
+                  <a:srgbClr val="1F2328"/>
+                </a:solidFill>
+              </a:rPr>
+              <a:t> </a:t>
+            </a:r>
+            <a:r>
+              <a:rPr lang="es-ES" b="0" i="0" dirty="0">
+                <a:solidFill>
+                  <a:srgbClr val="1F2328"/>
+                </a:solidFill>
+                <a:effectLst/>
+              </a:rPr>
+              <a:t>guía a través del proceso de diseño al requerir que considere y tome decisiones sobre los elementos claves desde el nombre hasta las responsabilidades, su interfaz pública y sus dependencias.</a:t>
+            </a:r>
+            <a:endParaRPr lang="es-419" dirty="0"/>
+          </a:p>
+        </p:txBody>
+      </p:sp>
+      <p:pic>
+        <p:nvPicPr>
+          <p:cNvPr id="2050" name="Picture 2">
+            <a:extLst>
+              <a:ext uri="{FF2B5EF4-FFF2-40B4-BE49-F238E27FC236}">
+                <a16:creationId xmlns:a16="http://schemas.microsoft.com/office/drawing/2014/main" id="{97DB5A3D-3CD7-4ABF-9A64-617A36491312}"/>
+              </a:ext>
+            </a:extLst>
+          </p:cNvPr>
+          <p:cNvPicPr>
+            <a:picLocks noChangeAspect="1" noChangeArrowheads="1"/>
+          </p:cNvPicPr>
+          <p:nvPr/>
+        </p:nvPicPr>
+        <p:blipFill>
+          <a:blip r:embed="rId3">
+            <a:extLst>
+              <a:ext uri="{28A0092B-C50C-407E-A947-70E740481C1C}">
+                <a14:useLocalDpi xmlns:a14="http://schemas.microsoft.com/office/drawing/2010/main" val="0"/>
+              </a:ext>
+            </a:extLst>
+          </a:blip>
+          <a:srcRect/>
+          <a:stretch>
+            <a:fillRect/>
+          </a:stretch>
+        </p:blipFill>
+        <p:spPr bwMode="auto">
+          <a:xfrm>
+            <a:off x="3708400" y="1198550"/>
+            <a:ext cx="7623175" cy="4991984"/>
+          </a:xfrm>
+          <a:prstGeom prst="rect">
+            <a:avLst/>
+          </a:prstGeom>
+          <a:noFill/>
+          <a:extLst>
+            <a:ext uri="{909E8E84-426E-40DD-AFC4-6F175D3DCCD1}">
+              <a14:hiddenFill xmlns:a14="http://schemas.microsoft.com/office/drawing/2010/main">
+                <a:solidFill>
+                  <a:srgbClr val="FFFFFF"/>
+                </a:solidFill>
+              </a14:hiddenFill>
+            </a:ext>
+          </a:extLst>
+        </p:spPr>
+      </p:pic>
+      <p:sp>
+        <p:nvSpPr>
+          <p:cNvPr id="7" name="CuadroTexto 6">
+            <a:extLst>
+              <a:ext uri="{FF2B5EF4-FFF2-40B4-BE49-F238E27FC236}">
+                <a16:creationId xmlns:a16="http://schemas.microsoft.com/office/drawing/2014/main" id="{48A0B6F0-1EF6-40F1-A6A1-E5D911F0D077}"/>
+              </a:ext>
+            </a:extLst>
+          </p:cNvPr>
+          <p:cNvSpPr txBox="1"/>
+          <p:nvPr/>
+        </p:nvSpPr>
+        <p:spPr>
+          <a:xfrm>
+            <a:off x="2032000" y="6190534"/>
+            <a:ext cx="4064000" cy="307777"/>
+          </a:xfrm>
+          <a:prstGeom prst="rect">
+            <a:avLst/>
+          </a:prstGeom>
+          <a:noFill/>
+        </p:spPr>
+        <p:txBody>
+          <a:bodyPr wrap="square">
+            <a:spAutoFit/>
+          </a:bodyPr>
+          <a:lstStyle/>
+          <a:p>
+            <a:r>
+              <a:rPr lang="es-419" sz="1400" dirty="0"/>
+              <a:t>Fuente: https://github.com/ddd-crew/</a:t>
+            </a:r>
+          </a:p>
+        </p:txBody>
+      </p:sp>
+    </p:spTree>
+    <p:extLst>
+      <p:ext uri="{BB962C8B-B14F-4D97-AF65-F5344CB8AC3E}">
+        <p14:creationId xmlns:p14="http://schemas.microsoft.com/office/powerpoint/2010/main" val="1422279637"/>
+      </p:ext>
+    </p:extLst>
+  </p:cSld>
+  <p:clrMapOvr>
+    <a:masterClrMapping/>
+  </p:clrMapOvr>
+</p:sld>
+</file>
+
+<file path=ppt/slides/slide22.xml><?xml version="1.0" encoding="utf-8"?>
+<p:sld xmlns:a="http://schemas.openxmlformats.org/drawingml/2006/main" xmlns:r="http://schemas.openxmlformats.org/officeDocument/2006/relationships" xmlns:p="http://schemas.openxmlformats.org/presentationml/2006/main">
+  <p:cSld>
+    <p:spTree>
+      <p:nvGrpSpPr>
+        <p:cNvPr id="1" name=""/>
+        <p:cNvGrpSpPr/>
+        <p:nvPr/>
+      </p:nvGrpSpPr>
+      <p:grpSpPr>
+        <a:xfrm>
+          <a:off x="0" y="0"/>
+          <a:ext cx="0" cy="0"/>
+          <a:chOff x="0" y="0"/>
+          <a:chExt cx="0" cy="0"/>
+        </a:xfrm>
+      </p:grpSpPr>
       <p:pic>
         <p:nvPicPr>
           <p:cNvPr id="6146" name="Picture 2">
@@ -15853,208 +17501,7 @@
 </p:sld>
 </file>
 
-<file path=ppt/slides/slide21.xml><?xml version="1.0" encoding="utf-8"?>
-<p:sld xmlns:a="http://schemas.openxmlformats.org/drawingml/2006/main" xmlns:r="http://schemas.openxmlformats.org/officeDocument/2006/relationships" xmlns:p="http://schemas.openxmlformats.org/presentationml/2006/main">
-  <p:cSld>
-    <p:spTree>
-      <p:nvGrpSpPr>
-        <p:cNvPr id="1" name=""/>
-        <p:cNvGrpSpPr/>
-        <p:nvPr/>
-      </p:nvGrpSpPr>
-      <p:grpSpPr>
-        <a:xfrm>
-          <a:off x="0" y="0"/>
-          <a:ext cx="0" cy="0"/>
-          <a:chOff x="0" y="0"/>
-          <a:chExt cx="0" cy="0"/>
-        </a:xfrm>
-      </p:grpSpPr>
-      <p:sp>
-        <p:nvSpPr>
-          <p:cNvPr id="2" name="CuadroTexto 1">
-            <a:extLst>
-              <a:ext uri="{FF2B5EF4-FFF2-40B4-BE49-F238E27FC236}">
-                <a16:creationId xmlns:a16="http://schemas.microsoft.com/office/drawing/2014/main" id="{47658725-9CA2-4FA6-95AC-4E5B14586145}"/>
-              </a:ext>
-            </a:extLst>
-          </p:cNvPr>
-          <p:cNvSpPr txBox="1"/>
-          <p:nvPr/>
-        </p:nvSpPr>
-        <p:spPr>
-          <a:xfrm>
-            <a:off x="672029" y="611919"/>
-            <a:ext cx="6993068" cy="584775"/>
-          </a:xfrm>
-          <a:prstGeom prst="rect">
-            <a:avLst/>
-          </a:prstGeom>
-          <a:noFill/>
-        </p:spPr>
-        <p:txBody>
-          <a:bodyPr wrap="none" rtlCol="0">
-            <a:spAutoFit/>
-          </a:bodyPr>
-          <a:lstStyle/>
-          <a:p>
-            <a:r>
-              <a:rPr lang="es-ES" sz="3200" dirty="0"/>
-              <a:t>Ejemplo: Identificación </a:t>
-            </a:r>
-            <a:r>
-              <a:rPr lang="es-ES" sz="3200" dirty="0" err="1"/>
-              <a:t>Bounded</a:t>
-            </a:r>
-            <a:r>
-              <a:rPr lang="es-ES" sz="3200" dirty="0"/>
-              <a:t> </a:t>
-            </a:r>
-            <a:r>
-              <a:rPr lang="es-ES" sz="3200" dirty="0" err="1"/>
-              <a:t>Context</a:t>
-            </a:r>
-            <a:endParaRPr lang="es-ES" sz="3200" dirty="0"/>
-          </a:p>
-        </p:txBody>
-      </p:sp>
-      <p:pic>
-        <p:nvPicPr>
-          <p:cNvPr id="4" name="Imagen 3">
-            <a:extLst>
-              <a:ext uri="{FF2B5EF4-FFF2-40B4-BE49-F238E27FC236}">
-                <a16:creationId xmlns:a16="http://schemas.microsoft.com/office/drawing/2014/main" id="{40B9C87D-AEF7-4967-9E64-645E24BF9F78}"/>
-              </a:ext>
-            </a:extLst>
-          </p:cNvPr>
-          <p:cNvPicPr>
-            <a:picLocks noChangeAspect="1"/>
-          </p:cNvPicPr>
-          <p:nvPr/>
-        </p:nvPicPr>
-        <p:blipFill>
-          <a:blip r:embed="rId2"/>
-          <a:stretch>
-            <a:fillRect/>
-          </a:stretch>
-        </p:blipFill>
-        <p:spPr>
-          <a:xfrm>
-            <a:off x="1117600" y="1788227"/>
-            <a:ext cx="9697451" cy="2934982"/>
-          </a:xfrm>
-          <a:prstGeom prst="rect">
-            <a:avLst/>
-          </a:prstGeom>
-        </p:spPr>
-      </p:pic>
-      <p:sp>
-        <p:nvSpPr>
-          <p:cNvPr id="6" name="CuadroTexto 5">
-            <a:extLst>
-              <a:ext uri="{FF2B5EF4-FFF2-40B4-BE49-F238E27FC236}">
-                <a16:creationId xmlns:a16="http://schemas.microsoft.com/office/drawing/2014/main" id="{D053EFC6-2ABF-4419-BAA0-9450BE301ADE}"/>
-              </a:ext>
-            </a:extLst>
-          </p:cNvPr>
-          <p:cNvSpPr txBox="1"/>
-          <p:nvPr/>
-        </p:nvSpPr>
-        <p:spPr>
-          <a:xfrm>
-            <a:off x="1460499" y="4853077"/>
-            <a:ext cx="8567151" cy="923330"/>
-          </a:xfrm>
-          <a:prstGeom prst="rect">
-            <a:avLst/>
-          </a:prstGeom>
-          <a:noFill/>
-        </p:spPr>
-        <p:txBody>
-          <a:bodyPr wrap="square">
-            <a:spAutoFit/>
-          </a:bodyPr>
-          <a:lstStyle/>
-          <a:p>
-            <a:pPr marL="285750" indent="-285750">
-              <a:buFont typeface="Wingdings" panose="05000000000000000000" pitchFamily="2" charset="2"/>
-              <a:buChar char="q"/>
-            </a:pPr>
-            <a:r>
-              <a:rPr lang="es-ES" dirty="0"/>
-              <a:t>Cada BC debe tener su propio </a:t>
-            </a:r>
-            <a:r>
-              <a:rPr lang="es-ES" b="1" dirty="0"/>
-              <a:t>modelo de dominio</a:t>
-            </a:r>
-            <a:r>
-              <a:rPr lang="es-ES" dirty="0"/>
-              <a:t>, lógica y base de datos (si aplica).</a:t>
-            </a:r>
-          </a:p>
-          <a:p>
-            <a:pPr marL="285750" indent="-285750">
-              <a:buFont typeface="Wingdings" panose="05000000000000000000" pitchFamily="2" charset="2"/>
-              <a:buChar char="q"/>
-            </a:pPr>
-            <a:endParaRPr lang="es-ES" dirty="0"/>
-          </a:p>
-          <a:p>
-            <a:pPr marL="285750" indent="-285750">
-              <a:buFont typeface="Wingdings" panose="05000000000000000000" pitchFamily="2" charset="2"/>
-              <a:buChar char="q"/>
-            </a:pPr>
-            <a:r>
-              <a:rPr lang="es-ES" dirty="0"/>
-              <a:t>Relación entre </a:t>
-            </a:r>
-            <a:r>
-              <a:rPr lang="es-ES" dirty="0" err="1"/>
-              <a:t>BCs</a:t>
-            </a:r>
-            <a:r>
-              <a:rPr lang="es-ES" dirty="0"/>
-              <a:t> mediante </a:t>
-            </a:r>
-            <a:r>
-              <a:rPr lang="es-ES" b="1" dirty="0"/>
-              <a:t>eventos de dominio</a:t>
-            </a:r>
-            <a:r>
-              <a:rPr lang="es-ES" dirty="0"/>
-              <a:t> o </a:t>
-            </a:r>
-            <a:r>
-              <a:rPr lang="es-ES" b="1" dirty="0" err="1"/>
-              <a:t>APIs</a:t>
-            </a:r>
-            <a:r>
-              <a:rPr lang="es-ES" b="1" dirty="0"/>
-              <a:t> explícitas</a:t>
-            </a:r>
-            <a:r>
-              <a:rPr lang="es-ES" dirty="0"/>
-              <a:t>.</a:t>
-            </a:r>
-            <a:endParaRPr lang="es-419" dirty="0"/>
-          </a:p>
-        </p:txBody>
-      </p:sp>
-    </p:spTree>
-    <p:extLst>
-      <p:ext uri="{BB962C8B-B14F-4D97-AF65-F5344CB8AC3E}">
-        <p14:creationId xmlns:p14="http://schemas.microsoft.com/office/powerpoint/2010/main" val="2977100372"/>
-      </p:ext>
-    </p:extLst>
-  </p:cSld>
-  <p:clrMapOvr>
-    <a:masterClrMapping/>
-  </p:clrMapOvr>
-</p:sld>
-</file>
-
-<file path=ppt/slides/slide22.xml><?xml version="1.0" encoding="utf-8"?>
+<file path=ppt/slides/slide23.xml><?xml version="1.0" encoding="utf-8"?>
 <p:sld xmlns:a="http://schemas.openxmlformats.org/drawingml/2006/main" xmlns:r="http://schemas.openxmlformats.org/officeDocument/2006/relationships" xmlns:p="http://schemas.openxmlformats.org/presentationml/2006/main">
   <p:cSld>
     <p:spTree>
@@ -16292,7 +17739,7 @@
 </p:sld>
 </file>
 
-<file path=ppt/slides/slide23.xml><?xml version="1.0" encoding="utf-8"?>
+<file path=ppt/slides/slide24.xml><?xml version="1.0" encoding="utf-8"?>
 <p:sld xmlns:a="http://schemas.openxmlformats.org/drawingml/2006/main" xmlns:r="http://schemas.openxmlformats.org/officeDocument/2006/relationships" xmlns:p="http://schemas.openxmlformats.org/presentationml/2006/main">
   <p:cSld>
     <p:spTree>
@@ -16421,7 +17868,7 @@
 </p:sld>
 </file>
 
-<file path=ppt/slides/slide24.xml><?xml version="1.0" encoding="utf-8"?>
+<file path=ppt/slides/slide25.xml><?xml version="1.0" encoding="utf-8"?>
 <p:sld xmlns:a="http://schemas.openxmlformats.org/drawingml/2006/main" xmlns:r="http://schemas.openxmlformats.org/officeDocument/2006/relationships" xmlns:p="http://schemas.openxmlformats.org/presentationml/2006/main">
   <p:cSld>
     <p:spTree>
@@ -16532,7 +17979,7 @@
 </p:sld>
 </file>
 
-<file path=ppt/slides/slide25.xml><?xml version="1.0" encoding="utf-8"?>
+<file path=ppt/slides/slide26.xml><?xml version="1.0" encoding="utf-8"?>
 <p:sld xmlns:a="http://schemas.openxmlformats.org/drawingml/2006/main" xmlns:r="http://schemas.openxmlformats.org/officeDocument/2006/relationships" xmlns:p="http://schemas.openxmlformats.org/presentationml/2006/main">
   <p:cSld>
     <p:spTree>
@@ -16599,8 +18046,8 @@
         </p:nvSpPr>
         <p:spPr>
           <a:xfrm>
-            <a:off x="1209101" y="1632329"/>
-            <a:ext cx="9719632" cy="369332"/>
+            <a:off x="557111" y="2692457"/>
+            <a:ext cx="5443580" cy="1477328"/>
           </a:xfrm>
           <a:prstGeom prst="rect">
             <a:avLst/>
@@ -16615,18 +18062,128 @@
           <a:p>
             <a:r>
               <a:rPr lang="es-ES" dirty="0"/>
-              <a:t>Son grupos de entidades relacionadas que se tratan como una unidad para mantener la consistencia.</a:t>
+              <a:t>Son grupos de entidades y </a:t>
+            </a:r>
+            <a:r>
+              <a:rPr lang="es-ES" dirty="0" err="1"/>
+              <a:t>value</a:t>
+            </a:r>
+            <a:r>
+              <a:rPr lang="es-ES" dirty="0"/>
+              <a:t> </a:t>
+            </a:r>
+            <a:r>
+              <a:rPr lang="es-ES" dirty="0" err="1"/>
+              <a:t>objects</a:t>
+            </a:r>
+            <a:r>
+              <a:rPr lang="es-ES" dirty="0"/>
+              <a:t> relacionados, que se tratan como una unidad para mantener la consistencia. Define </a:t>
+            </a:r>
+            <a:r>
+              <a:rPr lang="es-ES" b="1" dirty="0">
+                <a:solidFill>
+                  <a:schemeClr val="accent6"/>
+                </a:solidFill>
+              </a:rPr>
+              <a:t>límites</a:t>
+            </a:r>
+            <a:r>
+              <a:rPr lang="es-ES" dirty="0"/>
+              <a:t> claros en torno a las entidades relacionadas y los objetos de valor, asegurando que se mantengan las invariantes.</a:t>
             </a:r>
             <a:endParaRPr lang="es-419" dirty="0"/>
+          </a:p>
+        </p:txBody>
+      </p:sp>
+      <p:sp>
+        <p:nvSpPr>
+          <p:cNvPr id="6" name="CuadroTexto 5">
+            <a:extLst>
+              <a:ext uri="{FF2B5EF4-FFF2-40B4-BE49-F238E27FC236}">
+                <a16:creationId xmlns:a16="http://schemas.microsoft.com/office/drawing/2014/main" id="{19F2E941-166E-4F70-B6B8-889B1AD7F38C}"/>
+              </a:ext>
+            </a:extLst>
+          </p:cNvPr>
+          <p:cNvSpPr txBox="1"/>
+          <p:nvPr/>
+        </p:nvSpPr>
+        <p:spPr>
+          <a:xfrm>
+            <a:off x="557111" y="1507457"/>
+            <a:ext cx="6036194" cy="923330"/>
+          </a:xfrm>
+          <a:prstGeom prst="rect">
+            <a:avLst/>
+          </a:prstGeom>
+          <a:noFill/>
+        </p:spPr>
+        <p:txBody>
+          <a:bodyPr wrap="square">
+            <a:spAutoFit/>
+          </a:bodyPr>
+          <a:lstStyle/>
+          <a:p>
+            <a:pPr algn="l"/>
+            <a:r>
+              <a:rPr lang="en-US" sz="1800" b="0" i="1" u="none" strike="noStrike" baseline="0" dirty="0">
+                <a:solidFill>
+                  <a:srgbClr val="333333"/>
+                </a:solidFill>
+                <a:latin typeface="LiberationSerif-Italic"/>
+              </a:rPr>
+              <a:t>An AGGREGATE is a cluster of associated objects that we treat</a:t>
+            </a:r>
+          </a:p>
+          <a:p>
+            <a:pPr algn="l"/>
+            <a:r>
+              <a:rPr lang="en-US" sz="1800" b="0" i="1" u="none" strike="noStrike" baseline="0" dirty="0">
+                <a:solidFill>
+                  <a:srgbClr val="333333"/>
+                </a:solidFill>
+                <a:latin typeface="LiberationSerif-Italic"/>
+              </a:rPr>
+              <a:t>as a unit for the purpose of data changes.</a:t>
+            </a:r>
+          </a:p>
+          <a:p>
+            <a:pPr algn="l"/>
+            <a:r>
+              <a:rPr lang="en-US" sz="1800" b="0" i="0" u="none" strike="noStrike" baseline="0" dirty="0">
+                <a:solidFill>
+                  <a:srgbClr val="333333"/>
+                </a:solidFill>
+                <a:latin typeface="LiberationSerif"/>
+              </a:rPr>
+              <a:t>—</a:t>
+            </a:r>
+            <a:r>
+              <a:rPr lang="en-US" sz="1800" b="0" i="0" u="none" strike="noStrike" baseline="0" dirty="0">
+                <a:solidFill>
+                  <a:srgbClr val="333333"/>
+                </a:solidFill>
+                <a:highlight>
+                  <a:srgbClr val="C0C0C0"/>
+                </a:highlight>
+                <a:latin typeface="LiberationSerif"/>
+              </a:rPr>
+              <a:t>Eric Evans, Domain-Driven Design blue book</a:t>
+            </a:r>
+            <a:endParaRPr lang="es-419" dirty="0">
+              <a:highlight>
+                <a:srgbClr val="C0C0C0"/>
+              </a:highlight>
+            </a:endParaRPr>
           </a:p>
         </p:txBody>
       </p:sp>
       <p:pic>
         <p:nvPicPr>
-          <p:cNvPr id="5" name="Imagen 4">
+          <p:cNvPr id="11" name="Imagen 10">
             <a:extLst>
               <a:ext uri="{FF2B5EF4-FFF2-40B4-BE49-F238E27FC236}">
-                <a16:creationId xmlns:a16="http://schemas.microsoft.com/office/drawing/2014/main" id="{1F5E2949-D2CC-4FB1-8C76-9C17BA611859}"/>
+                <a16:creationId xmlns:a16="http://schemas.microsoft.com/office/drawing/2014/main" id="{A17707C5-D7BD-4B4D-9F4E-0AD23817D043}"/>
               </a:ext>
             </a:extLst>
           </p:cNvPr>
@@ -16643,8 +18200,78 @@
         </p:blipFill>
         <p:spPr>
           <a:xfrm>
-            <a:off x="2095500" y="2562979"/>
-            <a:ext cx="8153399" cy="2710847"/>
+            <a:off x="6424423" y="894769"/>
+            <a:ext cx="4038950" cy="5311600"/>
+          </a:xfrm>
+          <a:prstGeom prst="rect">
+            <a:avLst/>
+          </a:prstGeom>
+        </p:spPr>
+      </p:pic>
+      <p:sp>
+        <p:nvSpPr>
+          <p:cNvPr id="12" name="CuadroTexto 11">
+            <a:extLst>
+              <a:ext uri="{FF2B5EF4-FFF2-40B4-BE49-F238E27FC236}">
+                <a16:creationId xmlns:a16="http://schemas.microsoft.com/office/drawing/2014/main" id="{1FCEE48B-8ADA-4D10-ABEF-F19CDA252420}"/>
+              </a:ext>
+            </a:extLst>
+          </p:cNvPr>
+          <p:cNvSpPr txBox="1"/>
+          <p:nvPr/>
+        </p:nvSpPr>
+        <p:spPr>
+          <a:xfrm>
+            <a:off x="9180095" y="5690936"/>
+            <a:ext cx="1380506" cy="261610"/>
+          </a:xfrm>
+          <a:prstGeom prst="rect">
+            <a:avLst/>
+          </a:prstGeom>
+          <a:noFill/>
+        </p:spPr>
+        <p:txBody>
+          <a:bodyPr wrap="none" rtlCol="0">
+            <a:spAutoFit/>
+          </a:bodyPr>
+          <a:lstStyle/>
+          <a:p>
+            <a:r>
+              <a:rPr lang="es-ES" sz="1100" dirty="0"/>
+              <a:t>Fuente: DDD </a:t>
+            </a:r>
+            <a:r>
+              <a:rPr lang="es-ES" sz="1100" dirty="0" err="1"/>
+              <a:t>toolbox</a:t>
+            </a:r>
+            <a:endParaRPr lang="es-419" sz="1100" dirty="0"/>
+          </a:p>
+        </p:txBody>
+      </p:sp>
+      <p:pic>
+        <p:nvPicPr>
+          <p:cNvPr id="13" name="Imagen 12">
+            <a:extLst>
+              <a:ext uri="{FF2B5EF4-FFF2-40B4-BE49-F238E27FC236}">
+                <a16:creationId xmlns:a16="http://schemas.microsoft.com/office/drawing/2014/main" id="{5421F90F-F853-486B-B12A-C12A1ECE7C24}"/>
+              </a:ext>
+            </a:extLst>
+          </p:cNvPr>
+          <p:cNvPicPr>
+            <a:picLocks noChangeAspect="1"/>
+          </p:cNvPicPr>
+          <p:nvPr/>
+        </p:nvPicPr>
+        <p:blipFill>
+          <a:blip r:embed="rId3"/>
+          <a:stretch>
+            <a:fillRect/>
+          </a:stretch>
+        </p:blipFill>
+        <p:spPr>
+          <a:xfrm>
+            <a:off x="795672" y="4355756"/>
+            <a:ext cx="4971906" cy="1666582"/>
           </a:xfrm>
           <a:prstGeom prst="rect">
             <a:avLst/>
@@ -16664,7 +18291,320 @@
 </p:sld>
 </file>
 
-<file path=ppt/slides/slide26.xml><?xml version="1.0" encoding="utf-8"?>
+<file path=ppt/slides/slide27.xml><?xml version="1.0" encoding="utf-8"?>
+<p:sld xmlns:a="http://schemas.openxmlformats.org/drawingml/2006/main" xmlns:r="http://schemas.openxmlformats.org/officeDocument/2006/relationships" xmlns:p="http://schemas.openxmlformats.org/presentationml/2006/main">
+  <p:cSld>
+    <p:spTree>
+      <p:nvGrpSpPr>
+        <p:cNvPr id="1" name=""/>
+        <p:cNvGrpSpPr/>
+        <p:nvPr/>
+      </p:nvGrpSpPr>
+      <p:grpSpPr>
+        <a:xfrm>
+          <a:off x="0" y="0"/>
+          <a:ext cx="0" cy="0"/>
+          <a:chOff x="0" y="0"/>
+          <a:chExt cx="0" cy="0"/>
+        </a:xfrm>
+      </p:grpSpPr>
+      <p:sp>
+        <p:nvSpPr>
+          <p:cNvPr id="2" name="CuadroTexto 1">
+            <a:extLst>
+              <a:ext uri="{FF2B5EF4-FFF2-40B4-BE49-F238E27FC236}">
+                <a16:creationId xmlns:a16="http://schemas.microsoft.com/office/drawing/2014/main" id="{0B167AF8-434B-4D63-89D4-D4251AB8264D}"/>
+              </a:ext>
+            </a:extLst>
+          </p:cNvPr>
+          <p:cNvSpPr txBox="1"/>
+          <p:nvPr/>
+        </p:nvSpPr>
+        <p:spPr>
+          <a:xfrm>
+            <a:off x="557111" y="661012"/>
+            <a:ext cx="5867312" cy="584775"/>
+          </a:xfrm>
+          <a:prstGeom prst="rect">
+            <a:avLst/>
+          </a:prstGeom>
+          <a:noFill/>
+        </p:spPr>
+        <p:txBody>
+          <a:bodyPr wrap="none" rtlCol="0">
+            <a:spAutoFit/>
+          </a:bodyPr>
+          <a:lstStyle/>
+          <a:p>
+            <a:r>
+              <a:rPr lang="es-ES" sz="3200" dirty="0"/>
+              <a:t>Elementos del modelo: Agregados</a:t>
+            </a:r>
+            <a:endParaRPr lang="es-419" sz="3200" dirty="0"/>
+          </a:p>
+        </p:txBody>
+      </p:sp>
+      <p:pic>
+        <p:nvPicPr>
+          <p:cNvPr id="8" name="Imagen 7">
+            <a:extLst>
+              <a:ext uri="{FF2B5EF4-FFF2-40B4-BE49-F238E27FC236}">
+                <a16:creationId xmlns:a16="http://schemas.microsoft.com/office/drawing/2014/main" id="{8B836193-E7B1-4DA1-9BC7-F2E1AFC99A86}"/>
+              </a:ext>
+            </a:extLst>
+          </p:cNvPr>
+          <p:cNvPicPr>
+            <a:picLocks noChangeAspect="1"/>
+          </p:cNvPicPr>
+          <p:nvPr/>
+        </p:nvPicPr>
+        <p:blipFill>
+          <a:blip r:embed="rId2"/>
+          <a:stretch>
+            <a:fillRect/>
+          </a:stretch>
+        </p:blipFill>
+        <p:spPr>
+          <a:xfrm>
+            <a:off x="1046555" y="2545507"/>
+            <a:ext cx="1445532" cy="1185000"/>
+          </a:xfrm>
+          <a:prstGeom prst="rect">
+            <a:avLst/>
+          </a:prstGeom>
+        </p:spPr>
+      </p:pic>
+      <p:sp>
+        <p:nvSpPr>
+          <p:cNvPr id="9" name="CuadroTexto 8">
+            <a:extLst>
+              <a:ext uri="{FF2B5EF4-FFF2-40B4-BE49-F238E27FC236}">
+                <a16:creationId xmlns:a16="http://schemas.microsoft.com/office/drawing/2014/main" id="{E0CFC9ED-A29F-47A2-8BAC-5D8CB6DDDA4E}"/>
+              </a:ext>
+            </a:extLst>
+          </p:cNvPr>
+          <p:cNvSpPr txBox="1"/>
+          <p:nvPr/>
+        </p:nvSpPr>
+        <p:spPr>
+          <a:xfrm>
+            <a:off x="557111" y="1654016"/>
+            <a:ext cx="1367682" cy="369332"/>
+          </a:xfrm>
+          <a:prstGeom prst="rect">
+            <a:avLst/>
+          </a:prstGeom>
+          <a:noFill/>
+        </p:spPr>
+        <p:txBody>
+          <a:bodyPr wrap="none" rtlCol="0">
+            <a:spAutoFit/>
+          </a:bodyPr>
+          <a:lstStyle/>
+          <a:p>
+            <a:r>
+              <a:rPr lang="es-ES" i="1" dirty="0"/>
+              <a:t>📌Ejemplo:</a:t>
+            </a:r>
+            <a:r>
+              <a:rPr lang="es-ES" dirty="0"/>
+              <a:t> </a:t>
+            </a:r>
+            <a:endParaRPr lang="es-419" dirty="0"/>
+          </a:p>
+        </p:txBody>
+      </p:sp>
+      <p:sp>
+        <p:nvSpPr>
+          <p:cNvPr id="10" name="CuadroTexto 9">
+            <a:extLst>
+              <a:ext uri="{FF2B5EF4-FFF2-40B4-BE49-F238E27FC236}">
+                <a16:creationId xmlns:a16="http://schemas.microsoft.com/office/drawing/2014/main" id="{AB63E22A-07B2-40D6-8F48-5B25D5C3DE43}"/>
+              </a:ext>
+            </a:extLst>
+          </p:cNvPr>
+          <p:cNvSpPr txBox="1"/>
+          <p:nvPr/>
+        </p:nvSpPr>
+        <p:spPr>
+          <a:xfrm>
+            <a:off x="3059380" y="1474619"/>
+            <a:ext cx="8575509" cy="3908762"/>
+          </a:xfrm>
+          <a:prstGeom prst="rect">
+            <a:avLst/>
+          </a:prstGeom>
+          <a:noFill/>
+        </p:spPr>
+        <p:txBody>
+          <a:bodyPr wrap="square">
+            <a:spAutoFit/>
+          </a:bodyPr>
+          <a:lstStyle/>
+          <a:p>
+            <a:r>
+              <a:rPr lang="es-419" sz="1600" dirty="0"/>
+              <a:t>En un sitio de compras, el carrito sería un agregado por: </a:t>
+            </a:r>
+          </a:p>
+          <a:p>
+            <a:endParaRPr lang="es-419" sz="1600" dirty="0"/>
+          </a:p>
+          <a:p>
+            <a:pPr marL="285750" indent="-285750">
+              <a:buFont typeface="Wingdings" panose="05000000000000000000" pitchFamily="2" charset="2"/>
+              <a:buChar char="ü"/>
+            </a:pPr>
+            <a:r>
+              <a:rPr lang="es-419" sz="1600" dirty="0"/>
+              <a:t>Es una colección de artículos que podemos tratar como una sola unidad. </a:t>
+            </a:r>
+          </a:p>
+          <a:p>
+            <a:pPr marL="285750" indent="-285750">
+              <a:buFont typeface="Wingdings" panose="05000000000000000000" pitchFamily="2" charset="2"/>
+              <a:buChar char="ü"/>
+            </a:pPr>
+            <a:endParaRPr lang="es-419" sz="1600" dirty="0"/>
+          </a:p>
+          <a:p>
+            <a:pPr marL="285750" indent="-285750">
+              <a:buFont typeface="Wingdings" panose="05000000000000000000" pitchFamily="2" charset="2"/>
+              <a:buChar char="ü"/>
+            </a:pPr>
+            <a:r>
+              <a:rPr lang="es-419" sz="1600" dirty="0"/>
+              <a:t>Se carga como un único bloque de datos desde los repositorios. </a:t>
+            </a:r>
+          </a:p>
+          <a:p>
+            <a:pPr marL="285750" indent="-285750">
+              <a:buFont typeface="Wingdings" panose="05000000000000000000" pitchFamily="2" charset="2"/>
+              <a:buChar char="ü"/>
+            </a:pPr>
+            <a:endParaRPr lang="es-419" sz="1600" dirty="0"/>
+          </a:p>
+          <a:p>
+            <a:pPr marL="285750" indent="-285750">
+              <a:buFont typeface="Wingdings" panose="05000000000000000000" pitchFamily="2" charset="2"/>
+              <a:buChar char="ü"/>
+            </a:pPr>
+            <a:r>
+              <a:rPr lang="es-419" sz="1600" dirty="0"/>
+              <a:t>Dos pedidos no deben modificar un carrito simultáneamente para evitar errores de concurrencia. </a:t>
+            </a:r>
+          </a:p>
+          <a:p>
+            <a:pPr marL="285750" indent="-285750">
+              <a:buFont typeface="Wingdings" panose="05000000000000000000" pitchFamily="2" charset="2"/>
+              <a:buChar char="ü"/>
+            </a:pPr>
+            <a:endParaRPr lang="es-419" sz="1600" dirty="0"/>
+          </a:p>
+          <a:p>
+            <a:pPr marL="285750" indent="-285750">
+              <a:buFont typeface="Wingdings" panose="05000000000000000000" pitchFamily="2" charset="2"/>
+              <a:buChar char="ü"/>
+            </a:pPr>
+            <a:r>
+              <a:rPr lang="es-419" sz="1600" dirty="0"/>
+              <a:t>Cada cambio en el carrito se debe ejecutar en una sola transacción. </a:t>
+            </a:r>
+          </a:p>
+          <a:p>
+            <a:pPr marL="285750" indent="-285750">
+              <a:buFont typeface="Wingdings" panose="05000000000000000000" pitchFamily="2" charset="2"/>
+              <a:buChar char="ü"/>
+            </a:pPr>
+            <a:endParaRPr lang="es-419" sz="1600" dirty="0"/>
+          </a:p>
+          <a:p>
+            <a:pPr marL="285750" indent="-285750">
+              <a:buFont typeface="Wingdings" panose="05000000000000000000" pitchFamily="2" charset="2"/>
+              <a:buChar char="ü"/>
+            </a:pPr>
+            <a:r>
+              <a:rPr lang="es-419" sz="1600" dirty="0"/>
+              <a:t>En una transacción, no tiene sentido cambiar los carritos de varios pedidos al mismo tiempo. </a:t>
+            </a:r>
+          </a:p>
+          <a:p>
+            <a:pPr marL="285750" indent="-285750">
+              <a:buFont typeface="Wingdings" panose="05000000000000000000" pitchFamily="2" charset="2"/>
+              <a:buChar char="ü"/>
+            </a:pPr>
+            <a:endParaRPr lang="es-419" sz="1600" dirty="0"/>
+          </a:p>
+          <a:p>
+            <a:pPr marL="285750" indent="-285750">
+              <a:buFont typeface="Wingdings" panose="05000000000000000000" pitchFamily="2" charset="2"/>
+              <a:buChar char="ü"/>
+            </a:pPr>
+            <a:r>
+              <a:rPr lang="es-419" sz="1600" dirty="0"/>
+              <a:t>Cada carrito es un límite de consistencia (en cambios) independiente (lo que pasa en un carrito no afecta a los otros), responsable de mantener sus propias invariantes (valida sus propias reglas de negocio).</a:t>
+            </a:r>
+          </a:p>
+        </p:txBody>
+      </p:sp>
+      <p:sp>
+        <p:nvSpPr>
+          <p:cNvPr id="12" name="CuadroTexto 11">
+            <a:extLst>
+              <a:ext uri="{FF2B5EF4-FFF2-40B4-BE49-F238E27FC236}">
+                <a16:creationId xmlns:a16="http://schemas.microsoft.com/office/drawing/2014/main" id="{54D11CFB-957C-4FB8-BC72-C13953381A8F}"/>
+              </a:ext>
+            </a:extLst>
+          </p:cNvPr>
+          <p:cNvSpPr txBox="1"/>
+          <p:nvPr/>
+        </p:nvSpPr>
+        <p:spPr>
+          <a:xfrm>
+            <a:off x="1871413" y="5437667"/>
+            <a:ext cx="7817519" cy="707886"/>
+          </a:xfrm>
+          <a:prstGeom prst="rect">
+            <a:avLst/>
+          </a:prstGeom>
+          <a:noFill/>
+        </p:spPr>
+        <p:txBody>
+          <a:bodyPr wrap="square">
+            <a:spAutoFit/>
+          </a:bodyPr>
+          <a:lstStyle/>
+          <a:p>
+            <a:r>
+              <a:rPr lang="es-ES" sz="2000" b="1" dirty="0">
+                <a:solidFill>
+                  <a:schemeClr val="accent6"/>
+                </a:solidFill>
+              </a:rPr>
+              <a:t>El agregado será el límite donde nos aseguramos de que cada operación termine en un estado consistente.</a:t>
+            </a:r>
+            <a:endParaRPr lang="es-419" sz="2000" b="1" dirty="0">
+              <a:solidFill>
+                <a:schemeClr val="accent6"/>
+              </a:solidFill>
+            </a:endParaRPr>
+          </a:p>
+        </p:txBody>
+      </p:sp>
+    </p:spTree>
+    <p:extLst>
+      <p:ext uri="{BB962C8B-B14F-4D97-AF65-F5344CB8AC3E}">
+        <p14:creationId xmlns:p14="http://schemas.microsoft.com/office/powerpoint/2010/main" val="1073201942"/>
+      </p:ext>
+    </p:extLst>
+  </p:cSld>
+  <p:clrMapOvr>
+    <a:masterClrMapping/>
+  </p:clrMapOvr>
+</p:sld>
+</file>
+
+<file path=ppt/slides/slide28.xml><?xml version="1.0" encoding="utf-8"?>
 <p:sld xmlns:a="http://schemas.openxmlformats.org/drawingml/2006/main" xmlns:r="http://schemas.openxmlformats.org/officeDocument/2006/relationships" xmlns:p="http://schemas.openxmlformats.org/presentationml/2006/main">
   <p:cSld>
     <p:spTree>
@@ -16717,34 +18657,260 @@
           </a:p>
         </p:txBody>
       </p:sp>
+      <p:sp>
+        <p:nvSpPr>
+          <p:cNvPr id="5" name="CuadroTexto 4">
+            <a:extLst>
+              <a:ext uri="{FF2B5EF4-FFF2-40B4-BE49-F238E27FC236}">
+                <a16:creationId xmlns:a16="http://schemas.microsoft.com/office/drawing/2014/main" id="{1CC7339D-50B0-413A-ABE5-C379773AF4B5}"/>
+              </a:ext>
+            </a:extLst>
+          </p:cNvPr>
+          <p:cNvSpPr txBox="1"/>
+          <p:nvPr/>
+        </p:nvSpPr>
+        <p:spPr>
+          <a:xfrm>
+            <a:off x="2077453" y="1245787"/>
+            <a:ext cx="9821779" cy="4985980"/>
+          </a:xfrm>
+          <a:prstGeom prst="rect">
+            <a:avLst/>
+          </a:prstGeom>
+          <a:noFill/>
+        </p:spPr>
+        <p:txBody>
+          <a:bodyPr wrap="square">
+            <a:spAutoFit/>
+          </a:bodyPr>
+          <a:lstStyle/>
+          <a:p>
+            <a:r>
+              <a:rPr lang="es-ES" dirty="0"/>
+              <a:t>El agregado tiene una entidad raíz (o </a:t>
+            </a:r>
+            <a:r>
+              <a:rPr lang="es-ES" dirty="0" err="1"/>
+              <a:t>root</a:t>
+            </a:r>
+            <a:r>
+              <a:rPr lang="es-ES" dirty="0"/>
+              <a:t> </a:t>
+            </a:r>
+            <a:r>
+              <a:rPr lang="es-ES" dirty="0" err="1"/>
+              <a:t>aggregate</a:t>
+            </a:r>
+            <a:r>
+              <a:rPr lang="es-ES" dirty="0"/>
+              <a:t>). En este caso es el Carrito en si) que encapsula el acceso a los artículos. </a:t>
+            </a:r>
+          </a:p>
+          <a:p>
+            <a:r>
+              <a:rPr lang="es-ES" i="1" dirty="0"/>
+              <a:t>Cada artículo tiene su propia identidad</a:t>
+            </a:r>
+            <a:r>
+              <a:rPr lang="es-ES" dirty="0"/>
+              <a:t>, pero otras partes del sistema siempre se referirán al Carrito únicamente como un todo indivisible.</a:t>
+            </a:r>
+          </a:p>
+          <a:p>
+            <a:endParaRPr lang="es-419" dirty="0"/>
+          </a:p>
+          <a:p>
+            <a:r>
+              <a:rPr lang="es-ES" dirty="0"/>
+              <a:t>Funciones clave:</a:t>
+            </a:r>
+          </a:p>
+          <a:p>
+            <a:endParaRPr lang="es-ES" dirty="0"/>
+          </a:p>
+          <a:p>
+            <a:pPr marL="285750" indent="-285750">
+              <a:buFont typeface="Arial" panose="020B0604020202020204" pitchFamily="34" charset="0"/>
+              <a:buChar char="•"/>
+            </a:pPr>
+            <a:r>
+              <a:rPr lang="es-ES" sz="1600" b="1" dirty="0"/>
+              <a:t>Punto de acceso único</a:t>
+            </a:r>
+            <a:r>
+              <a:rPr lang="es-ES" sz="1600" dirty="0"/>
+              <a:t>: </a:t>
+            </a:r>
+            <a:r>
+              <a:rPr lang="es-ES" sz="1600" dirty="0">
+                <a:solidFill>
+                  <a:schemeClr val="bg2">
+                    <a:lumMod val="75000"/>
+                  </a:schemeClr>
+                </a:solidFill>
+              </a:rPr>
+              <a:t>Cualquier cambio que se quiera hacer en el carrito (como cambiar la cantidad de un producto o eliminar un ítem) debe pasar obligatoriamente por la entidad Carrito. No se puede modificar un ítem directamente desde fuera sin hablar con el Carrito.</a:t>
+            </a:r>
+          </a:p>
+          <a:p>
+            <a:pPr marL="285750" indent="-285750">
+              <a:buFont typeface="Arial" panose="020B0604020202020204" pitchFamily="34" charset="0"/>
+              <a:buChar char="•"/>
+            </a:pPr>
+            <a:endParaRPr lang="es-ES" sz="1600" dirty="0">
+              <a:solidFill>
+                <a:schemeClr val="bg2">
+                  <a:lumMod val="75000"/>
+                </a:schemeClr>
+              </a:solidFill>
+            </a:endParaRPr>
+          </a:p>
+          <a:p>
+            <a:pPr marL="285750" indent="-285750">
+              <a:buFont typeface="Arial" panose="020B0604020202020204" pitchFamily="34" charset="0"/>
+              <a:buChar char="•"/>
+            </a:pPr>
+            <a:r>
+              <a:rPr lang="es-ES" sz="1600" b="1" dirty="0"/>
+              <a:t>Asegura la consistencia</a:t>
+            </a:r>
+            <a:r>
+              <a:rPr lang="es-ES" sz="1600" dirty="0"/>
+              <a:t>: </a:t>
+            </a:r>
+            <a:r>
+              <a:rPr lang="es-ES" sz="1600" dirty="0">
+                <a:solidFill>
+                  <a:schemeClr val="bg2">
+                    <a:lumMod val="75000"/>
+                  </a:schemeClr>
+                </a:solidFill>
+              </a:rPr>
+              <a:t>Es el responsable de asegurar que todas las reglas de negocio (invariantes) se cumplan antes de guardar cualquier cambio.</a:t>
+            </a:r>
+          </a:p>
+          <a:p>
+            <a:pPr marL="285750" indent="-285750">
+              <a:buFont typeface="Arial" panose="020B0604020202020204" pitchFamily="34" charset="0"/>
+              <a:buChar char="•"/>
+            </a:pPr>
+            <a:endParaRPr lang="es-ES" sz="1600" dirty="0">
+              <a:solidFill>
+                <a:schemeClr val="bg2">
+                  <a:lumMod val="75000"/>
+                </a:schemeClr>
+              </a:solidFill>
+            </a:endParaRPr>
+          </a:p>
+          <a:p>
+            <a:pPr marL="285750" indent="-285750">
+              <a:buFont typeface="Arial" panose="020B0604020202020204" pitchFamily="34" charset="0"/>
+              <a:buChar char="•"/>
+            </a:pPr>
+            <a:r>
+              <a:rPr lang="es-ES" sz="1600" b="1" dirty="0"/>
+              <a:t>Tiene Identidad global</a:t>
+            </a:r>
+            <a:r>
+              <a:rPr lang="es-ES" sz="1600" dirty="0"/>
+              <a:t>: </a:t>
+            </a:r>
+            <a:r>
+              <a:rPr lang="es-ES" sz="1600" dirty="0">
+                <a:solidFill>
+                  <a:schemeClr val="bg2">
+                    <a:lumMod val="75000"/>
+                  </a:schemeClr>
+                </a:solidFill>
+              </a:rPr>
+              <a:t>Es la única entidad dentro del grupo que tiene un identificador que el resto del sistema conoce. (tiene su propio id)</a:t>
+            </a:r>
+          </a:p>
+          <a:p>
+            <a:pPr marL="285750" indent="-285750">
+              <a:buFont typeface="Arial" panose="020B0604020202020204" pitchFamily="34" charset="0"/>
+              <a:buChar char="•"/>
+            </a:pPr>
+            <a:endParaRPr lang="es-ES" sz="1600" dirty="0"/>
+          </a:p>
+          <a:p>
+            <a:pPr marL="285750" indent="-285750">
+              <a:buFont typeface="Arial" panose="020B0604020202020204" pitchFamily="34" charset="0"/>
+              <a:buChar char="•"/>
+            </a:pPr>
+            <a:r>
+              <a:rPr lang="es-ES" sz="1600" b="1" dirty="0"/>
+              <a:t>Unidad de persistencia</a:t>
+            </a:r>
+            <a:r>
+              <a:rPr lang="es-ES" sz="1600" dirty="0"/>
+              <a:t>: </a:t>
+            </a:r>
+            <a:r>
+              <a:rPr lang="es-ES" sz="1600" dirty="0">
+                <a:solidFill>
+                  <a:schemeClr val="bg2">
+                    <a:lumMod val="75000"/>
+                  </a:schemeClr>
+                </a:solidFill>
+              </a:rPr>
+              <a:t>Cuando guardas el carrito en la base de datos, guardas todo el "bloque" (el carrito y sus ítems) en una sola transacción</a:t>
+            </a:r>
+            <a:endParaRPr lang="es-419" sz="1600" dirty="0">
+              <a:solidFill>
+                <a:schemeClr val="bg2">
+                  <a:lumMod val="75000"/>
+                </a:schemeClr>
+              </a:solidFill>
+            </a:endParaRPr>
+          </a:p>
+        </p:txBody>
+      </p:sp>
       <p:pic>
         <p:nvPicPr>
-          <p:cNvPr id="4" name="Imagen 3">
+          <p:cNvPr id="1026" name="Picture 2">
             <a:extLst>
               <a:ext uri="{FF2B5EF4-FFF2-40B4-BE49-F238E27FC236}">
-                <a16:creationId xmlns:a16="http://schemas.microsoft.com/office/drawing/2014/main" id="{6280915E-F0C7-4604-B912-80A75232357A}"/>
+                <a16:creationId xmlns:a16="http://schemas.microsoft.com/office/drawing/2014/main" id="{15ACA91B-8D2E-475C-B60E-67EC16E49798}"/>
               </a:ext>
             </a:extLst>
           </p:cNvPr>
           <p:cNvPicPr>
-            <a:picLocks noChangeAspect="1"/>
+            <a:picLocks noChangeAspect="1" noChangeArrowheads="1"/>
           </p:cNvPicPr>
           <p:nvPr/>
         </p:nvPicPr>
         <p:blipFill>
-          <a:blip r:embed="rId2"/>
+          <a:blip r:embed="rId2">
+            <a:extLst>
+              <a:ext uri="{28A0092B-C50C-407E-A947-70E740481C1C}">
+                <a14:useLocalDpi xmlns:a14="http://schemas.microsoft.com/office/drawing/2010/main" val="0"/>
+              </a:ext>
+            </a:extLst>
+          </a:blip>
+          <a:srcRect/>
           <a:stretch>
             <a:fillRect/>
           </a:stretch>
         </p:blipFill>
-        <p:spPr>
+        <p:spPr bwMode="auto">
           <a:xfrm>
-            <a:off x="1253628" y="1860533"/>
-            <a:ext cx="8688073" cy="3136934"/>
+            <a:off x="557111" y="2400300"/>
+            <a:ext cx="1114425" cy="1028700"/>
           </a:xfrm>
           <a:prstGeom prst="rect">
             <a:avLst/>
           </a:prstGeom>
+          <a:noFill/>
+          <a:extLst>
+            <a:ext uri="{909E8E84-426E-40DD-AFC4-6F175D3DCCD1}">
+              <a14:hiddenFill xmlns:a14="http://schemas.microsoft.com/office/drawing/2010/main">
+                <a:solidFill>
+                  <a:srgbClr val="FFFFFF"/>
+                </a:solidFill>
+              </a14:hiddenFill>
+            </a:ext>
+          </a:extLst>
         </p:spPr>
       </p:pic>
     </p:spTree>
@@ -16760,7 +18926,783 @@
 </p:sld>
 </file>
 
-<file path=ppt/slides/slide27.xml><?xml version="1.0" encoding="utf-8"?>
+<file path=ppt/slides/slide29.xml><?xml version="1.0" encoding="utf-8"?>
+<p:sld xmlns:a="http://schemas.openxmlformats.org/drawingml/2006/main" xmlns:r="http://schemas.openxmlformats.org/officeDocument/2006/relationships" xmlns:p="http://schemas.openxmlformats.org/presentationml/2006/main">
+  <p:cSld>
+    <p:spTree>
+      <p:nvGrpSpPr>
+        <p:cNvPr id="1" name=""/>
+        <p:cNvGrpSpPr/>
+        <p:nvPr/>
+      </p:nvGrpSpPr>
+      <p:grpSpPr>
+        <a:xfrm>
+          <a:off x="0" y="0"/>
+          <a:ext cx="0" cy="0"/>
+          <a:chOff x="0" y="0"/>
+          <a:chExt cx="0" cy="0"/>
+        </a:xfrm>
+      </p:grpSpPr>
+      <p:sp>
+        <p:nvSpPr>
+          <p:cNvPr id="2" name="CuadroTexto 1">
+            <a:extLst>
+              <a:ext uri="{FF2B5EF4-FFF2-40B4-BE49-F238E27FC236}">
+                <a16:creationId xmlns:a16="http://schemas.microsoft.com/office/drawing/2014/main" id="{29F9292A-145B-41E7-B5FC-919E280565E6}"/>
+              </a:ext>
+            </a:extLst>
+          </p:cNvPr>
+          <p:cNvSpPr txBox="1"/>
+          <p:nvPr/>
+        </p:nvSpPr>
+        <p:spPr>
+          <a:xfrm>
+            <a:off x="557111" y="661012"/>
+            <a:ext cx="5867312" cy="584775"/>
+          </a:xfrm>
+          <a:prstGeom prst="rect">
+            <a:avLst/>
+          </a:prstGeom>
+          <a:noFill/>
+        </p:spPr>
+        <p:txBody>
+          <a:bodyPr wrap="none" rtlCol="0">
+            <a:spAutoFit/>
+          </a:bodyPr>
+          <a:lstStyle/>
+          <a:p>
+            <a:r>
+              <a:rPr lang="es-ES" sz="3200" dirty="0"/>
+              <a:t>Elementos del modelo: Agregados</a:t>
+            </a:r>
+            <a:endParaRPr lang="es-419" sz="3200" dirty="0"/>
+          </a:p>
+        </p:txBody>
+      </p:sp>
+      <p:sp>
+        <p:nvSpPr>
+          <p:cNvPr id="4" name="CuadroTexto 3">
+            <a:extLst>
+              <a:ext uri="{FF2B5EF4-FFF2-40B4-BE49-F238E27FC236}">
+                <a16:creationId xmlns:a16="http://schemas.microsoft.com/office/drawing/2014/main" id="{F5FE530D-B654-42E2-8CA0-BDB9A2F75086}"/>
+              </a:ext>
+            </a:extLst>
+          </p:cNvPr>
+          <p:cNvSpPr txBox="1"/>
+          <p:nvPr/>
+        </p:nvSpPr>
+        <p:spPr>
+          <a:xfrm>
+            <a:off x="1236569" y="1905506"/>
+            <a:ext cx="9339188" cy="3970318"/>
+          </a:xfrm>
+          <a:prstGeom prst="rect">
+            <a:avLst/>
+          </a:prstGeom>
+          <a:noFill/>
+        </p:spPr>
+        <p:txBody>
+          <a:bodyPr wrap="square">
+            <a:spAutoFit/>
+          </a:bodyPr>
+          <a:lstStyle/>
+          <a:p>
+            <a:r>
+              <a:rPr lang="es-ES" dirty="0"/>
+              <a:t>PROS </a:t>
+            </a:r>
+          </a:p>
+          <a:p>
+            <a:endParaRPr lang="es-ES" dirty="0"/>
+          </a:p>
+          <a:p>
+            <a:pPr marL="285750" indent="-285750">
+              <a:buClr>
+                <a:srgbClr val="00B050"/>
+              </a:buClr>
+              <a:buFont typeface="Wingdings" panose="05000000000000000000" pitchFamily="2" charset="2"/>
+              <a:buChar char="ü"/>
+            </a:pPr>
+            <a:r>
+              <a:rPr lang="es-ES" dirty="0"/>
+              <a:t>Los agregados encapsulan entidades y objetos de valor relacionados, garantizando que toda la lógica de negocio asociada a ellos se encuentre contenida dentro de una sola unidad. </a:t>
+            </a:r>
+          </a:p>
+          <a:p>
+            <a:pPr marL="285750" indent="-285750">
+              <a:buClr>
+                <a:srgbClr val="00B050"/>
+              </a:buClr>
+              <a:buFont typeface="Wingdings" panose="05000000000000000000" pitchFamily="2" charset="2"/>
+              <a:buChar char="ü"/>
+            </a:pPr>
+            <a:endParaRPr lang="es-ES" dirty="0"/>
+          </a:p>
+          <a:p>
+            <a:pPr marL="285750" indent="-285750">
+              <a:buClr>
+                <a:srgbClr val="00B050"/>
+              </a:buClr>
+              <a:buFont typeface="Wingdings" panose="05000000000000000000" pitchFamily="2" charset="2"/>
+              <a:buChar char="ü"/>
+            </a:pPr>
+            <a:r>
+              <a:rPr lang="es-ES" dirty="0"/>
+              <a:t>Esto promueve la adhesión a los principios del diseño orientado a objetos y DDD. </a:t>
+            </a:r>
+          </a:p>
+          <a:p>
+            <a:pPr marL="285750" indent="-285750">
+              <a:buClr>
+                <a:srgbClr val="00B050"/>
+              </a:buClr>
+              <a:buFont typeface="Wingdings" panose="05000000000000000000" pitchFamily="2" charset="2"/>
+              <a:buChar char="ü"/>
+            </a:pPr>
+            <a:endParaRPr lang="es-ES" dirty="0"/>
+          </a:p>
+          <a:p>
+            <a:pPr marL="285750" indent="-285750">
+              <a:buClr>
+                <a:srgbClr val="00B050"/>
+              </a:buClr>
+              <a:buFont typeface="Wingdings" panose="05000000000000000000" pitchFamily="2" charset="2"/>
+              <a:buChar char="ü"/>
+            </a:pPr>
+            <a:r>
+              <a:rPr lang="es-ES" dirty="0"/>
+              <a:t>Al gestionar las operaciones mediante un agregado, se pueden aplicar invariantes y reglas de negocio, asegurando que los datos se mantengan consistentes y válidos durante todo el ciclo de vida del agregado.</a:t>
+            </a:r>
+          </a:p>
+          <a:p>
+            <a:pPr marL="285750" indent="-285750">
+              <a:buClr>
+                <a:srgbClr val="00B050"/>
+              </a:buClr>
+              <a:buFont typeface="Wingdings" panose="05000000000000000000" pitchFamily="2" charset="2"/>
+              <a:buChar char="ü"/>
+            </a:pPr>
+            <a:endParaRPr lang="es-ES" dirty="0"/>
+          </a:p>
+          <a:p>
+            <a:pPr marL="285750" indent="-285750">
+              <a:buClr>
+                <a:srgbClr val="00B050"/>
+              </a:buClr>
+              <a:buFont typeface="Wingdings" panose="05000000000000000000" pitchFamily="2" charset="2"/>
+              <a:buChar char="ü"/>
+            </a:pPr>
+            <a:r>
+              <a:rPr lang="es-ES" dirty="0"/>
+              <a:t>Los agregados definen límites claros dentro de un contexto delimitado, facilitando la comprensión de las relaciones y responsabilidades de las diferentes partes del modelo de dominio.</a:t>
+            </a:r>
+            <a:endParaRPr lang="es-419" dirty="0"/>
+          </a:p>
+        </p:txBody>
+      </p:sp>
+    </p:spTree>
+    <p:extLst>
+      <p:ext uri="{BB962C8B-B14F-4D97-AF65-F5344CB8AC3E}">
+        <p14:creationId xmlns:p14="http://schemas.microsoft.com/office/powerpoint/2010/main" val="253266768"/>
+      </p:ext>
+    </p:extLst>
+  </p:cSld>
+  <p:clrMapOvr>
+    <a:masterClrMapping/>
+  </p:clrMapOvr>
+</p:sld>
+</file>
+
+<file path=ppt/slides/slide3.xml><?xml version="1.0" encoding="utf-8"?>
+<p:sld xmlns:a="http://schemas.openxmlformats.org/drawingml/2006/main" xmlns:r="http://schemas.openxmlformats.org/officeDocument/2006/relationships" xmlns:p="http://schemas.openxmlformats.org/presentationml/2006/main">
+  <p:cSld>
+    <p:spTree>
+      <p:nvGrpSpPr>
+        <p:cNvPr id="1" name=""/>
+        <p:cNvGrpSpPr/>
+        <p:nvPr/>
+      </p:nvGrpSpPr>
+      <p:grpSpPr>
+        <a:xfrm>
+          <a:off x="0" y="0"/>
+          <a:ext cx="0" cy="0"/>
+          <a:chOff x="0" y="0"/>
+          <a:chExt cx="0" cy="0"/>
+        </a:xfrm>
+      </p:grpSpPr>
+      <p:sp>
+        <p:nvSpPr>
+          <p:cNvPr id="2" name="CuadroTexto 1">
+            <a:extLst>
+              <a:ext uri="{FF2B5EF4-FFF2-40B4-BE49-F238E27FC236}">
+                <a16:creationId xmlns:a16="http://schemas.microsoft.com/office/drawing/2014/main" id="{BCEBE1A5-32D9-497B-8C90-4DC8A3DED951}"/>
+              </a:ext>
+            </a:extLst>
+          </p:cNvPr>
+          <p:cNvSpPr txBox="1"/>
+          <p:nvPr/>
+        </p:nvSpPr>
+        <p:spPr>
+          <a:xfrm>
+            <a:off x="557111" y="661012"/>
+            <a:ext cx="1922321" cy="584775"/>
+          </a:xfrm>
+          <a:prstGeom prst="rect">
+            <a:avLst/>
+          </a:prstGeom>
+          <a:noFill/>
+        </p:spPr>
+        <p:txBody>
+          <a:bodyPr wrap="none" rtlCol="0">
+            <a:spAutoFit/>
+          </a:bodyPr>
+          <a:lstStyle/>
+          <a:p>
+            <a:r>
+              <a:rPr lang="es-ES" sz="3200" dirty="0"/>
+              <a:t>Contenido</a:t>
+            </a:r>
+            <a:endParaRPr lang="es-419" sz="3200" dirty="0"/>
+          </a:p>
+        </p:txBody>
+      </p:sp>
+      <p:sp>
+        <p:nvSpPr>
+          <p:cNvPr id="4" name="CuadroTexto 3">
+            <a:extLst>
+              <a:ext uri="{FF2B5EF4-FFF2-40B4-BE49-F238E27FC236}">
+                <a16:creationId xmlns:a16="http://schemas.microsoft.com/office/drawing/2014/main" id="{CBDEAC8A-AE5E-4F91-8811-578DE9927514}"/>
+              </a:ext>
+            </a:extLst>
+          </p:cNvPr>
+          <p:cNvSpPr txBox="1"/>
+          <p:nvPr/>
+        </p:nvSpPr>
+        <p:spPr>
+          <a:xfrm>
+            <a:off x="645246" y="1333457"/>
+            <a:ext cx="5876740" cy="3276282"/>
+          </a:xfrm>
+          <a:prstGeom prst="rect">
+            <a:avLst/>
+          </a:prstGeom>
+          <a:noFill/>
+        </p:spPr>
+        <p:txBody>
+          <a:bodyPr wrap="square">
+            <a:spAutoFit/>
+          </a:bodyPr>
+          <a:lstStyle/>
+          <a:p>
+            <a:pPr marL="342900" indent="-342900">
+              <a:lnSpc>
+                <a:spcPct val="150000"/>
+              </a:lnSpc>
+              <a:buSzPct val="150000"/>
+              <a:buBlip>
+                <a:blip r:embed="rId2">
+                  <a:extLst>
+                    <a:ext uri="{96DAC541-7B7A-43D3-8B79-37D633B846F1}">
+                      <asvg:svgBlip xmlns:asvg="http://schemas.microsoft.com/office/drawing/2016/SVG/main" r:embed="rId3"/>
+                    </a:ext>
+                  </a:extLst>
+                </a:blip>
+              </a:buBlip>
+            </a:pPr>
+            <a:r>
+              <a:rPr lang="es-419" sz="2000" dirty="0"/>
+              <a:t>	Dominio, clasificación</a:t>
+            </a:r>
+          </a:p>
+          <a:p>
+            <a:pPr marL="342900" indent="-342900">
+              <a:lnSpc>
+                <a:spcPct val="150000"/>
+              </a:lnSpc>
+              <a:buSzPct val="150000"/>
+              <a:buBlip>
+                <a:blip r:embed="rId2">
+                  <a:extLst>
+                    <a:ext uri="{96DAC541-7B7A-43D3-8B79-37D633B846F1}">
+                      <asvg:svgBlip xmlns:asvg="http://schemas.microsoft.com/office/drawing/2016/SVG/main" r:embed="rId3"/>
+                    </a:ext>
+                  </a:extLst>
+                </a:blip>
+              </a:buBlip>
+            </a:pPr>
+            <a:r>
+              <a:rPr lang="es-419" sz="2000" dirty="0"/>
+              <a:t>	Dominios Anémicos y Dominios Enriquecidos</a:t>
+            </a:r>
+          </a:p>
+          <a:p>
+            <a:pPr marL="342900" indent="-342900">
+              <a:lnSpc>
+                <a:spcPct val="150000"/>
+              </a:lnSpc>
+              <a:buSzPct val="150000"/>
+              <a:buBlip>
+                <a:blip r:embed="rId2">
+                  <a:extLst>
+                    <a:ext uri="{96DAC541-7B7A-43D3-8B79-37D633B846F1}">
+                      <asvg:svgBlip xmlns:asvg="http://schemas.microsoft.com/office/drawing/2016/SVG/main" r:embed="rId3"/>
+                    </a:ext>
+                  </a:extLst>
+                </a:blip>
+              </a:buBlip>
+            </a:pPr>
+            <a:r>
+              <a:rPr lang="es-419" sz="2000" dirty="0"/>
+              <a:t>	Entidad</a:t>
+            </a:r>
+          </a:p>
+          <a:p>
+            <a:pPr marL="342900" indent="-342900">
+              <a:lnSpc>
+                <a:spcPct val="150000"/>
+              </a:lnSpc>
+              <a:buSzPct val="150000"/>
+              <a:buBlip>
+                <a:blip r:embed="rId2">
+                  <a:extLst>
+                    <a:ext uri="{96DAC541-7B7A-43D3-8B79-37D633B846F1}">
+                      <asvg:svgBlip xmlns:asvg="http://schemas.microsoft.com/office/drawing/2016/SVG/main" r:embed="rId3"/>
+                    </a:ext>
+                  </a:extLst>
+                </a:blip>
+              </a:buBlip>
+            </a:pPr>
+            <a:r>
+              <a:rPr lang="es-419" sz="2000" dirty="0"/>
+              <a:t>	Agregado</a:t>
+            </a:r>
+          </a:p>
+          <a:p>
+            <a:pPr marL="342900" indent="-342900">
+              <a:lnSpc>
+                <a:spcPct val="150000"/>
+              </a:lnSpc>
+              <a:buSzPct val="150000"/>
+              <a:buBlip>
+                <a:blip r:embed="rId2">
+                  <a:extLst>
+                    <a:ext uri="{96DAC541-7B7A-43D3-8B79-37D633B846F1}">
+                      <asvg:svgBlip xmlns:asvg="http://schemas.microsoft.com/office/drawing/2016/SVG/main" r:embed="rId3"/>
+                    </a:ext>
+                  </a:extLst>
+                </a:blip>
+              </a:buBlip>
+            </a:pPr>
+            <a:r>
+              <a:rPr lang="es-419" sz="2000" dirty="0"/>
+              <a:t>	Objetos de Valor	</a:t>
+            </a:r>
+          </a:p>
+          <a:p>
+            <a:pPr marL="342900" indent="-342900">
+              <a:lnSpc>
+                <a:spcPct val="150000"/>
+              </a:lnSpc>
+              <a:buSzPct val="150000"/>
+              <a:buBlip>
+                <a:blip r:embed="rId2">
+                  <a:extLst>
+                    <a:ext uri="{96DAC541-7B7A-43D3-8B79-37D633B846F1}">
+                      <asvg:svgBlip xmlns:asvg="http://schemas.microsoft.com/office/drawing/2016/SVG/main" r:embed="rId3"/>
+                    </a:ext>
+                  </a:extLst>
+                </a:blip>
+              </a:buBlip>
+            </a:pPr>
+            <a:r>
+              <a:rPr lang="es-419" sz="2000" dirty="0"/>
+              <a:t>	Servicios y Eventos del Dominio</a:t>
+            </a:r>
+          </a:p>
+          <a:p>
+            <a:pPr marL="342900" indent="-342900">
+              <a:lnSpc>
+                <a:spcPct val="150000"/>
+              </a:lnSpc>
+              <a:buSzPct val="150000"/>
+              <a:buBlip>
+                <a:blip r:embed="rId2">
+                  <a:extLst>
+                    <a:ext uri="{96DAC541-7B7A-43D3-8B79-37D633B846F1}">
+                      <asvg:svgBlip xmlns:asvg="http://schemas.microsoft.com/office/drawing/2016/SVG/main" r:embed="rId3"/>
+                    </a:ext>
+                  </a:extLst>
+                </a:blip>
+              </a:buBlip>
+            </a:pPr>
+            <a:r>
+              <a:rPr lang="es-419" sz="2000" dirty="0"/>
+              <a:t>	Lenguaje Ubicuo</a:t>
+            </a:r>
+          </a:p>
+        </p:txBody>
+      </p:sp>
+      <p:sp>
+        <p:nvSpPr>
+          <p:cNvPr id="6" name="CuadroTexto 5">
+            <a:extLst>
+              <a:ext uri="{FF2B5EF4-FFF2-40B4-BE49-F238E27FC236}">
+                <a16:creationId xmlns:a16="http://schemas.microsoft.com/office/drawing/2014/main" id="{D446D497-B028-4F59-919C-35C5726F4292}"/>
+              </a:ext>
+            </a:extLst>
+          </p:cNvPr>
+          <p:cNvSpPr txBox="1"/>
+          <p:nvPr/>
+        </p:nvSpPr>
+        <p:spPr>
+          <a:xfrm>
+            <a:off x="7440941" y="1333457"/>
+            <a:ext cx="4310350" cy="2814617"/>
+          </a:xfrm>
+          <a:prstGeom prst="rect">
+            <a:avLst/>
+          </a:prstGeom>
+          <a:noFill/>
+        </p:spPr>
+        <p:txBody>
+          <a:bodyPr wrap="square">
+            <a:spAutoFit/>
+          </a:bodyPr>
+          <a:lstStyle>
+            <a:defPPr>
+              <a:defRPr lang="es-419"/>
+            </a:defPPr>
+            <a:lvl1pPr marL="342900" indent="-342900">
+              <a:lnSpc>
+                <a:spcPct val="150000"/>
+              </a:lnSpc>
+              <a:buSzPct val="150000"/>
+              <a:buBlip>
+                <a:blip r:embed="rId2">
+                  <a:extLst>
+                    <a:ext uri="{96DAC541-7B7A-43D3-8B79-37D633B846F1}">
+                      <asvg:svgBlip xmlns:asvg="http://schemas.microsoft.com/office/drawing/2016/SVG/main" r:embed="rId3"/>
+                    </a:ext>
+                  </a:extLst>
+                </a:blip>
+              </a:buBlip>
+              <a:defRPr sz="2000"/>
+            </a:lvl1pPr>
+            <a:lvl2pPr marL="800100" lvl="1" indent="-342900">
+              <a:lnSpc>
+                <a:spcPct val="150000"/>
+              </a:lnSpc>
+              <a:buSzPct val="150000"/>
+              <a:buBlip>
+                <a:blip r:embed="rId2">
+                  <a:extLst>
+                    <a:ext uri="{96DAC541-7B7A-43D3-8B79-37D633B846F1}">
+                      <asvg:svgBlip xmlns:asvg="http://schemas.microsoft.com/office/drawing/2016/SVG/main" r:embed="rId3"/>
+                    </a:ext>
+                  </a:extLst>
+                </a:blip>
+              </a:buBlip>
+              <a:defRPr sz="2000"/>
+            </a:lvl2pPr>
+          </a:lstStyle>
+          <a:p>
+            <a:r>
+              <a:rPr lang="es-419" sz="2000" dirty="0"/>
+              <a:t>Diseño por Contrato</a:t>
+            </a:r>
+            <a:endParaRPr lang="es-419" dirty="0"/>
+          </a:p>
+          <a:p>
+            <a:r>
+              <a:rPr lang="es-419" dirty="0"/>
+              <a:t>Lógica del Dominio</a:t>
+            </a:r>
+          </a:p>
+          <a:p>
+            <a:r>
+              <a:rPr lang="es-419" dirty="0"/>
+              <a:t>Lógica de Coordinación</a:t>
+            </a:r>
+          </a:p>
+          <a:p>
+            <a:r>
+              <a:rPr lang="es-419" dirty="0"/>
+              <a:t>Reglas de Negocio</a:t>
+            </a:r>
+          </a:p>
+          <a:p>
+            <a:r>
+              <a:rPr lang="es-419" dirty="0"/>
+              <a:t>Corrupción del Dominio</a:t>
+            </a:r>
+          </a:p>
+          <a:p>
+            <a:r>
+              <a:rPr lang="es-419" dirty="0"/>
+              <a:t>Capas de la Arquitectura</a:t>
+            </a:r>
+          </a:p>
+        </p:txBody>
+      </p:sp>
+    </p:spTree>
+    <p:extLst>
+      <p:ext uri="{BB962C8B-B14F-4D97-AF65-F5344CB8AC3E}">
+        <p14:creationId xmlns:p14="http://schemas.microsoft.com/office/powerpoint/2010/main" val="106073358"/>
+      </p:ext>
+    </p:extLst>
+  </p:cSld>
+  <p:clrMapOvr>
+    <a:masterClrMapping/>
+  </p:clrMapOvr>
+</p:sld>
+</file>
+
+<file path=ppt/slides/slide30.xml><?xml version="1.0" encoding="utf-8"?>
+<p:sld xmlns:a="http://schemas.openxmlformats.org/drawingml/2006/main" xmlns:r="http://schemas.openxmlformats.org/officeDocument/2006/relationships" xmlns:p="http://schemas.openxmlformats.org/presentationml/2006/main">
+  <p:cSld>
+    <p:spTree>
+      <p:nvGrpSpPr>
+        <p:cNvPr id="1" name=""/>
+        <p:cNvGrpSpPr/>
+        <p:nvPr/>
+      </p:nvGrpSpPr>
+      <p:grpSpPr>
+        <a:xfrm>
+          <a:off x="0" y="0"/>
+          <a:ext cx="0" cy="0"/>
+          <a:chOff x="0" y="0"/>
+          <a:chExt cx="0" cy="0"/>
+        </a:xfrm>
+      </p:grpSpPr>
+      <p:sp>
+        <p:nvSpPr>
+          <p:cNvPr id="2" name="CuadroTexto 1">
+            <a:extLst>
+              <a:ext uri="{FF2B5EF4-FFF2-40B4-BE49-F238E27FC236}">
+                <a16:creationId xmlns:a16="http://schemas.microsoft.com/office/drawing/2014/main" id="{29F9292A-145B-41E7-B5FC-919E280565E6}"/>
+              </a:ext>
+            </a:extLst>
+          </p:cNvPr>
+          <p:cNvSpPr txBox="1"/>
+          <p:nvPr/>
+        </p:nvSpPr>
+        <p:spPr>
+          <a:xfrm>
+            <a:off x="557111" y="661012"/>
+            <a:ext cx="5867312" cy="584775"/>
+          </a:xfrm>
+          <a:prstGeom prst="rect">
+            <a:avLst/>
+          </a:prstGeom>
+          <a:noFill/>
+        </p:spPr>
+        <p:txBody>
+          <a:bodyPr wrap="none" rtlCol="0">
+            <a:spAutoFit/>
+          </a:bodyPr>
+          <a:lstStyle/>
+          <a:p>
+            <a:r>
+              <a:rPr lang="es-ES" sz="3200" dirty="0"/>
+              <a:t>Elementos del modelo: Agregados</a:t>
+            </a:r>
+            <a:endParaRPr lang="es-419" sz="3200" dirty="0"/>
+          </a:p>
+        </p:txBody>
+      </p:sp>
+      <p:sp>
+        <p:nvSpPr>
+          <p:cNvPr id="6" name="CuadroTexto 5">
+            <a:extLst>
+              <a:ext uri="{FF2B5EF4-FFF2-40B4-BE49-F238E27FC236}">
+                <a16:creationId xmlns:a16="http://schemas.microsoft.com/office/drawing/2014/main" id="{C47E4BC6-7194-4B3C-A219-EC8022B7F756}"/>
+              </a:ext>
+            </a:extLst>
+          </p:cNvPr>
+          <p:cNvSpPr txBox="1"/>
+          <p:nvPr/>
+        </p:nvSpPr>
+        <p:spPr>
+          <a:xfrm>
+            <a:off x="842211" y="1570924"/>
+            <a:ext cx="10672010" cy="4247317"/>
+          </a:xfrm>
+          <a:prstGeom prst="rect">
+            <a:avLst/>
+          </a:prstGeom>
+          <a:noFill/>
+        </p:spPr>
+        <p:txBody>
+          <a:bodyPr wrap="square">
+            <a:spAutoFit/>
+          </a:bodyPr>
+          <a:lstStyle/>
+          <a:p>
+            <a:pPr>
+              <a:buClr>
+                <a:srgbClr val="C00000"/>
+              </a:buClr>
+            </a:pPr>
+            <a:r>
+              <a:rPr lang="es-ES" dirty="0"/>
+              <a:t>CONTRAS</a:t>
+            </a:r>
+          </a:p>
+          <a:p>
+            <a:pPr marL="285750" indent="-285750">
+              <a:buClr>
+                <a:srgbClr val="C00000"/>
+              </a:buClr>
+              <a:buFont typeface="Calibri" panose="020F0502020204030204" pitchFamily="34" charset="0"/>
+              <a:buChar char="↓"/>
+            </a:pPr>
+            <a:endParaRPr lang="es-ES" dirty="0"/>
+          </a:p>
+          <a:p>
+            <a:pPr marL="285750" indent="-285750">
+              <a:buClr>
+                <a:srgbClr val="C00000"/>
+              </a:buClr>
+              <a:buFont typeface="Calibri" panose="020F0502020204030204" pitchFamily="34" charset="0"/>
+              <a:buChar char="↓"/>
+            </a:pPr>
+            <a:r>
+              <a:rPr lang="es-ES" dirty="0"/>
+              <a:t>El diseño de agregados puede ser complejo: determinar sus límites y modelar las relaciones entre entidades. </a:t>
+            </a:r>
+          </a:p>
+          <a:p>
+            <a:pPr marL="285750" indent="-285750">
+              <a:buClr>
+                <a:srgbClr val="C00000"/>
+              </a:buClr>
+              <a:buFont typeface="Calibri" panose="020F0502020204030204" pitchFamily="34" charset="0"/>
+              <a:buChar char="↓"/>
+            </a:pPr>
+            <a:endParaRPr lang="es-ES" dirty="0"/>
+          </a:p>
+          <a:p>
+            <a:pPr marL="285750" indent="-285750">
+              <a:buClr>
+                <a:srgbClr val="C00000"/>
+              </a:buClr>
+              <a:buFont typeface="Calibri" panose="020F0502020204030204" pitchFamily="34" charset="0"/>
+              <a:buChar char="↓"/>
+            </a:pPr>
+            <a:r>
+              <a:rPr lang="es-ES" dirty="0"/>
+              <a:t>Los agregados mal diseñados pueden generar confusión y dificultades de mantenimiento. </a:t>
+            </a:r>
+          </a:p>
+          <a:p>
+            <a:pPr marL="285750" indent="-285750">
+              <a:buClr>
+                <a:srgbClr val="C00000"/>
+              </a:buClr>
+              <a:buFont typeface="Calibri" panose="020F0502020204030204" pitchFamily="34" charset="0"/>
+              <a:buChar char="↓"/>
+            </a:pPr>
+            <a:endParaRPr lang="es-ES" dirty="0"/>
+          </a:p>
+          <a:p>
+            <a:pPr marL="285750" indent="-285750">
+              <a:buClr>
+                <a:srgbClr val="C00000"/>
+              </a:buClr>
+              <a:buFont typeface="Calibri" panose="020F0502020204030204" pitchFamily="34" charset="0"/>
+              <a:buChar char="↓"/>
+            </a:pPr>
+            <a:r>
+              <a:rPr lang="es-ES" dirty="0"/>
+              <a:t>Nivel de granularidad adecuado puede ser complicado. </a:t>
+            </a:r>
+          </a:p>
+          <a:p>
+            <a:pPr marL="285750" indent="-285750">
+              <a:buClr>
+                <a:srgbClr val="C00000"/>
+              </a:buClr>
+              <a:buFont typeface="Calibri" panose="020F0502020204030204" pitchFamily="34" charset="0"/>
+              <a:buChar char="↓"/>
+            </a:pPr>
+            <a:endParaRPr lang="es-ES" dirty="0"/>
+          </a:p>
+          <a:p>
+            <a:pPr marL="742950" lvl="1" indent="-285750">
+              <a:buClr>
+                <a:srgbClr val="C00000"/>
+              </a:buClr>
+              <a:buFont typeface="Calibri" panose="020F0502020204030204" pitchFamily="34" charset="0"/>
+              <a:buChar char="↓"/>
+            </a:pPr>
+            <a:r>
+              <a:rPr lang="es-ES" dirty="0"/>
+              <a:t>Si un agregado es demasiado general, podría abarcar entidades no relacionadas, lo que provocaría un acoplamiento innecesario. </a:t>
+            </a:r>
+          </a:p>
+          <a:p>
+            <a:pPr marL="285750" indent="-285750">
+              <a:buClr>
+                <a:srgbClr val="C00000"/>
+              </a:buClr>
+              <a:buFont typeface="Calibri" panose="020F0502020204030204" pitchFamily="34" charset="0"/>
+              <a:buChar char="↓"/>
+            </a:pPr>
+            <a:endParaRPr lang="es-ES" dirty="0"/>
+          </a:p>
+          <a:p>
+            <a:pPr marL="742950" lvl="1" indent="-285750">
+              <a:buClr>
+                <a:srgbClr val="C00000"/>
+              </a:buClr>
+              <a:buFont typeface="Calibri" panose="020F0502020204030204" pitchFamily="34" charset="0"/>
+              <a:buChar char="↓"/>
+            </a:pPr>
+            <a:r>
+              <a:rPr lang="es-ES" dirty="0"/>
+              <a:t>Si es demasiado detallado, podría complicar los límites y el procesamiento de transacciones. </a:t>
+            </a:r>
+          </a:p>
+          <a:p>
+            <a:pPr marL="285750" indent="-285750">
+              <a:buClr>
+                <a:srgbClr val="C00000"/>
+              </a:buClr>
+              <a:buFont typeface="Calibri" panose="020F0502020204030204" pitchFamily="34" charset="0"/>
+              <a:buChar char="↓"/>
+            </a:pPr>
+            <a:endParaRPr lang="es-ES" dirty="0"/>
+          </a:p>
+          <a:p>
+            <a:pPr marL="285750" indent="-285750">
+              <a:buClr>
+                <a:srgbClr val="C00000"/>
+              </a:buClr>
+              <a:buFont typeface="Calibri" panose="020F0502020204030204" pitchFamily="34" charset="0"/>
+              <a:buChar char="↓"/>
+            </a:pPr>
+            <a:r>
+              <a:rPr lang="es-ES" dirty="0"/>
+              <a:t>En sistemas distribuidos, los agregados pueden enfrentar desafíos relacionados con la serialización, ya que el transporte de grandes agregados entre servicios puede resultar en ineficiencias y una mayor complejidad.</a:t>
+            </a:r>
+            <a:endParaRPr lang="es-419" dirty="0"/>
+          </a:p>
+        </p:txBody>
+      </p:sp>
+    </p:spTree>
+    <p:extLst>
+      <p:ext uri="{BB962C8B-B14F-4D97-AF65-F5344CB8AC3E}">
+        <p14:creationId xmlns:p14="http://schemas.microsoft.com/office/powerpoint/2010/main" val="1288681944"/>
+      </p:ext>
+    </p:extLst>
+  </p:cSld>
+  <p:clrMapOvr>
+    <a:masterClrMapping/>
+  </p:clrMapOvr>
+</p:sld>
+</file>
+
+<file path=ppt/slides/slide31.xml><?xml version="1.0" encoding="utf-8"?>
 <p:sld xmlns:a="http://schemas.openxmlformats.org/drawingml/2006/main" xmlns:r="http://schemas.openxmlformats.org/officeDocument/2006/relationships" xmlns:p="http://schemas.openxmlformats.org/presentationml/2006/main">
   <p:cSld>
     <p:spTree>
@@ -16856,7 +19798,7 @@
 </p:sld>
 </file>
 
-<file path=ppt/slides/slide28.xml><?xml version="1.0" encoding="utf-8"?>
+<file path=ppt/slides/slide32.xml><?xml version="1.0" encoding="utf-8"?>
 <p:sld xmlns:a="http://schemas.openxmlformats.org/drawingml/2006/main" xmlns:r="http://schemas.openxmlformats.org/officeDocument/2006/relationships" xmlns:p="http://schemas.openxmlformats.org/presentationml/2006/main">
   <p:cSld>
     <p:spTree>
@@ -16992,7 +19934,7 @@
         <p:spPr>
           <a:xfrm>
             <a:off x="1752600" y="4348631"/>
-            <a:ext cx="2542684" cy="1631216"/>
+            <a:ext cx="3115340" cy="1631216"/>
           </a:xfrm>
           <a:prstGeom prst="rect">
             <a:avLst/>
@@ -17015,7 +19957,7 @@
                   <a:srgbClr val="C0C0C0"/>
                 </a:highlight>
               </a:rPr>
-              <a:t>CuotaPagada</a:t>
+              <a:t>CuotaPagadaEvent</a:t>
             </a:r>
             <a:endParaRPr lang="es-ES" sz="2000" dirty="0">
               <a:highlight>
@@ -17045,7 +19987,7 @@
                   <a:srgbClr val="C0C0C0"/>
                 </a:highlight>
               </a:rPr>
-              <a:t>ClienteEnMora</a:t>
+              <a:t>ClienteEnMoraEvent</a:t>
             </a:r>
             <a:endParaRPr lang="es-ES" sz="2000" dirty="0">
               <a:highlight>
@@ -17075,7 +20017,7 @@
                   <a:srgbClr val="C0C0C0"/>
                 </a:highlight>
               </a:rPr>
-              <a:t>NotificacionEnviada</a:t>
+              <a:t>NotificacionEnviadaEvent</a:t>
             </a:r>
             <a:endParaRPr lang="es-419" sz="2000" dirty="0"/>
           </a:p>
@@ -17094,7 +20036,7 @@
 </p:sld>
 </file>
 
-<file path=ppt/slides/slide29.xml><?xml version="1.0" encoding="utf-8"?>
+<file path=ppt/slides/slide33.xml><?xml version="1.0" encoding="utf-8"?>
 <p:sld xmlns:a="http://schemas.openxmlformats.org/drawingml/2006/main" xmlns:r="http://schemas.openxmlformats.org/officeDocument/2006/relationships" xmlns:p="http://schemas.openxmlformats.org/presentationml/2006/main">
   <p:cSld>
     <p:spTree>
@@ -17190,351 +20132,7 @@
 </p:sld>
 </file>
 
-<file path=ppt/slides/slide3.xml><?xml version="1.0" encoding="utf-8"?>
-<p:sld xmlns:a="http://schemas.openxmlformats.org/drawingml/2006/main" xmlns:r="http://schemas.openxmlformats.org/officeDocument/2006/relationships" xmlns:p="http://schemas.openxmlformats.org/presentationml/2006/main">
-  <p:cSld>
-    <p:spTree>
-      <p:nvGrpSpPr>
-        <p:cNvPr id="1" name=""/>
-        <p:cNvGrpSpPr/>
-        <p:nvPr/>
-      </p:nvGrpSpPr>
-      <p:grpSpPr>
-        <a:xfrm>
-          <a:off x="0" y="0"/>
-          <a:ext cx="0" cy="0"/>
-          <a:chOff x="0" y="0"/>
-          <a:chExt cx="0" cy="0"/>
-        </a:xfrm>
-      </p:grpSpPr>
-      <p:sp>
-        <p:nvSpPr>
-          <p:cNvPr id="2" name="CuadroTexto 1">
-            <a:extLst>
-              <a:ext uri="{FF2B5EF4-FFF2-40B4-BE49-F238E27FC236}">
-                <a16:creationId xmlns:a16="http://schemas.microsoft.com/office/drawing/2014/main" id="{BCEBE1A5-32D9-497B-8C90-4DC8A3DED951}"/>
-              </a:ext>
-            </a:extLst>
-          </p:cNvPr>
-          <p:cNvSpPr txBox="1"/>
-          <p:nvPr/>
-        </p:nvSpPr>
-        <p:spPr>
-          <a:xfrm>
-            <a:off x="557111" y="661012"/>
-            <a:ext cx="1922321" cy="584775"/>
-          </a:xfrm>
-          <a:prstGeom prst="rect">
-            <a:avLst/>
-          </a:prstGeom>
-          <a:noFill/>
-        </p:spPr>
-        <p:txBody>
-          <a:bodyPr wrap="none" rtlCol="0">
-            <a:spAutoFit/>
-          </a:bodyPr>
-          <a:lstStyle/>
-          <a:p>
-            <a:r>
-              <a:rPr lang="es-ES" sz="3200" dirty="0"/>
-              <a:t>Contenido</a:t>
-            </a:r>
-            <a:endParaRPr lang="es-419" sz="3200" dirty="0"/>
-          </a:p>
-        </p:txBody>
-      </p:sp>
-      <p:sp>
-        <p:nvSpPr>
-          <p:cNvPr id="4" name="CuadroTexto 3">
-            <a:extLst>
-              <a:ext uri="{FF2B5EF4-FFF2-40B4-BE49-F238E27FC236}">
-                <a16:creationId xmlns:a16="http://schemas.microsoft.com/office/drawing/2014/main" id="{CBDEAC8A-AE5E-4F91-8811-578DE9927514}"/>
-              </a:ext>
-            </a:extLst>
-          </p:cNvPr>
-          <p:cNvSpPr txBox="1"/>
-          <p:nvPr/>
-        </p:nvSpPr>
-        <p:spPr>
-          <a:xfrm>
-            <a:off x="645246" y="1333457"/>
-            <a:ext cx="5876740" cy="3276282"/>
-          </a:xfrm>
-          <a:prstGeom prst="rect">
-            <a:avLst/>
-          </a:prstGeom>
-          <a:noFill/>
-        </p:spPr>
-        <p:txBody>
-          <a:bodyPr wrap="square">
-            <a:spAutoFit/>
-          </a:bodyPr>
-          <a:lstStyle/>
-          <a:p>
-            <a:pPr marL="342900" indent="-342900">
-              <a:lnSpc>
-                <a:spcPct val="150000"/>
-              </a:lnSpc>
-              <a:buSzPct val="150000"/>
-              <a:buBlip>
-                <a:blip r:embed="rId2">
-                  <a:extLst>
-                    <a:ext uri="{96DAC541-7B7A-43D3-8B79-37D633B846F1}">
-                      <asvg:svgBlip xmlns:asvg="http://schemas.microsoft.com/office/drawing/2016/SVG/main" r:embed="rId3"/>
-                    </a:ext>
-                  </a:extLst>
-                </a:blip>
-              </a:buBlip>
-            </a:pPr>
-            <a:r>
-              <a:rPr lang="es-419" sz="2000" dirty="0"/>
-              <a:t>	Dominio, clasificación</a:t>
-            </a:r>
-          </a:p>
-          <a:p>
-            <a:pPr marL="342900" indent="-342900">
-              <a:lnSpc>
-                <a:spcPct val="150000"/>
-              </a:lnSpc>
-              <a:buSzPct val="150000"/>
-              <a:buBlip>
-                <a:blip r:embed="rId2">
-                  <a:extLst>
-                    <a:ext uri="{96DAC541-7B7A-43D3-8B79-37D633B846F1}">
-                      <asvg:svgBlip xmlns:asvg="http://schemas.microsoft.com/office/drawing/2016/SVG/main" r:embed="rId3"/>
-                    </a:ext>
-                  </a:extLst>
-                </a:blip>
-              </a:buBlip>
-            </a:pPr>
-            <a:r>
-              <a:rPr lang="es-419" sz="2000" dirty="0"/>
-              <a:t>	Dominios Anémicos y Dominios Enriquecidos</a:t>
-            </a:r>
-          </a:p>
-          <a:p>
-            <a:pPr marL="342900" indent="-342900">
-              <a:lnSpc>
-                <a:spcPct val="150000"/>
-              </a:lnSpc>
-              <a:buSzPct val="150000"/>
-              <a:buBlip>
-                <a:blip r:embed="rId2">
-                  <a:extLst>
-                    <a:ext uri="{96DAC541-7B7A-43D3-8B79-37D633B846F1}">
-                      <asvg:svgBlip xmlns:asvg="http://schemas.microsoft.com/office/drawing/2016/SVG/main" r:embed="rId3"/>
-                    </a:ext>
-                  </a:extLst>
-                </a:blip>
-              </a:buBlip>
-            </a:pPr>
-            <a:r>
-              <a:rPr lang="es-419" sz="2000" dirty="0"/>
-              <a:t>	Entidad</a:t>
-            </a:r>
-          </a:p>
-          <a:p>
-            <a:pPr marL="342900" indent="-342900">
-              <a:lnSpc>
-                <a:spcPct val="150000"/>
-              </a:lnSpc>
-              <a:buSzPct val="150000"/>
-              <a:buBlip>
-                <a:blip r:embed="rId2">
-                  <a:extLst>
-                    <a:ext uri="{96DAC541-7B7A-43D3-8B79-37D633B846F1}">
-                      <asvg:svgBlip xmlns:asvg="http://schemas.microsoft.com/office/drawing/2016/SVG/main" r:embed="rId3"/>
-                    </a:ext>
-                  </a:extLst>
-                </a:blip>
-              </a:buBlip>
-            </a:pPr>
-            <a:r>
-              <a:rPr lang="es-419" sz="2000" dirty="0"/>
-              <a:t>	Agregado</a:t>
-            </a:r>
-          </a:p>
-          <a:p>
-            <a:pPr marL="342900" indent="-342900">
-              <a:lnSpc>
-                <a:spcPct val="150000"/>
-              </a:lnSpc>
-              <a:buSzPct val="150000"/>
-              <a:buBlip>
-                <a:blip r:embed="rId2">
-                  <a:extLst>
-                    <a:ext uri="{96DAC541-7B7A-43D3-8B79-37D633B846F1}">
-                      <asvg:svgBlip xmlns:asvg="http://schemas.microsoft.com/office/drawing/2016/SVG/main" r:embed="rId3"/>
-                    </a:ext>
-                  </a:extLst>
-                </a:blip>
-              </a:buBlip>
-            </a:pPr>
-            <a:r>
-              <a:rPr lang="es-419" sz="2000" dirty="0"/>
-              <a:t>	Objetos de Valor	</a:t>
-            </a:r>
-          </a:p>
-          <a:p>
-            <a:pPr marL="342900" indent="-342900">
-              <a:lnSpc>
-                <a:spcPct val="150000"/>
-              </a:lnSpc>
-              <a:buSzPct val="150000"/>
-              <a:buBlip>
-                <a:blip r:embed="rId2">
-                  <a:extLst>
-                    <a:ext uri="{96DAC541-7B7A-43D3-8B79-37D633B846F1}">
-                      <asvg:svgBlip xmlns:asvg="http://schemas.microsoft.com/office/drawing/2016/SVG/main" r:embed="rId3"/>
-                    </a:ext>
-                  </a:extLst>
-                </a:blip>
-              </a:buBlip>
-            </a:pPr>
-            <a:r>
-              <a:rPr lang="es-419" sz="2000" dirty="0"/>
-              <a:t>	Servicios y Eventos del Dominio</a:t>
-            </a:r>
-          </a:p>
-          <a:p>
-            <a:pPr marL="342900" indent="-342900">
-              <a:lnSpc>
-                <a:spcPct val="150000"/>
-              </a:lnSpc>
-              <a:buSzPct val="150000"/>
-              <a:buBlip>
-                <a:blip r:embed="rId2">
-                  <a:extLst>
-                    <a:ext uri="{96DAC541-7B7A-43D3-8B79-37D633B846F1}">
-                      <asvg:svgBlip xmlns:asvg="http://schemas.microsoft.com/office/drawing/2016/SVG/main" r:embed="rId3"/>
-                    </a:ext>
-                  </a:extLst>
-                </a:blip>
-              </a:buBlip>
-            </a:pPr>
-            <a:r>
-              <a:rPr lang="es-419" sz="2000" dirty="0"/>
-              <a:t>	Lenguaje Ubicuo</a:t>
-            </a:r>
-          </a:p>
-        </p:txBody>
-      </p:sp>
-      <p:sp>
-        <p:nvSpPr>
-          <p:cNvPr id="6" name="CuadroTexto 5">
-            <a:extLst>
-              <a:ext uri="{FF2B5EF4-FFF2-40B4-BE49-F238E27FC236}">
-                <a16:creationId xmlns:a16="http://schemas.microsoft.com/office/drawing/2014/main" id="{D446D497-B028-4F59-919C-35C5726F4292}"/>
-              </a:ext>
-            </a:extLst>
-          </p:cNvPr>
-          <p:cNvSpPr txBox="1"/>
-          <p:nvPr/>
-        </p:nvSpPr>
-        <p:spPr>
-          <a:xfrm>
-            <a:off x="7440941" y="1333457"/>
-            <a:ext cx="4310350" cy="2814617"/>
-          </a:xfrm>
-          <a:prstGeom prst="rect">
-            <a:avLst/>
-          </a:prstGeom>
-          <a:noFill/>
-        </p:spPr>
-        <p:txBody>
-          <a:bodyPr wrap="square">
-            <a:spAutoFit/>
-          </a:bodyPr>
-          <a:lstStyle>
-            <a:defPPr>
-              <a:defRPr lang="es-419"/>
-            </a:defPPr>
-            <a:lvl1pPr marL="342900" indent="-342900">
-              <a:lnSpc>
-                <a:spcPct val="150000"/>
-              </a:lnSpc>
-              <a:buSzPct val="150000"/>
-              <a:buBlip>
-                <a:blip r:embed="rId2">
-                  <a:extLst>
-                    <a:ext uri="{96DAC541-7B7A-43D3-8B79-37D633B846F1}">
-                      <asvg:svgBlip xmlns:asvg="http://schemas.microsoft.com/office/drawing/2016/SVG/main" r:embed="rId3"/>
-                    </a:ext>
-                  </a:extLst>
-                </a:blip>
-              </a:buBlip>
-              <a:defRPr sz="2000"/>
-            </a:lvl1pPr>
-            <a:lvl2pPr marL="800100" lvl="1" indent="-342900">
-              <a:lnSpc>
-                <a:spcPct val="150000"/>
-              </a:lnSpc>
-              <a:buSzPct val="150000"/>
-              <a:buBlip>
-                <a:blip r:embed="rId2">
-                  <a:extLst>
-                    <a:ext uri="{96DAC541-7B7A-43D3-8B79-37D633B846F1}">
-                      <asvg:svgBlip xmlns:asvg="http://schemas.microsoft.com/office/drawing/2016/SVG/main" r:embed="rId3"/>
-                    </a:ext>
-                  </a:extLst>
-                </a:blip>
-              </a:buBlip>
-              <a:defRPr sz="2000"/>
-            </a:lvl2pPr>
-          </a:lstStyle>
-          <a:p>
-            <a:r>
-              <a:rPr lang="es-419" sz="2000" dirty="0"/>
-              <a:t>Diseño por Contrato</a:t>
-            </a:r>
-            <a:endParaRPr lang="es-419" dirty="0"/>
-          </a:p>
-          <a:p>
-            <a:r>
-              <a:rPr lang="es-419" dirty="0"/>
-              <a:t>Lógica del Dominio</a:t>
-            </a:r>
-          </a:p>
-          <a:p>
-            <a:r>
-              <a:rPr lang="es-419" dirty="0"/>
-              <a:t>Lógica de Coordinación</a:t>
-            </a:r>
-          </a:p>
-          <a:p>
-            <a:r>
-              <a:rPr lang="es-419" dirty="0"/>
-              <a:t>Reglas de Negocio</a:t>
-            </a:r>
-          </a:p>
-          <a:p>
-            <a:r>
-              <a:rPr lang="es-419" dirty="0"/>
-              <a:t>Corrupción del Dominio</a:t>
-            </a:r>
-          </a:p>
-          <a:p>
-            <a:r>
-              <a:rPr lang="es-419" dirty="0"/>
-              <a:t>Capas de la Arquitectura</a:t>
-            </a:r>
-          </a:p>
-        </p:txBody>
-      </p:sp>
-    </p:spTree>
-    <p:extLst>
-      <p:ext uri="{BB962C8B-B14F-4D97-AF65-F5344CB8AC3E}">
-        <p14:creationId xmlns:p14="http://schemas.microsoft.com/office/powerpoint/2010/main" val="106073358"/>
-      </p:ext>
-    </p:extLst>
-  </p:cSld>
-  <p:clrMapOvr>
-    <a:masterClrMapping/>
-  </p:clrMapOvr>
-</p:sld>
-</file>
-
-<file path=ppt/slides/slide30.xml><?xml version="1.0" encoding="utf-8"?>
+<file path=ppt/slides/slide34.xml><?xml version="1.0" encoding="utf-8"?>
 <p:sld xmlns:a="http://schemas.openxmlformats.org/drawingml/2006/main" xmlns:r="http://schemas.openxmlformats.org/officeDocument/2006/relationships" xmlns:p="http://schemas.openxmlformats.org/presentationml/2006/main">
   <p:cSld>
     <p:spTree>
@@ -17810,7 +20408,7 @@
 </p:sld>
 </file>
 
-<file path=ppt/slides/slide31.xml><?xml version="1.0" encoding="utf-8"?>
+<file path=ppt/slides/slide35.xml><?xml version="1.0" encoding="utf-8"?>
 <p:sld xmlns:a="http://schemas.openxmlformats.org/drawingml/2006/main" xmlns:r="http://schemas.openxmlformats.org/officeDocument/2006/relationships" xmlns:p="http://schemas.openxmlformats.org/presentationml/2006/main">
   <p:cSld>
     <p:spTree>
@@ -17936,7 +20534,7 @@
 </p:sld>
 </file>
 
-<file path=ppt/slides/slide32.xml><?xml version="1.0" encoding="utf-8"?>
+<file path=ppt/slides/slide36.xml><?xml version="1.0" encoding="utf-8"?>
 <p:sld xmlns:a="http://schemas.openxmlformats.org/drawingml/2006/main" xmlns:r="http://schemas.openxmlformats.org/officeDocument/2006/relationships" xmlns:p="http://schemas.openxmlformats.org/presentationml/2006/main">
   <p:cSld>
     <p:spTree>
@@ -18084,7 +20682,7 @@
 </p:sld>
 </file>
 
-<file path=ppt/slides/slide33.xml><?xml version="1.0" encoding="utf-8"?>
+<file path=ppt/slides/slide37.xml><?xml version="1.0" encoding="utf-8"?>
 <p:sld xmlns:a="http://schemas.openxmlformats.org/drawingml/2006/main" xmlns:r="http://schemas.openxmlformats.org/officeDocument/2006/relationships" xmlns:p="http://schemas.openxmlformats.org/presentationml/2006/main">
   <p:cSld>
     <p:spTree>
@@ -18253,7 +20851,7 @@
 </p:sld>
 </file>
 
-<file path=ppt/slides/slide34.xml><?xml version="1.0" encoding="utf-8"?>
+<file path=ppt/slides/slide38.xml><?xml version="1.0" encoding="utf-8"?>
 <p:sld xmlns:a="http://schemas.openxmlformats.org/drawingml/2006/main" xmlns:r="http://schemas.openxmlformats.org/officeDocument/2006/relationships" xmlns:p="http://schemas.openxmlformats.org/presentationml/2006/main">
   <p:cSld>
     <p:spTree>
@@ -18418,7 +21016,7 @@
 </p:sld>
 </file>
 
-<file path=ppt/slides/slide35.xml><?xml version="1.0" encoding="utf-8"?>
+<file path=ppt/slides/slide39.xml><?xml version="1.0" encoding="utf-8"?>
 <p:sld xmlns:a="http://schemas.openxmlformats.org/drawingml/2006/main" xmlns:r="http://schemas.openxmlformats.org/officeDocument/2006/relationships" xmlns:p="http://schemas.openxmlformats.org/presentationml/2006/main">
   <p:cSld>
     <p:spTree>
@@ -18791,942 +21389,6 @@
     <p:extLst>
       <p:ext uri="{BB962C8B-B14F-4D97-AF65-F5344CB8AC3E}">
         <p14:creationId xmlns:p14="http://schemas.microsoft.com/office/powerpoint/2010/main" val="3673458353"/>
-      </p:ext>
-    </p:extLst>
-  </p:cSld>
-  <p:clrMapOvr>
-    <a:masterClrMapping/>
-  </p:clrMapOvr>
-</p:sld>
-</file>
-
-<file path=ppt/slides/slide36.xml><?xml version="1.0" encoding="utf-8"?>
-<p:sld xmlns:a="http://schemas.openxmlformats.org/drawingml/2006/main" xmlns:r="http://schemas.openxmlformats.org/officeDocument/2006/relationships" xmlns:p="http://schemas.openxmlformats.org/presentationml/2006/main">
-  <p:cSld>
-    <p:spTree>
-      <p:nvGrpSpPr>
-        <p:cNvPr id="1" name=""/>
-        <p:cNvGrpSpPr/>
-        <p:nvPr/>
-      </p:nvGrpSpPr>
-      <p:grpSpPr>
-        <a:xfrm>
-          <a:off x="0" y="0"/>
-          <a:ext cx="0" cy="0"/>
-          <a:chOff x="0" y="0"/>
-          <a:chExt cx="0" cy="0"/>
-        </a:xfrm>
-      </p:grpSpPr>
-      <p:sp>
-        <p:nvSpPr>
-          <p:cNvPr id="2" name="CuadroTexto 1">
-            <a:extLst>
-              <a:ext uri="{FF2B5EF4-FFF2-40B4-BE49-F238E27FC236}">
-                <a16:creationId xmlns:a16="http://schemas.microsoft.com/office/drawing/2014/main" id="{FED09263-EAB6-43F2-9272-1D9374B65C41}"/>
-              </a:ext>
-            </a:extLst>
-          </p:cNvPr>
-          <p:cNvSpPr txBox="1"/>
-          <p:nvPr/>
-        </p:nvSpPr>
-        <p:spPr>
-          <a:xfrm>
-            <a:off x="557111" y="661012"/>
-            <a:ext cx="9115699" cy="584775"/>
-          </a:xfrm>
-          <a:prstGeom prst="rect">
-            <a:avLst/>
-          </a:prstGeom>
-          <a:noFill/>
-        </p:spPr>
-        <p:txBody>
-          <a:bodyPr wrap="square" rtlCol="0">
-            <a:spAutoFit/>
-          </a:bodyPr>
-          <a:lstStyle/>
-          <a:p>
-            <a:r>
-              <a:rPr lang="es-ES" sz="3200" dirty="0"/>
-              <a:t>Reglas de Negocio en DDD</a:t>
-            </a:r>
-            <a:endParaRPr lang="es-419" sz="3200" dirty="0"/>
-          </a:p>
-        </p:txBody>
-      </p:sp>
-      <p:sp>
-        <p:nvSpPr>
-          <p:cNvPr id="4" name="CuadroTexto 3">
-            <a:extLst>
-              <a:ext uri="{FF2B5EF4-FFF2-40B4-BE49-F238E27FC236}">
-                <a16:creationId xmlns:a16="http://schemas.microsoft.com/office/drawing/2014/main" id="{5567395E-DEC7-4DA7-9817-5870BB484B0F}"/>
-              </a:ext>
-            </a:extLst>
-          </p:cNvPr>
-          <p:cNvSpPr txBox="1"/>
-          <p:nvPr/>
-        </p:nvSpPr>
-        <p:spPr>
-          <a:xfrm>
-            <a:off x="724359" y="1563398"/>
-            <a:ext cx="10953520" cy="646331"/>
-          </a:xfrm>
-          <a:prstGeom prst="rect">
-            <a:avLst/>
-          </a:prstGeom>
-          <a:noFill/>
-        </p:spPr>
-        <p:txBody>
-          <a:bodyPr wrap="square">
-            <a:spAutoFit/>
-          </a:bodyPr>
-          <a:lstStyle/>
-          <a:p>
-            <a:r>
-              <a:rPr lang="es-ES" dirty="0"/>
-              <a:t>La </a:t>
-            </a:r>
-            <a:r>
-              <a:rPr lang="es-ES" b="1" dirty="0"/>
-              <a:t>capa de dominio</a:t>
-            </a:r>
-            <a:r>
-              <a:rPr lang="es-ES" dirty="0"/>
-              <a:t> encapsula la </a:t>
-            </a:r>
-            <a:r>
-              <a:rPr lang="es-ES" b="1" dirty="0"/>
-              <a:t>lógica de negocio</a:t>
-            </a:r>
-            <a:r>
-              <a:rPr lang="es-ES" dirty="0"/>
-              <a:t> y las </a:t>
-            </a:r>
-            <a:r>
-              <a:rPr lang="es-ES" b="1" dirty="0"/>
-              <a:t>reglas del dominio</a:t>
-            </a:r>
-            <a:r>
-              <a:rPr lang="es-ES" dirty="0"/>
-              <a:t>, garantizando que los datos sean consistentes y que el sistema refleje fielmente el negocio.</a:t>
-            </a:r>
-            <a:endParaRPr lang="es-419" dirty="0"/>
-          </a:p>
-        </p:txBody>
-      </p:sp>
-      <p:sp>
-        <p:nvSpPr>
-          <p:cNvPr id="6" name="CuadroTexto 5">
-            <a:extLst>
-              <a:ext uri="{FF2B5EF4-FFF2-40B4-BE49-F238E27FC236}">
-                <a16:creationId xmlns:a16="http://schemas.microsoft.com/office/drawing/2014/main" id="{01822F55-30DE-4E82-B132-9FE8319B9095}"/>
-              </a:ext>
-            </a:extLst>
-          </p:cNvPr>
-          <p:cNvSpPr txBox="1"/>
-          <p:nvPr/>
-        </p:nvSpPr>
-        <p:spPr>
-          <a:xfrm>
-            <a:off x="4060015" y="3447943"/>
-            <a:ext cx="6925021" cy="1200329"/>
-          </a:xfrm>
-          <a:prstGeom prst="rect">
-            <a:avLst/>
-          </a:prstGeom>
-          <a:noFill/>
-        </p:spPr>
-        <p:txBody>
-          <a:bodyPr wrap="square">
-            <a:spAutoFit/>
-          </a:bodyPr>
-          <a:lstStyle/>
-          <a:p>
-            <a:r>
-              <a:rPr lang="es-ES" dirty="0"/>
-              <a:t>📌 Las </a:t>
-            </a:r>
-            <a:r>
-              <a:rPr lang="es-ES" b="1" dirty="0"/>
-              <a:t>Reglas de negocio</a:t>
-            </a:r>
-            <a:r>
-              <a:rPr lang="es-ES" dirty="0"/>
-              <a:t> en la capa de dominio se dedican a:</a:t>
-            </a:r>
-            <a:br>
-              <a:rPr lang="es-ES" dirty="0"/>
-            </a:br>
-            <a:r>
-              <a:rPr lang="es-ES" dirty="0"/>
-              <a:t>✅ </a:t>
-            </a:r>
-            <a:r>
-              <a:rPr lang="es-ES" b="1" dirty="0"/>
-              <a:t>Validar estados y transiciones</a:t>
-            </a:r>
-            <a:r>
-              <a:rPr lang="es-ES" dirty="0"/>
-              <a:t> dentro del dominio.</a:t>
-            </a:r>
-            <a:br>
-              <a:rPr lang="es-ES" dirty="0"/>
-            </a:br>
-            <a:r>
-              <a:rPr lang="es-ES" dirty="0"/>
-              <a:t>✅ </a:t>
-            </a:r>
-            <a:r>
-              <a:rPr lang="es-ES" b="1" dirty="0"/>
-              <a:t>Definir comportamientos y restricciones</a:t>
-            </a:r>
-            <a:r>
-              <a:rPr lang="es-ES" dirty="0"/>
-              <a:t> en entidades y agregados.</a:t>
-            </a:r>
-            <a:br>
-              <a:rPr lang="es-ES" dirty="0"/>
-            </a:br>
-            <a:r>
-              <a:rPr lang="es-ES" dirty="0"/>
-              <a:t>✅ </a:t>
-            </a:r>
-            <a:r>
-              <a:rPr lang="es-ES" b="1" dirty="0"/>
-              <a:t>Evitar estados inconsistentes en el sistema</a:t>
-            </a:r>
-            <a:r>
-              <a:rPr lang="es-ES" dirty="0"/>
-              <a:t>.</a:t>
-            </a:r>
-            <a:endParaRPr lang="es-419" dirty="0"/>
-          </a:p>
-        </p:txBody>
-      </p:sp>
-    </p:spTree>
-    <p:extLst>
-      <p:ext uri="{BB962C8B-B14F-4D97-AF65-F5344CB8AC3E}">
-        <p14:creationId xmlns:p14="http://schemas.microsoft.com/office/powerpoint/2010/main" val="906998186"/>
-      </p:ext>
-    </p:extLst>
-  </p:cSld>
-  <p:clrMapOvr>
-    <a:masterClrMapping/>
-  </p:clrMapOvr>
-</p:sld>
-</file>
-
-<file path=ppt/slides/slide37.xml><?xml version="1.0" encoding="utf-8"?>
-<p:sld xmlns:a="http://schemas.openxmlformats.org/drawingml/2006/main" xmlns:r="http://schemas.openxmlformats.org/officeDocument/2006/relationships" xmlns:p="http://schemas.openxmlformats.org/presentationml/2006/main">
-  <p:cSld>
-    <p:spTree>
-      <p:nvGrpSpPr>
-        <p:cNvPr id="1" name=""/>
-        <p:cNvGrpSpPr/>
-        <p:nvPr/>
-      </p:nvGrpSpPr>
-      <p:grpSpPr>
-        <a:xfrm>
-          <a:off x="0" y="0"/>
-          <a:ext cx="0" cy="0"/>
-          <a:chOff x="0" y="0"/>
-          <a:chExt cx="0" cy="0"/>
-        </a:xfrm>
-      </p:grpSpPr>
-      <p:sp>
-        <p:nvSpPr>
-          <p:cNvPr id="2" name="CuadroTexto 1">
-            <a:extLst>
-              <a:ext uri="{FF2B5EF4-FFF2-40B4-BE49-F238E27FC236}">
-                <a16:creationId xmlns:a16="http://schemas.microsoft.com/office/drawing/2014/main" id="{FED09263-EAB6-43F2-9272-1D9374B65C41}"/>
-              </a:ext>
-            </a:extLst>
-          </p:cNvPr>
-          <p:cNvSpPr txBox="1"/>
-          <p:nvPr/>
-        </p:nvSpPr>
-        <p:spPr>
-          <a:xfrm>
-            <a:off x="557111" y="661012"/>
-            <a:ext cx="9115699" cy="584775"/>
-          </a:xfrm>
-          <a:prstGeom prst="rect">
-            <a:avLst/>
-          </a:prstGeom>
-          <a:noFill/>
-        </p:spPr>
-        <p:txBody>
-          <a:bodyPr wrap="square" rtlCol="0">
-            <a:spAutoFit/>
-          </a:bodyPr>
-          <a:lstStyle/>
-          <a:p>
-            <a:r>
-              <a:rPr lang="es-ES" sz="3200" dirty="0"/>
-              <a:t>Reglas de Negocio en DDD</a:t>
-            </a:r>
-            <a:endParaRPr lang="es-419" sz="3200" dirty="0"/>
-          </a:p>
-        </p:txBody>
-      </p:sp>
-      <p:sp>
-        <p:nvSpPr>
-          <p:cNvPr id="8" name="CuadroTexto 7">
-            <a:extLst>
-              <a:ext uri="{FF2B5EF4-FFF2-40B4-BE49-F238E27FC236}">
-                <a16:creationId xmlns:a16="http://schemas.microsoft.com/office/drawing/2014/main" id="{CF94A3E0-C58D-4B62-BEDA-21F292A8B8C7}"/>
-              </a:ext>
-            </a:extLst>
-          </p:cNvPr>
-          <p:cNvSpPr txBox="1"/>
-          <p:nvPr/>
-        </p:nvSpPr>
-        <p:spPr>
-          <a:xfrm>
-            <a:off x="450315" y="1672673"/>
-            <a:ext cx="5391997" cy="4524315"/>
-          </a:xfrm>
-          <a:prstGeom prst="rect">
-            <a:avLst/>
-          </a:prstGeom>
-          <a:noFill/>
-          <a:ln>
-            <a:solidFill>
-              <a:schemeClr val="tx1"/>
-            </a:solidFill>
-          </a:ln>
-        </p:spPr>
-        <p:txBody>
-          <a:bodyPr wrap="square">
-            <a:spAutoFit/>
-          </a:bodyPr>
-          <a:lstStyle/>
-          <a:p>
-            <a:r>
-              <a:rPr lang="es-ES" b="1" dirty="0"/>
-              <a:t>Reglas de Negocio Críticas (Invariantes del Dominio)</a:t>
-            </a:r>
-          </a:p>
-          <a:p>
-            <a:endParaRPr lang="es-ES" b="1" dirty="0"/>
-          </a:p>
-          <a:p>
-            <a:r>
-              <a:rPr lang="es-ES" dirty="0"/>
-              <a:t>📌 Son reglas que </a:t>
-            </a:r>
-            <a:r>
-              <a:rPr lang="es-ES" b="1" dirty="0"/>
-              <a:t>siempre deben cumplirse</a:t>
-            </a:r>
-            <a:r>
-              <a:rPr lang="es-ES" dirty="0"/>
-              <a:t> para mantener la integridad del dominio.</a:t>
-            </a:r>
-            <a:br>
-              <a:rPr lang="es-ES" dirty="0"/>
-            </a:br>
-            <a:endParaRPr lang="es-ES" dirty="0"/>
-          </a:p>
-          <a:p>
-            <a:r>
-              <a:rPr lang="es-ES" dirty="0"/>
-              <a:t>📌 </a:t>
-            </a:r>
-            <a:r>
-              <a:rPr lang="es-ES" b="1" dirty="0"/>
-              <a:t>Se establecen en Entidades, Objetos de Valor y Agregados</a:t>
-            </a:r>
-            <a:r>
-              <a:rPr lang="es-ES" dirty="0"/>
-              <a:t>.</a:t>
-            </a:r>
-          </a:p>
-          <a:p>
-            <a:endParaRPr lang="es-ES" dirty="0"/>
-          </a:p>
-          <a:p>
-            <a:r>
-              <a:rPr lang="es-ES" dirty="0"/>
-              <a:t>🔹 </a:t>
-            </a:r>
-            <a:r>
-              <a:rPr lang="es-ES" b="1" dirty="0"/>
-              <a:t>Ejemplo en un sistema de préstamos de un concesionario:</a:t>
-            </a:r>
-            <a:endParaRPr lang="es-ES" dirty="0"/>
-          </a:p>
-          <a:p>
-            <a:pPr>
-              <a:buFont typeface="Arial" panose="020B0604020202020204" pitchFamily="34" charset="0"/>
-              <a:buChar char="•"/>
-            </a:pPr>
-            <a:endParaRPr lang="es-ES" dirty="0"/>
-          </a:p>
-          <a:p>
-            <a:pPr lvl="1">
-              <a:buFont typeface="Arial" panose="020B0604020202020204" pitchFamily="34" charset="0"/>
-              <a:buChar char="•"/>
-            </a:pPr>
-            <a:r>
-              <a:rPr lang="es-ES" dirty="0"/>
-              <a:t>Un préstamo </a:t>
-            </a:r>
-            <a:r>
-              <a:rPr lang="es-ES" b="1" dirty="0"/>
-              <a:t>nunca</a:t>
-            </a:r>
-            <a:r>
-              <a:rPr lang="es-ES" dirty="0"/>
-              <a:t> puede aprobarse si el cliente tiene </a:t>
-            </a:r>
-            <a:r>
-              <a:rPr lang="es-ES" b="1" dirty="0"/>
-              <a:t>historial crediticio menor a 600</a:t>
-            </a:r>
-            <a:r>
-              <a:rPr lang="es-ES" dirty="0"/>
-              <a:t>.</a:t>
-            </a:r>
-          </a:p>
-          <a:p>
-            <a:pPr lvl="1">
-              <a:buFont typeface="Arial" panose="020B0604020202020204" pitchFamily="34" charset="0"/>
-              <a:buChar char="•"/>
-            </a:pPr>
-            <a:endParaRPr lang="es-ES" dirty="0"/>
-          </a:p>
-          <a:p>
-            <a:pPr lvl="1">
-              <a:buFont typeface="Arial" panose="020B0604020202020204" pitchFamily="34" charset="0"/>
-              <a:buChar char="•"/>
-            </a:pPr>
-            <a:r>
-              <a:rPr lang="es-ES" dirty="0"/>
-              <a:t>Un préstamo </a:t>
-            </a:r>
-            <a:r>
-              <a:rPr lang="es-ES" b="1" dirty="0"/>
-              <a:t>no puede cambiar de estado una vez liquidado</a:t>
-            </a:r>
-            <a:r>
-              <a:rPr lang="es-ES" dirty="0"/>
-              <a:t>.</a:t>
-            </a:r>
-          </a:p>
-        </p:txBody>
-      </p:sp>
-      <p:sp>
-        <p:nvSpPr>
-          <p:cNvPr id="10" name="CuadroTexto 9">
-            <a:extLst>
-              <a:ext uri="{FF2B5EF4-FFF2-40B4-BE49-F238E27FC236}">
-                <a16:creationId xmlns:a16="http://schemas.microsoft.com/office/drawing/2014/main" id="{2669DD92-4734-4056-A274-B3EB7138B6EF}"/>
-              </a:ext>
-            </a:extLst>
-          </p:cNvPr>
-          <p:cNvSpPr txBox="1"/>
-          <p:nvPr/>
-        </p:nvSpPr>
-        <p:spPr>
-          <a:xfrm>
-            <a:off x="5986131" y="1672673"/>
-            <a:ext cx="6097836" cy="4524315"/>
-          </a:xfrm>
-          <a:prstGeom prst="rect">
-            <a:avLst/>
-          </a:prstGeom>
-          <a:noFill/>
-          <a:ln>
-            <a:solidFill>
-              <a:schemeClr val="tx1"/>
-            </a:solidFill>
-          </a:ln>
-        </p:spPr>
-        <p:txBody>
-          <a:bodyPr wrap="square">
-            <a:spAutoFit/>
-          </a:bodyPr>
-          <a:lstStyle/>
-          <a:p>
-            <a:r>
-              <a:rPr lang="es-ES" b="1" dirty="0"/>
-              <a:t>Reglas de Negocio de Coordinación (Políticas del Dominio)</a:t>
-            </a:r>
-          </a:p>
-          <a:p>
-            <a:endParaRPr lang="es-ES" b="1" dirty="0"/>
-          </a:p>
-          <a:p>
-            <a:r>
-              <a:rPr lang="es-ES" dirty="0"/>
-              <a:t>📌 Son reglas que </a:t>
-            </a:r>
-            <a:r>
-              <a:rPr lang="es-ES" b="1" dirty="0"/>
-              <a:t>coordinan acciones</a:t>
-            </a:r>
-            <a:r>
-              <a:rPr lang="es-ES" dirty="0"/>
-              <a:t> dentro del dominio pero no afectan la consistencia directa del modelo.</a:t>
-            </a:r>
-          </a:p>
-          <a:p>
-            <a:br>
-              <a:rPr lang="es-ES" dirty="0"/>
-            </a:br>
-            <a:r>
-              <a:rPr lang="es-ES" dirty="0"/>
-              <a:t>📌 </a:t>
-            </a:r>
-            <a:r>
-              <a:rPr lang="es-ES" b="1" dirty="0"/>
-              <a:t>Se implementan en Servicios de Dominio o Eventos de Dominio</a:t>
-            </a:r>
-            <a:r>
-              <a:rPr lang="es-ES" dirty="0"/>
-              <a:t>.</a:t>
-            </a:r>
-          </a:p>
-          <a:p>
-            <a:endParaRPr lang="es-ES" dirty="0"/>
-          </a:p>
-          <a:p>
-            <a:r>
-              <a:rPr lang="es-ES" dirty="0"/>
-              <a:t>🔹 </a:t>
-            </a:r>
-            <a:r>
-              <a:rPr lang="es-ES" b="1" dirty="0"/>
-              <a:t>Ejemplo: Calcular intereses de un préstamo en un servicio de dominio</a:t>
-            </a:r>
-            <a:endParaRPr lang="es-ES" dirty="0"/>
-          </a:p>
-          <a:p>
-            <a:pPr>
-              <a:buFont typeface="Arial" panose="020B0604020202020204" pitchFamily="34" charset="0"/>
-              <a:buChar char="•"/>
-            </a:pPr>
-            <a:endParaRPr lang="es-ES" dirty="0"/>
-          </a:p>
-          <a:p>
-            <a:pPr lvl="1">
-              <a:buFont typeface="Arial" panose="020B0604020202020204" pitchFamily="34" charset="0"/>
-              <a:buChar char="•"/>
-            </a:pPr>
-            <a:r>
-              <a:rPr lang="es-ES" dirty="0"/>
-              <a:t>La </a:t>
-            </a:r>
-            <a:r>
-              <a:rPr lang="es-ES" b="1" dirty="0"/>
-              <a:t>tasa de interés</a:t>
-            </a:r>
-            <a:r>
-              <a:rPr lang="es-ES" dirty="0"/>
-              <a:t> varía según el </a:t>
-            </a:r>
-            <a:r>
-              <a:rPr lang="es-ES" b="1" dirty="0"/>
-              <a:t>tipo de cliente</a:t>
-            </a:r>
-            <a:r>
-              <a:rPr lang="es-ES" dirty="0"/>
-              <a:t>.</a:t>
-            </a:r>
-          </a:p>
-          <a:p>
-            <a:pPr lvl="1">
-              <a:buFont typeface="Arial" panose="020B0604020202020204" pitchFamily="34" charset="0"/>
-              <a:buChar char="•"/>
-            </a:pPr>
-            <a:endParaRPr lang="es-ES" dirty="0"/>
-          </a:p>
-          <a:p>
-            <a:pPr lvl="1">
-              <a:buFont typeface="Arial" panose="020B0604020202020204" pitchFamily="34" charset="0"/>
-              <a:buChar char="•"/>
-            </a:pPr>
-            <a:r>
-              <a:rPr lang="es-ES" dirty="0"/>
-              <a:t>El cálculo de intereses </a:t>
-            </a:r>
-            <a:r>
-              <a:rPr lang="es-ES" b="1" dirty="0"/>
-              <a:t>no modifica el estado del préstamo</a:t>
-            </a:r>
-            <a:r>
-              <a:rPr lang="es-ES" dirty="0"/>
-              <a:t> pero es importante para la decisión del negocio.</a:t>
-            </a:r>
-          </a:p>
-          <a:p>
-            <a:pPr lvl="1">
-              <a:buFont typeface="Arial" panose="020B0604020202020204" pitchFamily="34" charset="0"/>
-              <a:buChar char="•"/>
-            </a:pPr>
-            <a:endParaRPr lang="es-ES" dirty="0"/>
-          </a:p>
-        </p:txBody>
-      </p:sp>
-    </p:spTree>
-    <p:extLst>
-      <p:ext uri="{BB962C8B-B14F-4D97-AF65-F5344CB8AC3E}">
-        <p14:creationId xmlns:p14="http://schemas.microsoft.com/office/powerpoint/2010/main" val="3411986487"/>
-      </p:ext>
-    </p:extLst>
-  </p:cSld>
-  <p:clrMapOvr>
-    <a:masterClrMapping/>
-  </p:clrMapOvr>
-</p:sld>
-</file>
-
-<file path=ppt/slides/slide38.xml><?xml version="1.0" encoding="utf-8"?>
-<p:sld xmlns:a="http://schemas.openxmlformats.org/drawingml/2006/main" xmlns:r="http://schemas.openxmlformats.org/officeDocument/2006/relationships" xmlns:p="http://schemas.openxmlformats.org/presentationml/2006/main">
-  <p:cSld>
-    <p:spTree>
-      <p:nvGrpSpPr>
-        <p:cNvPr id="1" name=""/>
-        <p:cNvGrpSpPr/>
-        <p:nvPr/>
-      </p:nvGrpSpPr>
-      <p:grpSpPr>
-        <a:xfrm>
-          <a:off x="0" y="0"/>
-          <a:ext cx="0" cy="0"/>
-          <a:chOff x="0" y="0"/>
-          <a:chExt cx="0" cy="0"/>
-        </a:xfrm>
-      </p:grpSpPr>
-      <p:sp>
-        <p:nvSpPr>
-          <p:cNvPr id="2" name="CuadroTexto 1">
-            <a:extLst>
-              <a:ext uri="{FF2B5EF4-FFF2-40B4-BE49-F238E27FC236}">
-                <a16:creationId xmlns:a16="http://schemas.microsoft.com/office/drawing/2014/main" id="{9016ABA3-A653-4DB7-9807-2797858C73F4}"/>
-              </a:ext>
-            </a:extLst>
-          </p:cNvPr>
-          <p:cNvSpPr txBox="1"/>
-          <p:nvPr/>
-        </p:nvSpPr>
-        <p:spPr>
-          <a:xfrm>
-            <a:off x="557111" y="661012"/>
-            <a:ext cx="9115699" cy="584775"/>
-          </a:xfrm>
-          <a:prstGeom prst="rect">
-            <a:avLst/>
-          </a:prstGeom>
-          <a:noFill/>
-        </p:spPr>
-        <p:txBody>
-          <a:bodyPr wrap="square" rtlCol="0">
-            <a:spAutoFit/>
-          </a:bodyPr>
-          <a:lstStyle/>
-          <a:p>
-            <a:r>
-              <a:rPr lang="es-ES" sz="3200" dirty="0"/>
-              <a:t>Reglas de Negocio en DDD</a:t>
-            </a:r>
-            <a:endParaRPr lang="es-419" sz="3200" dirty="0"/>
-          </a:p>
-        </p:txBody>
-      </p:sp>
-      <p:pic>
-        <p:nvPicPr>
-          <p:cNvPr id="4" name="Imagen 3">
-            <a:extLst>
-              <a:ext uri="{FF2B5EF4-FFF2-40B4-BE49-F238E27FC236}">
-                <a16:creationId xmlns:a16="http://schemas.microsoft.com/office/drawing/2014/main" id="{53CBC57C-5FD3-47A4-905E-D3C2FE0D5FD6}"/>
-              </a:ext>
-            </a:extLst>
-          </p:cNvPr>
-          <p:cNvPicPr>
-            <a:picLocks noChangeAspect="1"/>
-          </p:cNvPicPr>
-          <p:nvPr/>
-        </p:nvPicPr>
-        <p:blipFill>
-          <a:blip r:embed="rId2"/>
-          <a:stretch>
-            <a:fillRect/>
-          </a:stretch>
-        </p:blipFill>
-        <p:spPr>
-          <a:xfrm>
-            <a:off x="1748390" y="1974773"/>
-            <a:ext cx="8695219" cy="2908453"/>
-          </a:xfrm>
-          <a:prstGeom prst="rect">
-            <a:avLst/>
-          </a:prstGeom>
-        </p:spPr>
-      </p:pic>
-    </p:spTree>
-    <p:extLst>
-      <p:ext uri="{BB962C8B-B14F-4D97-AF65-F5344CB8AC3E}">
-        <p14:creationId xmlns:p14="http://schemas.microsoft.com/office/powerpoint/2010/main" val="1204364669"/>
-      </p:ext>
-    </p:extLst>
-  </p:cSld>
-  <p:clrMapOvr>
-    <a:masterClrMapping/>
-  </p:clrMapOvr>
-</p:sld>
-</file>
-
-<file path=ppt/slides/slide39.xml><?xml version="1.0" encoding="utf-8"?>
-<p:sld xmlns:a="http://schemas.openxmlformats.org/drawingml/2006/main" xmlns:r="http://schemas.openxmlformats.org/officeDocument/2006/relationships" xmlns:p="http://schemas.openxmlformats.org/presentationml/2006/main">
-  <p:cSld>
-    <p:spTree>
-      <p:nvGrpSpPr>
-        <p:cNvPr id="1" name=""/>
-        <p:cNvGrpSpPr/>
-        <p:nvPr/>
-      </p:nvGrpSpPr>
-      <p:grpSpPr>
-        <a:xfrm>
-          <a:off x="0" y="0"/>
-          <a:ext cx="0" cy="0"/>
-          <a:chOff x="0" y="0"/>
-          <a:chExt cx="0" cy="0"/>
-        </a:xfrm>
-      </p:grpSpPr>
-      <p:sp>
-        <p:nvSpPr>
-          <p:cNvPr id="2" name="CuadroTexto 1">
-            <a:extLst>
-              <a:ext uri="{FF2B5EF4-FFF2-40B4-BE49-F238E27FC236}">
-                <a16:creationId xmlns:a16="http://schemas.microsoft.com/office/drawing/2014/main" id="{D94FD2FC-3F7B-430D-A697-123065677784}"/>
-              </a:ext>
-            </a:extLst>
-          </p:cNvPr>
-          <p:cNvSpPr txBox="1"/>
-          <p:nvPr/>
-        </p:nvSpPr>
-        <p:spPr>
-          <a:xfrm>
-            <a:off x="557111" y="661012"/>
-            <a:ext cx="9115699" cy="584775"/>
-          </a:xfrm>
-          <a:prstGeom prst="rect">
-            <a:avLst/>
-          </a:prstGeom>
-          <a:noFill/>
-        </p:spPr>
-        <p:txBody>
-          <a:bodyPr wrap="square" rtlCol="0">
-            <a:spAutoFit/>
-          </a:bodyPr>
-          <a:lstStyle/>
-          <a:p>
-            <a:r>
-              <a:rPr lang="es-ES" sz="3200" dirty="0"/>
-              <a:t>Reglas de Negocio en DDD - Implementación</a:t>
-            </a:r>
-            <a:endParaRPr lang="es-419" sz="3200" dirty="0"/>
-          </a:p>
-        </p:txBody>
-      </p:sp>
-      <p:sp>
-        <p:nvSpPr>
-          <p:cNvPr id="6" name="CuadroTexto 5">
-            <a:extLst>
-              <a:ext uri="{FF2B5EF4-FFF2-40B4-BE49-F238E27FC236}">
-                <a16:creationId xmlns:a16="http://schemas.microsoft.com/office/drawing/2014/main" id="{2AEC0E94-213E-431D-9797-DB03112CCDAA}"/>
-              </a:ext>
-            </a:extLst>
-          </p:cNvPr>
-          <p:cNvSpPr txBox="1"/>
-          <p:nvPr/>
-        </p:nvSpPr>
-        <p:spPr>
-          <a:xfrm>
-            <a:off x="909191" y="1648053"/>
-            <a:ext cx="10944958" cy="3970318"/>
-          </a:xfrm>
-          <a:prstGeom prst="rect">
-            <a:avLst/>
-          </a:prstGeom>
-          <a:noFill/>
-        </p:spPr>
-        <p:txBody>
-          <a:bodyPr wrap="square">
-            <a:spAutoFit/>
-          </a:bodyPr>
-          <a:lstStyle/>
-          <a:p>
-            <a:r>
-              <a:rPr lang="es-419" b="1" dirty="0"/>
-              <a:t>Motores de Reglas de Negocio (BRMS)</a:t>
-            </a:r>
-          </a:p>
-          <a:p>
-            <a:endParaRPr lang="es-419" b="1" dirty="0"/>
-          </a:p>
-          <a:p>
-            <a:r>
-              <a:rPr lang="es-419" dirty="0"/>
-              <a:t>Un </a:t>
-            </a:r>
-            <a:r>
-              <a:rPr lang="es-419" b="1" dirty="0"/>
-              <a:t>Business Rules Management </a:t>
-            </a:r>
-            <a:r>
-              <a:rPr lang="es-419" b="1" dirty="0" err="1"/>
-              <a:t>System</a:t>
-            </a:r>
-            <a:r>
-              <a:rPr lang="es-419" b="1" dirty="0"/>
-              <a:t> (BRMS)</a:t>
-            </a:r>
-            <a:r>
-              <a:rPr lang="es-419" dirty="0"/>
-              <a:t> permite manejar reglas de negocio de forma </a:t>
-            </a:r>
-            <a:r>
-              <a:rPr lang="es-419" b="1" dirty="0"/>
-              <a:t>dinámica, configurable y escalable</a:t>
-            </a:r>
-            <a:r>
-              <a:rPr lang="es-419" dirty="0"/>
-              <a:t> sin modificar el código fuente.</a:t>
-            </a:r>
-          </a:p>
-          <a:p>
-            <a:endParaRPr lang="es-419" dirty="0"/>
-          </a:p>
-          <a:p>
-            <a:r>
-              <a:rPr lang="es-419" dirty="0"/>
-              <a:t>📌 </a:t>
-            </a:r>
-            <a:r>
-              <a:rPr lang="es-419" b="1" dirty="0"/>
-              <a:t>Ejemplos de BRMS Populares:</a:t>
-            </a:r>
-            <a:br>
-              <a:rPr lang="es-419" dirty="0"/>
-            </a:br>
-            <a:endParaRPr lang="es-419" dirty="0"/>
-          </a:p>
-          <a:p>
-            <a:r>
-              <a:rPr lang="es-419" dirty="0"/>
-              <a:t>✅ </a:t>
-            </a:r>
-            <a:r>
-              <a:rPr lang="es-419" b="1" dirty="0" err="1"/>
-              <a:t>Drools</a:t>
-            </a:r>
-            <a:r>
-              <a:rPr lang="es-419" dirty="0"/>
-              <a:t> (Open </a:t>
-            </a:r>
-            <a:r>
-              <a:rPr lang="es-419" dirty="0" err="1"/>
-              <a:t>Source</a:t>
-            </a:r>
-            <a:r>
-              <a:rPr lang="es-419" dirty="0"/>
-              <a:t>, de Red </a:t>
-            </a:r>
-            <a:r>
-              <a:rPr lang="es-419" dirty="0" err="1"/>
-              <a:t>Hat</a:t>
-            </a:r>
-            <a:r>
-              <a:rPr lang="es-419" dirty="0"/>
-              <a:t>)</a:t>
-            </a:r>
-            <a:br>
-              <a:rPr lang="es-419" dirty="0"/>
-            </a:br>
-            <a:endParaRPr lang="es-419" dirty="0"/>
-          </a:p>
-          <a:p>
-            <a:r>
-              <a:rPr lang="es-419" dirty="0"/>
-              <a:t>✅ </a:t>
-            </a:r>
-            <a:r>
-              <a:rPr lang="es-419" b="1" dirty="0" err="1"/>
-              <a:t>Camunda</a:t>
-            </a:r>
-            <a:r>
-              <a:rPr lang="es-419" dirty="0"/>
-              <a:t> (BPM con soporte para reglas)</a:t>
-            </a:r>
-            <a:br>
-              <a:rPr lang="es-419" dirty="0"/>
-            </a:br>
-            <a:endParaRPr lang="es-419" dirty="0"/>
-          </a:p>
-          <a:p>
-            <a:r>
-              <a:rPr lang="es-419" dirty="0"/>
-              <a:t>✅ </a:t>
-            </a:r>
-            <a:r>
-              <a:rPr lang="es-419" b="1" dirty="0" err="1"/>
-              <a:t>Decision</a:t>
-            </a:r>
-            <a:r>
-              <a:rPr lang="es-419" b="1" dirty="0"/>
-              <a:t> </a:t>
-            </a:r>
-            <a:r>
-              <a:rPr lang="es-419" b="1" dirty="0" err="1"/>
-              <a:t>Model</a:t>
-            </a:r>
-            <a:r>
-              <a:rPr lang="es-419" b="1" dirty="0"/>
-              <a:t> and </a:t>
-            </a:r>
-            <a:r>
-              <a:rPr lang="es-419" b="1" dirty="0" err="1"/>
-              <a:t>Notation</a:t>
-            </a:r>
-            <a:r>
-              <a:rPr lang="es-419" b="1" dirty="0"/>
-              <a:t> (DMN)</a:t>
-            </a:r>
-            <a:br>
-              <a:rPr lang="es-419" dirty="0"/>
-            </a:br>
-            <a:endParaRPr lang="es-419" dirty="0"/>
-          </a:p>
-          <a:p>
-            <a:r>
-              <a:rPr lang="es-419" dirty="0"/>
-              <a:t>✅ </a:t>
-            </a:r>
-            <a:r>
-              <a:rPr lang="es-419" b="1" dirty="0"/>
-              <a:t>Rule </a:t>
-            </a:r>
-            <a:r>
-              <a:rPr lang="es-419" b="1" dirty="0" err="1"/>
-              <a:t>Engines</a:t>
-            </a:r>
-            <a:r>
-              <a:rPr lang="es-419" b="1" dirty="0"/>
-              <a:t> basados en JSON o YAML</a:t>
-            </a:r>
-            <a:r>
-              <a:rPr lang="es-419" dirty="0"/>
-              <a:t> (para configuraciones dinámicas)</a:t>
-            </a:r>
-          </a:p>
-        </p:txBody>
-      </p:sp>
-    </p:spTree>
-    <p:extLst>
-      <p:ext uri="{BB962C8B-B14F-4D97-AF65-F5344CB8AC3E}">
-        <p14:creationId xmlns:p14="http://schemas.microsoft.com/office/powerpoint/2010/main" val="3797430530"/>
       </p:ext>
     </p:extLst>
   </p:cSld>
@@ -19965,6 +21627,942 @@
           <p:cNvPr id="2" name="CuadroTexto 1">
             <a:extLst>
               <a:ext uri="{FF2B5EF4-FFF2-40B4-BE49-F238E27FC236}">
+                <a16:creationId xmlns:a16="http://schemas.microsoft.com/office/drawing/2014/main" id="{FED09263-EAB6-43F2-9272-1D9374B65C41}"/>
+              </a:ext>
+            </a:extLst>
+          </p:cNvPr>
+          <p:cNvSpPr txBox="1"/>
+          <p:nvPr/>
+        </p:nvSpPr>
+        <p:spPr>
+          <a:xfrm>
+            <a:off x="557111" y="661012"/>
+            <a:ext cx="9115699" cy="584775"/>
+          </a:xfrm>
+          <a:prstGeom prst="rect">
+            <a:avLst/>
+          </a:prstGeom>
+          <a:noFill/>
+        </p:spPr>
+        <p:txBody>
+          <a:bodyPr wrap="square" rtlCol="0">
+            <a:spAutoFit/>
+          </a:bodyPr>
+          <a:lstStyle/>
+          <a:p>
+            <a:r>
+              <a:rPr lang="es-ES" sz="3200" dirty="0"/>
+              <a:t>Reglas de Negocio en DDD</a:t>
+            </a:r>
+            <a:endParaRPr lang="es-419" sz="3200" dirty="0"/>
+          </a:p>
+        </p:txBody>
+      </p:sp>
+      <p:sp>
+        <p:nvSpPr>
+          <p:cNvPr id="4" name="CuadroTexto 3">
+            <a:extLst>
+              <a:ext uri="{FF2B5EF4-FFF2-40B4-BE49-F238E27FC236}">
+                <a16:creationId xmlns:a16="http://schemas.microsoft.com/office/drawing/2014/main" id="{5567395E-DEC7-4DA7-9817-5870BB484B0F}"/>
+              </a:ext>
+            </a:extLst>
+          </p:cNvPr>
+          <p:cNvSpPr txBox="1"/>
+          <p:nvPr/>
+        </p:nvSpPr>
+        <p:spPr>
+          <a:xfrm>
+            <a:off x="724359" y="1563398"/>
+            <a:ext cx="10953520" cy="646331"/>
+          </a:xfrm>
+          <a:prstGeom prst="rect">
+            <a:avLst/>
+          </a:prstGeom>
+          <a:noFill/>
+        </p:spPr>
+        <p:txBody>
+          <a:bodyPr wrap="square">
+            <a:spAutoFit/>
+          </a:bodyPr>
+          <a:lstStyle/>
+          <a:p>
+            <a:r>
+              <a:rPr lang="es-ES" dirty="0"/>
+              <a:t>La </a:t>
+            </a:r>
+            <a:r>
+              <a:rPr lang="es-ES" b="1" dirty="0"/>
+              <a:t>capa de dominio</a:t>
+            </a:r>
+            <a:r>
+              <a:rPr lang="es-ES" dirty="0"/>
+              <a:t> encapsula la </a:t>
+            </a:r>
+            <a:r>
+              <a:rPr lang="es-ES" b="1" dirty="0"/>
+              <a:t>lógica de negocio</a:t>
+            </a:r>
+            <a:r>
+              <a:rPr lang="es-ES" dirty="0"/>
+              <a:t> y las </a:t>
+            </a:r>
+            <a:r>
+              <a:rPr lang="es-ES" b="1" dirty="0"/>
+              <a:t>reglas del dominio</a:t>
+            </a:r>
+            <a:r>
+              <a:rPr lang="es-ES" dirty="0"/>
+              <a:t>, garantizando que los datos sean consistentes y que el sistema refleje fielmente el negocio.</a:t>
+            </a:r>
+            <a:endParaRPr lang="es-419" dirty="0"/>
+          </a:p>
+        </p:txBody>
+      </p:sp>
+      <p:sp>
+        <p:nvSpPr>
+          <p:cNvPr id="6" name="CuadroTexto 5">
+            <a:extLst>
+              <a:ext uri="{FF2B5EF4-FFF2-40B4-BE49-F238E27FC236}">
+                <a16:creationId xmlns:a16="http://schemas.microsoft.com/office/drawing/2014/main" id="{01822F55-30DE-4E82-B132-9FE8319B9095}"/>
+              </a:ext>
+            </a:extLst>
+          </p:cNvPr>
+          <p:cNvSpPr txBox="1"/>
+          <p:nvPr/>
+        </p:nvSpPr>
+        <p:spPr>
+          <a:xfrm>
+            <a:off x="4060015" y="3447943"/>
+            <a:ext cx="6925021" cy="1200329"/>
+          </a:xfrm>
+          <a:prstGeom prst="rect">
+            <a:avLst/>
+          </a:prstGeom>
+          <a:noFill/>
+        </p:spPr>
+        <p:txBody>
+          <a:bodyPr wrap="square">
+            <a:spAutoFit/>
+          </a:bodyPr>
+          <a:lstStyle/>
+          <a:p>
+            <a:r>
+              <a:rPr lang="es-ES" dirty="0"/>
+              <a:t>📌 Las </a:t>
+            </a:r>
+            <a:r>
+              <a:rPr lang="es-ES" b="1" dirty="0"/>
+              <a:t>Reglas de negocio</a:t>
+            </a:r>
+            <a:r>
+              <a:rPr lang="es-ES" dirty="0"/>
+              <a:t> en la capa de dominio se dedican a:</a:t>
+            </a:r>
+            <a:br>
+              <a:rPr lang="es-ES" dirty="0"/>
+            </a:br>
+            <a:r>
+              <a:rPr lang="es-ES" dirty="0"/>
+              <a:t>✅ </a:t>
+            </a:r>
+            <a:r>
+              <a:rPr lang="es-ES" b="1" dirty="0"/>
+              <a:t>Validar estados y transiciones</a:t>
+            </a:r>
+            <a:r>
+              <a:rPr lang="es-ES" dirty="0"/>
+              <a:t> dentro del dominio.</a:t>
+            </a:r>
+            <a:br>
+              <a:rPr lang="es-ES" dirty="0"/>
+            </a:br>
+            <a:r>
+              <a:rPr lang="es-ES" dirty="0"/>
+              <a:t>✅ </a:t>
+            </a:r>
+            <a:r>
+              <a:rPr lang="es-ES" b="1" dirty="0"/>
+              <a:t>Definir comportamientos y restricciones</a:t>
+            </a:r>
+            <a:r>
+              <a:rPr lang="es-ES" dirty="0"/>
+              <a:t> en entidades y agregados.</a:t>
+            </a:r>
+            <a:br>
+              <a:rPr lang="es-ES" dirty="0"/>
+            </a:br>
+            <a:r>
+              <a:rPr lang="es-ES" dirty="0"/>
+              <a:t>✅ </a:t>
+            </a:r>
+            <a:r>
+              <a:rPr lang="es-ES" b="1" dirty="0"/>
+              <a:t>Evitar estados inconsistentes en el sistema</a:t>
+            </a:r>
+            <a:r>
+              <a:rPr lang="es-ES" dirty="0"/>
+              <a:t>.</a:t>
+            </a:r>
+            <a:endParaRPr lang="es-419" dirty="0"/>
+          </a:p>
+        </p:txBody>
+      </p:sp>
+    </p:spTree>
+    <p:extLst>
+      <p:ext uri="{BB962C8B-B14F-4D97-AF65-F5344CB8AC3E}">
+        <p14:creationId xmlns:p14="http://schemas.microsoft.com/office/powerpoint/2010/main" val="906998186"/>
+      </p:ext>
+    </p:extLst>
+  </p:cSld>
+  <p:clrMapOvr>
+    <a:masterClrMapping/>
+  </p:clrMapOvr>
+</p:sld>
+</file>
+
+<file path=ppt/slides/slide41.xml><?xml version="1.0" encoding="utf-8"?>
+<p:sld xmlns:a="http://schemas.openxmlformats.org/drawingml/2006/main" xmlns:r="http://schemas.openxmlformats.org/officeDocument/2006/relationships" xmlns:p="http://schemas.openxmlformats.org/presentationml/2006/main">
+  <p:cSld>
+    <p:spTree>
+      <p:nvGrpSpPr>
+        <p:cNvPr id="1" name=""/>
+        <p:cNvGrpSpPr/>
+        <p:nvPr/>
+      </p:nvGrpSpPr>
+      <p:grpSpPr>
+        <a:xfrm>
+          <a:off x="0" y="0"/>
+          <a:ext cx="0" cy="0"/>
+          <a:chOff x="0" y="0"/>
+          <a:chExt cx="0" cy="0"/>
+        </a:xfrm>
+      </p:grpSpPr>
+      <p:sp>
+        <p:nvSpPr>
+          <p:cNvPr id="2" name="CuadroTexto 1">
+            <a:extLst>
+              <a:ext uri="{FF2B5EF4-FFF2-40B4-BE49-F238E27FC236}">
+                <a16:creationId xmlns:a16="http://schemas.microsoft.com/office/drawing/2014/main" id="{FED09263-EAB6-43F2-9272-1D9374B65C41}"/>
+              </a:ext>
+            </a:extLst>
+          </p:cNvPr>
+          <p:cNvSpPr txBox="1"/>
+          <p:nvPr/>
+        </p:nvSpPr>
+        <p:spPr>
+          <a:xfrm>
+            <a:off x="557111" y="661012"/>
+            <a:ext cx="9115699" cy="584775"/>
+          </a:xfrm>
+          <a:prstGeom prst="rect">
+            <a:avLst/>
+          </a:prstGeom>
+          <a:noFill/>
+        </p:spPr>
+        <p:txBody>
+          <a:bodyPr wrap="square" rtlCol="0">
+            <a:spAutoFit/>
+          </a:bodyPr>
+          <a:lstStyle/>
+          <a:p>
+            <a:r>
+              <a:rPr lang="es-ES" sz="3200" dirty="0"/>
+              <a:t>Reglas de Negocio en DDD</a:t>
+            </a:r>
+            <a:endParaRPr lang="es-419" sz="3200" dirty="0"/>
+          </a:p>
+        </p:txBody>
+      </p:sp>
+      <p:sp>
+        <p:nvSpPr>
+          <p:cNvPr id="8" name="CuadroTexto 7">
+            <a:extLst>
+              <a:ext uri="{FF2B5EF4-FFF2-40B4-BE49-F238E27FC236}">
+                <a16:creationId xmlns:a16="http://schemas.microsoft.com/office/drawing/2014/main" id="{CF94A3E0-C58D-4B62-BEDA-21F292A8B8C7}"/>
+              </a:ext>
+            </a:extLst>
+          </p:cNvPr>
+          <p:cNvSpPr txBox="1"/>
+          <p:nvPr/>
+        </p:nvSpPr>
+        <p:spPr>
+          <a:xfrm>
+            <a:off x="450315" y="1672673"/>
+            <a:ext cx="5391997" cy="4524315"/>
+          </a:xfrm>
+          <a:prstGeom prst="rect">
+            <a:avLst/>
+          </a:prstGeom>
+          <a:noFill/>
+          <a:ln>
+            <a:solidFill>
+              <a:schemeClr val="tx1"/>
+            </a:solidFill>
+          </a:ln>
+        </p:spPr>
+        <p:txBody>
+          <a:bodyPr wrap="square">
+            <a:spAutoFit/>
+          </a:bodyPr>
+          <a:lstStyle/>
+          <a:p>
+            <a:r>
+              <a:rPr lang="es-ES" b="1" dirty="0"/>
+              <a:t>Reglas de Negocio Críticas (Invariantes del Dominio)</a:t>
+            </a:r>
+          </a:p>
+          <a:p>
+            <a:endParaRPr lang="es-ES" b="1" dirty="0"/>
+          </a:p>
+          <a:p>
+            <a:r>
+              <a:rPr lang="es-ES" dirty="0"/>
+              <a:t>📌 Son reglas que </a:t>
+            </a:r>
+            <a:r>
+              <a:rPr lang="es-ES" b="1" dirty="0"/>
+              <a:t>siempre deben cumplirse</a:t>
+            </a:r>
+            <a:r>
+              <a:rPr lang="es-ES" dirty="0"/>
+              <a:t> para mantener la integridad del dominio.</a:t>
+            </a:r>
+            <a:br>
+              <a:rPr lang="es-ES" dirty="0"/>
+            </a:br>
+            <a:endParaRPr lang="es-ES" dirty="0"/>
+          </a:p>
+          <a:p>
+            <a:r>
+              <a:rPr lang="es-ES" dirty="0"/>
+              <a:t>📌 </a:t>
+            </a:r>
+            <a:r>
+              <a:rPr lang="es-ES" b="1" dirty="0"/>
+              <a:t>Se establecen en Entidades, Objetos de Valor y Agregados</a:t>
+            </a:r>
+            <a:r>
+              <a:rPr lang="es-ES" dirty="0"/>
+              <a:t>.</a:t>
+            </a:r>
+          </a:p>
+          <a:p>
+            <a:endParaRPr lang="es-ES" dirty="0"/>
+          </a:p>
+          <a:p>
+            <a:r>
+              <a:rPr lang="es-ES" dirty="0"/>
+              <a:t>🔹 </a:t>
+            </a:r>
+            <a:r>
+              <a:rPr lang="es-ES" b="1" dirty="0"/>
+              <a:t>Ejemplo en un sistema de préstamos de un concesionario:</a:t>
+            </a:r>
+            <a:endParaRPr lang="es-ES" dirty="0"/>
+          </a:p>
+          <a:p>
+            <a:pPr>
+              <a:buFont typeface="Arial" panose="020B0604020202020204" pitchFamily="34" charset="0"/>
+              <a:buChar char="•"/>
+            </a:pPr>
+            <a:endParaRPr lang="es-ES" dirty="0"/>
+          </a:p>
+          <a:p>
+            <a:pPr lvl="1">
+              <a:buFont typeface="Arial" panose="020B0604020202020204" pitchFamily="34" charset="0"/>
+              <a:buChar char="•"/>
+            </a:pPr>
+            <a:r>
+              <a:rPr lang="es-ES" dirty="0"/>
+              <a:t>Un préstamo </a:t>
+            </a:r>
+            <a:r>
+              <a:rPr lang="es-ES" b="1" dirty="0"/>
+              <a:t>nunca</a:t>
+            </a:r>
+            <a:r>
+              <a:rPr lang="es-ES" dirty="0"/>
+              <a:t> puede aprobarse si el cliente tiene </a:t>
+            </a:r>
+            <a:r>
+              <a:rPr lang="es-ES" b="1" dirty="0"/>
+              <a:t>historial crediticio menor a 600</a:t>
+            </a:r>
+            <a:r>
+              <a:rPr lang="es-ES" dirty="0"/>
+              <a:t>.</a:t>
+            </a:r>
+          </a:p>
+          <a:p>
+            <a:pPr lvl="1">
+              <a:buFont typeface="Arial" panose="020B0604020202020204" pitchFamily="34" charset="0"/>
+              <a:buChar char="•"/>
+            </a:pPr>
+            <a:endParaRPr lang="es-ES" dirty="0"/>
+          </a:p>
+          <a:p>
+            <a:pPr lvl="1">
+              <a:buFont typeface="Arial" panose="020B0604020202020204" pitchFamily="34" charset="0"/>
+              <a:buChar char="•"/>
+            </a:pPr>
+            <a:r>
+              <a:rPr lang="es-ES" dirty="0"/>
+              <a:t>Un préstamo </a:t>
+            </a:r>
+            <a:r>
+              <a:rPr lang="es-ES" b="1" dirty="0"/>
+              <a:t>no puede cambiar de estado una vez liquidado</a:t>
+            </a:r>
+            <a:r>
+              <a:rPr lang="es-ES" dirty="0"/>
+              <a:t>.</a:t>
+            </a:r>
+          </a:p>
+        </p:txBody>
+      </p:sp>
+      <p:sp>
+        <p:nvSpPr>
+          <p:cNvPr id="10" name="CuadroTexto 9">
+            <a:extLst>
+              <a:ext uri="{FF2B5EF4-FFF2-40B4-BE49-F238E27FC236}">
+                <a16:creationId xmlns:a16="http://schemas.microsoft.com/office/drawing/2014/main" id="{2669DD92-4734-4056-A274-B3EB7138B6EF}"/>
+              </a:ext>
+            </a:extLst>
+          </p:cNvPr>
+          <p:cNvSpPr txBox="1"/>
+          <p:nvPr/>
+        </p:nvSpPr>
+        <p:spPr>
+          <a:xfrm>
+            <a:off x="5986131" y="1672673"/>
+            <a:ext cx="6097836" cy="4524315"/>
+          </a:xfrm>
+          <a:prstGeom prst="rect">
+            <a:avLst/>
+          </a:prstGeom>
+          <a:noFill/>
+          <a:ln>
+            <a:solidFill>
+              <a:schemeClr val="tx1"/>
+            </a:solidFill>
+          </a:ln>
+        </p:spPr>
+        <p:txBody>
+          <a:bodyPr wrap="square">
+            <a:spAutoFit/>
+          </a:bodyPr>
+          <a:lstStyle/>
+          <a:p>
+            <a:r>
+              <a:rPr lang="es-ES" b="1" dirty="0"/>
+              <a:t>Reglas de Negocio de Coordinación (Políticas del Dominio)</a:t>
+            </a:r>
+          </a:p>
+          <a:p>
+            <a:endParaRPr lang="es-ES" b="1" dirty="0"/>
+          </a:p>
+          <a:p>
+            <a:r>
+              <a:rPr lang="es-ES" dirty="0"/>
+              <a:t>📌 Son reglas que </a:t>
+            </a:r>
+            <a:r>
+              <a:rPr lang="es-ES" b="1" dirty="0"/>
+              <a:t>coordinan acciones</a:t>
+            </a:r>
+            <a:r>
+              <a:rPr lang="es-ES" dirty="0"/>
+              <a:t> dentro del dominio pero no afectan la consistencia directa del modelo.</a:t>
+            </a:r>
+          </a:p>
+          <a:p>
+            <a:br>
+              <a:rPr lang="es-ES" dirty="0"/>
+            </a:br>
+            <a:r>
+              <a:rPr lang="es-ES" dirty="0"/>
+              <a:t>📌 </a:t>
+            </a:r>
+            <a:r>
+              <a:rPr lang="es-ES" b="1" dirty="0"/>
+              <a:t>Se implementan en Servicios de Dominio o Eventos de Dominio</a:t>
+            </a:r>
+            <a:r>
+              <a:rPr lang="es-ES" dirty="0"/>
+              <a:t>.</a:t>
+            </a:r>
+          </a:p>
+          <a:p>
+            <a:endParaRPr lang="es-ES" dirty="0"/>
+          </a:p>
+          <a:p>
+            <a:r>
+              <a:rPr lang="es-ES" dirty="0"/>
+              <a:t>🔹 </a:t>
+            </a:r>
+            <a:r>
+              <a:rPr lang="es-ES" b="1" dirty="0"/>
+              <a:t>Ejemplo: Calcular intereses de un préstamo en un servicio de dominio</a:t>
+            </a:r>
+            <a:endParaRPr lang="es-ES" dirty="0"/>
+          </a:p>
+          <a:p>
+            <a:pPr>
+              <a:buFont typeface="Arial" panose="020B0604020202020204" pitchFamily="34" charset="0"/>
+              <a:buChar char="•"/>
+            </a:pPr>
+            <a:endParaRPr lang="es-ES" dirty="0"/>
+          </a:p>
+          <a:p>
+            <a:pPr lvl="1">
+              <a:buFont typeface="Arial" panose="020B0604020202020204" pitchFamily="34" charset="0"/>
+              <a:buChar char="•"/>
+            </a:pPr>
+            <a:r>
+              <a:rPr lang="es-ES" dirty="0"/>
+              <a:t>La </a:t>
+            </a:r>
+            <a:r>
+              <a:rPr lang="es-ES" b="1" dirty="0"/>
+              <a:t>tasa de interés</a:t>
+            </a:r>
+            <a:r>
+              <a:rPr lang="es-ES" dirty="0"/>
+              <a:t> varía según el </a:t>
+            </a:r>
+            <a:r>
+              <a:rPr lang="es-ES" b="1" dirty="0"/>
+              <a:t>tipo de cliente</a:t>
+            </a:r>
+            <a:r>
+              <a:rPr lang="es-ES" dirty="0"/>
+              <a:t>.</a:t>
+            </a:r>
+          </a:p>
+          <a:p>
+            <a:pPr lvl="1">
+              <a:buFont typeface="Arial" panose="020B0604020202020204" pitchFamily="34" charset="0"/>
+              <a:buChar char="•"/>
+            </a:pPr>
+            <a:endParaRPr lang="es-ES" dirty="0"/>
+          </a:p>
+          <a:p>
+            <a:pPr lvl="1">
+              <a:buFont typeface="Arial" panose="020B0604020202020204" pitchFamily="34" charset="0"/>
+              <a:buChar char="•"/>
+            </a:pPr>
+            <a:r>
+              <a:rPr lang="es-ES" dirty="0"/>
+              <a:t>El cálculo de intereses </a:t>
+            </a:r>
+            <a:r>
+              <a:rPr lang="es-ES" b="1" dirty="0"/>
+              <a:t>no modifica el estado del préstamo</a:t>
+            </a:r>
+            <a:r>
+              <a:rPr lang="es-ES" dirty="0"/>
+              <a:t> pero es importante para la decisión del negocio.</a:t>
+            </a:r>
+          </a:p>
+          <a:p>
+            <a:pPr lvl="1">
+              <a:buFont typeface="Arial" panose="020B0604020202020204" pitchFamily="34" charset="0"/>
+              <a:buChar char="•"/>
+            </a:pPr>
+            <a:endParaRPr lang="es-ES" dirty="0"/>
+          </a:p>
+        </p:txBody>
+      </p:sp>
+    </p:spTree>
+    <p:extLst>
+      <p:ext uri="{BB962C8B-B14F-4D97-AF65-F5344CB8AC3E}">
+        <p14:creationId xmlns:p14="http://schemas.microsoft.com/office/powerpoint/2010/main" val="3411986487"/>
+      </p:ext>
+    </p:extLst>
+  </p:cSld>
+  <p:clrMapOvr>
+    <a:masterClrMapping/>
+  </p:clrMapOvr>
+</p:sld>
+</file>
+
+<file path=ppt/slides/slide42.xml><?xml version="1.0" encoding="utf-8"?>
+<p:sld xmlns:a="http://schemas.openxmlformats.org/drawingml/2006/main" xmlns:r="http://schemas.openxmlformats.org/officeDocument/2006/relationships" xmlns:p="http://schemas.openxmlformats.org/presentationml/2006/main">
+  <p:cSld>
+    <p:spTree>
+      <p:nvGrpSpPr>
+        <p:cNvPr id="1" name=""/>
+        <p:cNvGrpSpPr/>
+        <p:nvPr/>
+      </p:nvGrpSpPr>
+      <p:grpSpPr>
+        <a:xfrm>
+          <a:off x="0" y="0"/>
+          <a:ext cx="0" cy="0"/>
+          <a:chOff x="0" y="0"/>
+          <a:chExt cx="0" cy="0"/>
+        </a:xfrm>
+      </p:grpSpPr>
+      <p:sp>
+        <p:nvSpPr>
+          <p:cNvPr id="2" name="CuadroTexto 1">
+            <a:extLst>
+              <a:ext uri="{FF2B5EF4-FFF2-40B4-BE49-F238E27FC236}">
+                <a16:creationId xmlns:a16="http://schemas.microsoft.com/office/drawing/2014/main" id="{9016ABA3-A653-4DB7-9807-2797858C73F4}"/>
+              </a:ext>
+            </a:extLst>
+          </p:cNvPr>
+          <p:cNvSpPr txBox="1"/>
+          <p:nvPr/>
+        </p:nvSpPr>
+        <p:spPr>
+          <a:xfrm>
+            <a:off x="557111" y="661012"/>
+            <a:ext cx="9115699" cy="584775"/>
+          </a:xfrm>
+          <a:prstGeom prst="rect">
+            <a:avLst/>
+          </a:prstGeom>
+          <a:noFill/>
+        </p:spPr>
+        <p:txBody>
+          <a:bodyPr wrap="square" rtlCol="0">
+            <a:spAutoFit/>
+          </a:bodyPr>
+          <a:lstStyle/>
+          <a:p>
+            <a:r>
+              <a:rPr lang="es-ES" sz="3200" dirty="0"/>
+              <a:t>Reglas de Negocio en DDD</a:t>
+            </a:r>
+            <a:endParaRPr lang="es-419" sz="3200" dirty="0"/>
+          </a:p>
+        </p:txBody>
+      </p:sp>
+      <p:pic>
+        <p:nvPicPr>
+          <p:cNvPr id="4" name="Imagen 3">
+            <a:extLst>
+              <a:ext uri="{FF2B5EF4-FFF2-40B4-BE49-F238E27FC236}">
+                <a16:creationId xmlns:a16="http://schemas.microsoft.com/office/drawing/2014/main" id="{53CBC57C-5FD3-47A4-905E-D3C2FE0D5FD6}"/>
+              </a:ext>
+            </a:extLst>
+          </p:cNvPr>
+          <p:cNvPicPr>
+            <a:picLocks noChangeAspect="1"/>
+          </p:cNvPicPr>
+          <p:nvPr/>
+        </p:nvPicPr>
+        <p:blipFill>
+          <a:blip r:embed="rId2"/>
+          <a:stretch>
+            <a:fillRect/>
+          </a:stretch>
+        </p:blipFill>
+        <p:spPr>
+          <a:xfrm>
+            <a:off x="1748390" y="1974773"/>
+            <a:ext cx="8695219" cy="2908453"/>
+          </a:xfrm>
+          <a:prstGeom prst="rect">
+            <a:avLst/>
+          </a:prstGeom>
+        </p:spPr>
+      </p:pic>
+    </p:spTree>
+    <p:extLst>
+      <p:ext uri="{BB962C8B-B14F-4D97-AF65-F5344CB8AC3E}">
+        <p14:creationId xmlns:p14="http://schemas.microsoft.com/office/powerpoint/2010/main" val="1204364669"/>
+      </p:ext>
+    </p:extLst>
+  </p:cSld>
+  <p:clrMapOvr>
+    <a:masterClrMapping/>
+  </p:clrMapOvr>
+</p:sld>
+</file>
+
+<file path=ppt/slides/slide43.xml><?xml version="1.0" encoding="utf-8"?>
+<p:sld xmlns:a="http://schemas.openxmlformats.org/drawingml/2006/main" xmlns:r="http://schemas.openxmlformats.org/officeDocument/2006/relationships" xmlns:p="http://schemas.openxmlformats.org/presentationml/2006/main">
+  <p:cSld>
+    <p:spTree>
+      <p:nvGrpSpPr>
+        <p:cNvPr id="1" name=""/>
+        <p:cNvGrpSpPr/>
+        <p:nvPr/>
+      </p:nvGrpSpPr>
+      <p:grpSpPr>
+        <a:xfrm>
+          <a:off x="0" y="0"/>
+          <a:ext cx="0" cy="0"/>
+          <a:chOff x="0" y="0"/>
+          <a:chExt cx="0" cy="0"/>
+        </a:xfrm>
+      </p:grpSpPr>
+      <p:sp>
+        <p:nvSpPr>
+          <p:cNvPr id="2" name="CuadroTexto 1">
+            <a:extLst>
+              <a:ext uri="{FF2B5EF4-FFF2-40B4-BE49-F238E27FC236}">
+                <a16:creationId xmlns:a16="http://schemas.microsoft.com/office/drawing/2014/main" id="{D94FD2FC-3F7B-430D-A697-123065677784}"/>
+              </a:ext>
+            </a:extLst>
+          </p:cNvPr>
+          <p:cNvSpPr txBox="1"/>
+          <p:nvPr/>
+        </p:nvSpPr>
+        <p:spPr>
+          <a:xfrm>
+            <a:off x="557111" y="661012"/>
+            <a:ext cx="9115699" cy="584775"/>
+          </a:xfrm>
+          <a:prstGeom prst="rect">
+            <a:avLst/>
+          </a:prstGeom>
+          <a:noFill/>
+        </p:spPr>
+        <p:txBody>
+          <a:bodyPr wrap="square" rtlCol="0">
+            <a:spAutoFit/>
+          </a:bodyPr>
+          <a:lstStyle/>
+          <a:p>
+            <a:r>
+              <a:rPr lang="es-ES" sz="3200" dirty="0"/>
+              <a:t>Reglas de Negocio en DDD - Implementación</a:t>
+            </a:r>
+            <a:endParaRPr lang="es-419" sz="3200" dirty="0"/>
+          </a:p>
+        </p:txBody>
+      </p:sp>
+      <p:sp>
+        <p:nvSpPr>
+          <p:cNvPr id="6" name="CuadroTexto 5">
+            <a:extLst>
+              <a:ext uri="{FF2B5EF4-FFF2-40B4-BE49-F238E27FC236}">
+                <a16:creationId xmlns:a16="http://schemas.microsoft.com/office/drawing/2014/main" id="{2AEC0E94-213E-431D-9797-DB03112CCDAA}"/>
+              </a:ext>
+            </a:extLst>
+          </p:cNvPr>
+          <p:cNvSpPr txBox="1"/>
+          <p:nvPr/>
+        </p:nvSpPr>
+        <p:spPr>
+          <a:xfrm>
+            <a:off x="909191" y="1648053"/>
+            <a:ext cx="10944958" cy="3970318"/>
+          </a:xfrm>
+          <a:prstGeom prst="rect">
+            <a:avLst/>
+          </a:prstGeom>
+          <a:noFill/>
+        </p:spPr>
+        <p:txBody>
+          <a:bodyPr wrap="square">
+            <a:spAutoFit/>
+          </a:bodyPr>
+          <a:lstStyle/>
+          <a:p>
+            <a:r>
+              <a:rPr lang="es-419" b="1" dirty="0"/>
+              <a:t>Motores de Reglas de Negocio (BRMS)</a:t>
+            </a:r>
+          </a:p>
+          <a:p>
+            <a:endParaRPr lang="es-419" b="1" dirty="0"/>
+          </a:p>
+          <a:p>
+            <a:r>
+              <a:rPr lang="es-419" dirty="0"/>
+              <a:t>Un </a:t>
+            </a:r>
+            <a:r>
+              <a:rPr lang="es-419" b="1" dirty="0"/>
+              <a:t>Business Rules Management </a:t>
+            </a:r>
+            <a:r>
+              <a:rPr lang="es-419" b="1" dirty="0" err="1"/>
+              <a:t>System</a:t>
+            </a:r>
+            <a:r>
+              <a:rPr lang="es-419" b="1" dirty="0"/>
+              <a:t> (BRMS)</a:t>
+            </a:r>
+            <a:r>
+              <a:rPr lang="es-419" dirty="0"/>
+              <a:t> permite manejar reglas de negocio de forma </a:t>
+            </a:r>
+            <a:r>
+              <a:rPr lang="es-419" b="1" dirty="0"/>
+              <a:t>dinámica, configurable y escalable</a:t>
+            </a:r>
+            <a:r>
+              <a:rPr lang="es-419" dirty="0"/>
+              <a:t> sin modificar el código fuente.</a:t>
+            </a:r>
+          </a:p>
+          <a:p>
+            <a:endParaRPr lang="es-419" dirty="0"/>
+          </a:p>
+          <a:p>
+            <a:r>
+              <a:rPr lang="es-419" dirty="0"/>
+              <a:t>📌 </a:t>
+            </a:r>
+            <a:r>
+              <a:rPr lang="es-419" b="1" dirty="0"/>
+              <a:t>Ejemplos de BRMS Populares:</a:t>
+            </a:r>
+            <a:br>
+              <a:rPr lang="es-419" dirty="0"/>
+            </a:br>
+            <a:endParaRPr lang="es-419" dirty="0"/>
+          </a:p>
+          <a:p>
+            <a:r>
+              <a:rPr lang="es-419" dirty="0"/>
+              <a:t>✅ </a:t>
+            </a:r>
+            <a:r>
+              <a:rPr lang="es-419" b="1" dirty="0" err="1"/>
+              <a:t>Drools</a:t>
+            </a:r>
+            <a:r>
+              <a:rPr lang="es-419" dirty="0"/>
+              <a:t> (Open </a:t>
+            </a:r>
+            <a:r>
+              <a:rPr lang="es-419" dirty="0" err="1"/>
+              <a:t>Source</a:t>
+            </a:r>
+            <a:r>
+              <a:rPr lang="es-419" dirty="0"/>
+              <a:t>, de Red </a:t>
+            </a:r>
+            <a:r>
+              <a:rPr lang="es-419" dirty="0" err="1"/>
+              <a:t>Hat</a:t>
+            </a:r>
+            <a:r>
+              <a:rPr lang="es-419" dirty="0"/>
+              <a:t>)</a:t>
+            </a:r>
+            <a:br>
+              <a:rPr lang="es-419" dirty="0"/>
+            </a:br>
+            <a:endParaRPr lang="es-419" dirty="0"/>
+          </a:p>
+          <a:p>
+            <a:r>
+              <a:rPr lang="es-419" dirty="0"/>
+              <a:t>✅ </a:t>
+            </a:r>
+            <a:r>
+              <a:rPr lang="es-419" b="1" dirty="0" err="1"/>
+              <a:t>Camunda</a:t>
+            </a:r>
+            <a:r>
+              <a:rPr lang="es-419" dirty="0"/>
+              <a:t> (BPM con soporte para reglas)</a:t>
+            </a:r>
+            <a:br>
+              <a:rPr lang="es-419" dirty="0"/>
+            </a:br>
+            <a:endParaRPr lang="es-419" dirty="0"/>
+          </a:p>
+          <a:p>
+            <a:r>
+              <a:rPr lang="es-419" dirty="0"/>
+              <a:t>✅ </a:t>
+            </a:r>
+            <a:r>
+              <a:rPr lang="es-419" b="1" dirty="0" err="1"/>
+              <a:t>Decision</a:t>
+            </a:r>
+            <a:r>
+              <a:rPr lang="es-419" b="1" dirty="0"/>
+              <a:t> </a:t>
+            </a:r>
+            <a:r>
+              <a:rPr lang="es-419" b="1" dirty="0" err="1"/>
+              <a:t>Model</a:t>
+            </a:r>
+            <a:r>
+              <a:rPr lang="es-419" b="1" dirty="0"/>
+              <a:t> and </a:t>
+            </a:r>
+            <a:r>
+              <a:rPr lang="es-419" b="1" dirty="0" err="1"/>
+              <a:t>Notation</a:t>
+            </a:r>
+            <a:r>
+              <a:rPr lang="es-419" b="1" dirty="0"/>
+              <a:t> (DMN)</a:t>
+            </a:r>
+            <a:br>
+              <a:rPr lang="es-419" dirty="0"/>
+            </a:br>
+            <a:endParaRPr lang="es-419" dirty="0"/>
+          </a:p>
+          <a:p>
+            <a:r>
+              <a:rPr lang="es-419" dirty="0"/>
+              <a:t>✅ </a:t>
+            </a:r>
+            <a:r>
+              <a:rPr lang="es-419" b="1" dirty="0"/>
+              <a:t>Rule </a:t>
+            </a:r>
+            <a:r>
+              <a:rPr lang="es-419" b="1" dirty="0" err="1"/>
+              <a:t>Engines</a:t>
+            </a:r>
+            <a:r>
+              <a:rPr lang="es-419" b="1" dirty="0"/>
+              <a:t> basados en JSON o YAML</a:t>
+            </a:r>
+            <a:r>
+              <a:rPr lang="es-419" dirty="0"/>
+              <a:t> (para configuraciones dinámicas)</a:t>
+            </a:r>
+          </a:p>
+        </p:txBody>
+      </p:sp>
+    </p:spTree>
+    <p:extLst>
+      <p:ext uri="{BB962C8B-B14F-4D97-AF65-F5344CB8AC3E}">
+        <p14:creationId xmlns:p14="http://schemas.microsoft.com/office/powerpoint/2010/main" val="3797430530"/>
+      </p:ext>
+    </p:extLst>
+  </p:cSld>
+  <p:clrMapOvr>
+    <a:masterClrMapping/>
+  </p:clrMapOvr>
+</p:sld>
+</file>
+
+<file path=ppt/slides/slide44.xml><?xml version="1.0" encoding="utf-8"?>
+<p:sld xmlns:a="http://schemas.openxmlformats.org/drawingml/2006/main" xmlns:r="http://schemas.openxmlformats.org/officeDocument/2006/relationships" xmlns:p="http://schemas.openxmlformats.org/presentationml/2006/main">
+  <p:cSld>
+    <p:spTree>
+      <p:nvGrpSpPr>
+        <p:cNvPr id="1" name=""/>
+        <p:cNvGrpSpPr/>
+        <p:nvPr/>
+      </p:nvGrpSpPr>
+      <p:grpSpPr>
+        <a:xfrm>
+          <a:off x="0" y="0"/>
+          <a:ext cx="0" cy="0"/>
+          <a:chOff x="0" y="0"/>
+          <a:chExt cx="0" cy="0"/>
+        </a:xfrm>
+      </p:grpSpPr>
+      <p:sp>
+        <p:nvSpPr>
+          <p:cNvPr id="2" name="CuadroTexto 1">
+            <a:extLst>
+              <a:ext uri="{FF2B5EF4-FFF2-40B4-BE49-F238E27FC236}">
                 <a16:creationId xmlns:a16="http://schemas.microsoft.com/office/drawing/2014/main" id="{12AC01C5-812B-4C0B-B2CD-FF7DD755D339}"/>
               </a:ext>
             </a:extLst>
@@ -20119,7 +22717,7 @@
 </p:sld>
 </file>
 
-<file path=ppt/slides/slide41.xml><?xml version="1.0" encoding="utf-8"?>
+<file path=ppt/slides/slide45.xml><?xml version="1.0" encoding="utf-8"?>
 <p:sld xmlns:a="http://schemas.openxmlformats.org/drawingml/2006/main" xmlns:r="http://schemas.openxmlformats.org/officeDocument/2006/relationships" xmlns:p="http://schemas.openxmlformats.org/presentationml/2006/main">
   <p:cSld>
     <p:spTree>
@@ -20636,7 +23234,7 @@
 </p:sld>
 </file>
 
-<file path=ppt/slides/slide42.xml><?xml version="1.0" encoding="utf-8"?>
+<file path=ppt/slides/slide46.xml><?xml version="1.0" encoding="utf-8"?>
 <p:sld xmlns:a="http://schemas.openxmlformats.org/drawingml/2006/main" xmlns:r="http://schemas.openxmlformats.org/officeDocument/2006/relationships" xmlns:p="http://schemas.openxmlformats.org/presentationml/2006/main">
   <p:cSld>
     <p:spTree>
@@ -20786,7 +23384,7 @@
 </p:sld>
 </file>
 
-<file path=ppt/slides/slide43.xml><?xml version="1.0" encoding="utf-8"?>
+<file path=ppt/slides/slide47.xml><?xml version="1.0" encoding="utf-8"?>
 <p:sld xmlns:a="http://schemas.openxmlformats.org/drawingml/2006/main" xmlns:r="http://schemas.openxmlformats.org/officeDocument/2006/relationships" xmlns:p="http://schemas.openxmlformats.org/presentationml/2006/main">
   <p:cSld>
     <p:spTree>
@@ -21103,7 +23701,7 @@
 </p:sld>
 </file>
 
-<file path=ppt/slides/slide44.xml><?xml version="1.0" encoding="utf-8"?>
+<file path=ppt/slides/slide48.xml><?xml version="1.0" encoding="utf-8"?>
 <p:sld xmlns:a="http://schemas.openxmlformats.org/drawingml/2006/main" xmlns:r="http://schemas.openxmlformats.org/officeDocument/2006/relationships" xmlns:p="http://schemas.openxmlformats.org/presentationml/2006/main">
   <p:cSld>
     <p:spTree>
@@ -21268,7 +23866,7 @@
 </p:sld>
 </file>
 
-<file path=ppt/slides/slide45.xml><?xml version="1.0" encoding="utf-8"?>
+<file path=ppt/slides/slide49.xml><?xml version="1.0" encoding="utf-8"?>
 <p:sld xmlns:a="http://schemas.openxmlformats.org/drawingml/2006/main" xmlns:r="http://schemas.openxmlformats.org/officeDocument/2006/relationships" xmlns:p="http://schemas.openxmlformats.org/presentationml/2006/main">
   <p:cSld>
     <p:spTree>
@@ -21394,7 +23992,278 @@
 </p:sld>
 </file>
 
-<file path=ppt/slides/slide46.xml><?xml version="1.0" encoding="utf-8"?>
+<file path=ppt/slides/slide5.xml><?xml version="1.0" encoding="utf-8"?>
+<p:sld xmlns:a="http://schemas.openxmlformats.org/drawingml/2006/main" xmlns:r="http://schemas.openxmlformats.org/officeDocument/2006/relationships" xmlns:p="http://schemas.openxmlformats.org/presentationml/2006/main">
+  <p:cSld>
+    <p:spTree>
+      <p:nvGrpSpPr>
+        <p:cNvPr id="1" name=""/>
+        <p:cNvGrpSpPr/>
+        <p:nvPr/>
+      </p:nvGrpSpPr>
+      <p:grpSpPr>
+        <a:xfrm>
+          <a:off x="0" y="0"/>
+          <a:ext cx="0" cy="0"/>
+          <a:chOff x="0" y="0"/>
+          <a:chExt cx="0" cy="0"/>
+        </a:xfrm>
+      </p:grpSpPr>
+      <p:sp>
+        <p:nvSpPr>
+          <p:cNvPr id="2" name="CuadroTexto 1">
+            <a:extLst>
+              <a:ext uri="{FF2B5EF4-FFF2-40B4-BE49-F238E27FC236}">
+                <a16:creationId xmlns:a16="http://schemas.microsoft.com/office/drawing/2014/main" id="{9FD6A744-D563-4CAC-86CF-0EE23E908603}"/>
+              </a:ext>
+            </a:extLst>
+          </p:cNvPr>
+          <p:cNvSpPr txBox="1"/>
+          <p:nvPr/>
+        </p:nvSpPr>
+        <p:spPr>
+          <a:xfrm>
+            <a:off x="557111" y="661012"/>
+            <a:ext cx="2190023" cy="584775"/>
+          </a:xfrm>
+          <a:prstGeom prst="rect">
+            <a:avLst/>
+          </a:prstGeom>
+          <a:noFill/>
+        </p:spPr>
+        <p:txBody>
+          <a:bodyPr wrap="none" rtlCol="0">
+            <a:spAutoFit/>
+          </a:bodyPr>
+          <a:lstStyle/>
+          <a:p>
+            <a:r>
+              <a:rPr lang="es-ES" sz="3200" dirty="0"/>
+              <a:t>Qué es DDD</a:t>
+            </a:r>
+            <a:endParaRPr lang="es-419" sz="3200" dirty="0"/>
+          </a:p>
+        </p:txBody>
+      </p:sp>
+      <p:sp>
+        <p:nvSpPr>
+          <p:cNvPr id="5" name="CuadroTexto 4">
+            <a:extLst>
+              <a:ext uri="{FF2B5EF4-FFF2-40B4-BE49-F238E27FC236}">
+                <a16:creationId xmlns:a16="http://schemas.microsoft.com/office/drawing/2014/main" id="{9AFA704B-5910-4162-A003-95833254BEA9}"/>
+              </a:ext>
+            </a:extLst>
+          </p:cNvPr>
+          <p:cNvSpPr txBox="1"/>
+          <p:nvPr/>
+        </p:nvSpPr>
+        <p:spPr>
+          <a:xfrm>
+            <a:off x="3514993" y="1740163"/>
+            <a:ext cx="5365215" cy="3970318"/>
+          </a:xfrm>
+          <a:prstGeom prst="rect">
+            <a:avLst/>
+          </a:prstGeom>
+          <a:noFill/>
+        </p:spPr>
+        <p:txBody>
+          <a:bodyPr wrap="square">
+            <a:spAutoFit/>
+          </a:bodyPr>
+          <a:lstStyle/>
+          <a:p>
+            <a:r>
+              <a:rPr lang="es-ES" dirty="0"/>
+              <a:t>Es un término acuñado por Eric Evans en su libro, publicado en 2003. </a:t>
+            </a:r>
+          </a:p>
+          <a:p>
+            <a:endParaRPr lang="es-ES" dirty="0"/>
+          </a:p>
+          <a:p>
+            <a:r>
+              <a:rPr lang="es-ES" dirty="0"/>
+              <a:t>Se trata de un enfoque centrado en el dominio y un conjunto de patrones, principios y prácticas.</a:t>
+            </a:r>
+          </a:p>
+          <a:p>
+            <a:endParaRPr lang="es-ES" dirty="0"/>
+          </a:p>
+          <a:p>
+            <a:r>
+              <a:rPr lang="es-ES" dirty="0"/>
+              <a:t>El DDD es muy útil para construir arquitecturas de microservicios, mallas de datos, topologías de equipo y monolitos modulares.</a:t>
+            </a:r>
+          </a:p>
+          <a:p>
+            <a:endParaRPr lang="es-ES" dirty="0"/>
+          </a:p>
+          <a:p>
+            <a:r>
+              <a:rPr lang="es-ES" dirty="0"/>
+              <a:t>Recibió mucha atención después de que la arquitectura de microservicios se popularizara como estilo arquitectónico tras la era de los servicios web basados ​​en SOAP.</a:t>
+            </a:r>
+            <a:endParaRPr lang="es-419" dirty="0"/>
+          </a:p>
+        </p:txBody>
+      </p:sp>
+      <p:pic>
+        <p:nvPicPr>
+          <p:cNvPr id="7" name="Imagen 6">
+            <a:extLst>
+              <a:ext uri="{FF2B5EF4-FFF2-40B4-BE49-F238E27FC236}">
+                <a16:creationId xmlns:a16="http://schemas.microsoft.com/office/drawing/2014/main" id="{1D981D38-A1BB-4B85-9A65-1E3FC906D6E3}"/>
+              </a:ext>
+            </a:extLst>
+          </p:cNvPr>
+          <p:cNvPicPr>
+            <a:picLocks noChangeAspect="1"/>
+          </p:cNvPicPr>
+          <p:nvPr/>
+        </p:nvPicPr>
+        <p:blipFill>
+          <a:blip r:embed="rId2"/>
+          <a:stretch>
+            <a:fillRect/>
+          </a:stretch>
+        </p:blipFill>
+        <p:spPr>
+          <a:xfrm>
+            <a:off x="362219" y="2633031"/>
+            <a:ext cx="2579805" cy="1395201"/>
+          </a:xfrm>
+          <a:prstGeom prst="rect">
+            <a:avLst/>
+          </a:prstGeom>
+        </p:spPr>
+      </p:pic>
+      <p:pic>
+        <p:nvPicPr>
+          <p:cNvPr id="2050" name="Picture 2" descr="DDD Resources - Domain Language">
+            <a:extLst>
+              <a:ext uri="{FF2B5EF4-FFF2-40B4-BE49-F238E27FC236}">
+                <a16:creationId xmlns:a16="http://schemas.microsoft.com/office/drawing/2014/main" id="{E2977C15-F100-4C36-9503-C9B1604C74B6}"/>
+              </a:ext>
+            </a:extLst>
+          </p:cNvPr>
+          <p:cNvPicPr>
+            <a:picLocks noChangeAspect="1" noChangeArrowheads="1"/>
+          </p:cNvPicPr>
+          <p:nvPr/>
+        </p:nvPicPr>
+        <p:blipFill>
+          <a:blip r:embed="rId3">
+            <a:extLst>
+              <a:ext uri="{28A0092B-C50C-407E-A947-70E740481C1C}">
+                <a14:useLocalDpi xmlns:a14="http://schemas.microsoft.com/office/drawing/2010/main" val="0"/>
+              </a:ext>
+            </a:extLst>
+          </a:blip>
+          <a:srcRect/>
+          <a:stretch>
+            <a:fillRect/>
+          </a:stretch>
+        </p:blipFill>
+        <p:spPr bwMode="auto">
+          <a:xfrm>
+            <a:off x="9662497" y="2238339"/>
+            <a:ext cx="1703975" cy="2184583"/>
+          </a:xfrm>
+          <a:prstGeom prst="rect">
+            <a:avLst/>
+          </a:prstGeom>
+          <a:noFill/>
+          <a:extLst>
+            <a:ext uri="{909E8E84-426E-40DD-AFC4-6F175D3DCCD1}">
+              <a14:hiddenFill xmlns:a14="http://schemas.microsoft.com/office/drawing/2010/main">
+                <a:solidFill>
+                  <a:srgbClr val="FFFFFF"/>
+                </a:solidFill>
+              </a14:hiddenFill>
+            </a:ext>
+          </a:extLst>
+        </p:spPr>
+      </p:pic>
+      <p:sp>
+        <p:nvSpPr>
+          <p:cNvPr id="10" name="CuadroTexto 9">
+            <a:extLst>
+              <a:ext uri="{FF2B5EF4-FFF2-40B4-BE49-F238E27FC236}">
+                <a16:creationId xmlns:a16="http://schemas.microsoft.com/office/drawing/2014/main" id="{BFABEC77-6ADD-45FD-8801-B080070B70AB}"/>
+              </a:ext>
+            </a:extLst>
+          </p:cNvPr>
+          <p:cNvSpPr txBox="1"/>
+          <p:nvPr/>
+        </p:nvSpPr>
+        <p:spPr>
+          <a:xfrm>
+            <a:off x="5020937" y="5710481"/>
+            <a:ext cx="5742543" cy="523220"/>
+          </a:xfrm>
+          <a:prstGeom prst="rect">
+            <a:avLst/>
+          </a:prstGeom>
+          <a:noFill/>
+        </p:spPr>
+        <p:txBody>
+          <a:bodyPr wrap="square">
+            <a:spAutoFit/>
+          </a:bodyPr>
+          <a:lstStyle/>
+          <a:p>
+            <a:r>
+              <a:rPr lang="en-US" sz="1400" b="0" i="0" u="none" strike="noStrike" baseline="0" dirty="0">
+                <a:latin typeface="LinLibertine"/>
+              </a:rPr>
+              <a:t>Fuente: Domain-Driven Design And Microservices Explained with Examples. </a:t>
+            </a:r>
+          </a:p>
+          <a:p>
+            <a:pPr algn="r"/>
+            <a:r>
+              <a:rPr lang="es-419" sz="1400" b="0" i="0" u="none" strike="noStrike" baseline="0" dirty="0" err="1">
+                <a:latin typeface="LinLibertine"/>
+              </a:rPr>
+              <a:t>Sandeep</a:t>
+            </a:r>
+            <a:r>
+              <a:rPr lang="es-419" sz="1400" b="0" i="0" u="none" strike="noStrike" baseline="0" dirty="0">
+                <a:latin typeface="LinLibertine"/>
+              </a:rPr>
+              <a:t> </a:t>
+            </a:r>
+            <a:r>
+              <a:rPr lang="es-419" sz="1400" b="0" i="0" u="none" strike="noStrike" baseline="0" dirty="0" err="1">
+                <a:latin typeface="LinLibertine"/>
+              </a:rPr>
+              <a:t>Jagtap</a:t>
+            </a:r>
+            <a:r>
+              <a:rPr lang="es-419" sz="1400" b="0" i="0" u="none" strike="noStrike" baseline="0" dirty="0">
+                <a:latin typeface="LinLibertine"/>
+              </a:rPr>
+              <a:t>. 2023</a:t>
+            </a:r>
+            <a:endParaRPr lang="es-419" sz="1400" dirty="0"/>
+          </a:p>
+        </p:txBody>
+      </p:sp>
+    </p:spTree>
+    <p:extLst>
+      <p:ext uri="{BB962C8B-B14F-4D97-AF65-F5344CB8AC3E}">
+        <p14:creationId xmlns:p14="http://schemas.microsoft.com/office/powerpoint/2010/main" val="4278008779"/>
+      </p:ext>
+    </p:extLst>
+  </p:cSld>
+  <p:clrMapOvr>
+    <a:masterClrMapping/>
+  </p:clrMapOvr>
+</p:sld>
+</file>
+
+<file path=ppt/slides/slide50.xml><?xml version="1.0" encoding="utf-8"?>
 <p:sld xmlns:a="http://schemas.openxmlformats.org/drawingml/2006/main" xmlns:r="http://schemas.openxmlformats.org/officeDocument/2006/relationships" xmlns:p="http://schemas.openxmlformats.org/presentationml/2006/main">
   <p:cSld>
     <p:spTree>
@@ -22792,7 +25661,7 @@
 </p:sld>
 </file>
 
-<file path=ppt/slides/slide47.xml><?xml version="1.0" encoding="utf-8"?>
+<file path=ppt/slides/slide51.xml><?xml version="1.0" encoding="utf-8"?>
 <p:sld xmlns:a="http://schemas.openxmlformats.org/drawingml/2006/main" xmlns:r="http://schemas.openxmlformats.org/officeDocument/2006/relationships" xmlns:p="http://schemas.openxmlformats.org/presentationml/2006/main">
   <p:cSld>
     <p:spTree>
@@ -23079,7 +25948,7 @@
 </p:sld>
 </file>
 
-<file path=ppt/slides/slide48.xml><?xml version="1.0" encoding="utf-8"?>
+<file path=ppt/slides/slide52.xml><?xml version="1.0" encoding="utf-8"?>
 <p:sld xmlns:a="http://schemas.openxmlformats.org/drawingml/2006/main" xmlns:r="http://schemas.openxmlformats.org/officeDocument/2006/relationships" xmlns:p="http://schemas.openxmlformats.org/presentationml/2006/main">
   <p:cSld>
     <p:spTree>
@@ -23252,7 +26121,7 @@
 </p:sld>
 </file>
 
-<file path=ppt/slides/slide5.xml><?xml version="1.0" encoding="utf-8"?>
+<file path=ppt/slides/slide53.xml><?xml version="1.0" encoding="utf-8"?>
 <p:sld xmlns:a="http://schemas.openxmlformats.org/drawingml/2006/main" xmlns:r="http://schemas.openxmlformats.org/officeDocument/2006/relationships" xmlns:p="http://schemas.openxmlformats.org/presentationml/2006/main">
   <p:cSld>
     <p:spTree>
@@ -23271,10 +26140,10 @@
       </p:grpSpPr>
       <p:sp>
         <p:nvSpPr>
-          <p:cNvPr id="2" name="CuadroTexto 1">
+          <p:cNvPr id="4" name="CuadroTexto 3">
             <a:extLst>
               <a:ext uri="{FF2B5EF4-FFF2-40B4-BE49-F238E27FC236}">
-                <a16:creationId xmlns:a16="http://schemas.microsoft.com/office/drawing/2014/main" id="{9FD6A744-D563-4CAC-86CF-0EE23E908603}"/>
+                <a16:creationId xmlns:a16="http://schemas.microsoft.com/office/drawing/2014/main" id="{3B93B27B-A88B-4D6F-9ED4-9E1A1F08BCB4}"/>
               </a:ext>
             </a:extLst>
           </p:cNvPr>
@@ -23284,7 +26153,7 @@
         <p:spPr>
           <a:xfrm>
             <a:off x="557111" y="661012"/>
-            <a:ext cx="2190023" cy="584775"/>
+            <a:ext cx="9115699" cy="584775"/>
           </a:xfrm>
           <a:prstGeom prst="rect">
             <a:avLst/>
@@ -23292,14 +26161,14 @@
           <a:noFill/>
         </p:spPr>
         <p:txBody>
-          <a:bodyPr wrap="none" rtlCol="0">
+          <a:bodyPr wrap="square" rtlCol="0">
             <a:spAutoFit/>
           </a:bodyPr>
           <a:lstStyle/>
           <a:p>
             <a:r>
               <a:rPr lang="es-ES" sz="3200" dirty="0"/>
-              <a:t>Qué es DDD</a:t>
+              <a:t>Referencias</a:t>
             </a:r>
             <a:endParaRPr lang="es-419" sz="3200" dirty="0"/>
           </a:p>
@@ -23307,10 +26176,10 @@
       </p:sp>
       <p:sp>
         <p:nvSpPr>
-          <p:cNvPr id="5" name="CuadroTexto 4">
+          <p:cNvPr id="6" name="CuadroTexto 5">
             <a:extLst>
               <a:ext uri="{FF2B5EF4-FFF2-40B4-BE49-F238E27FC236}">
-                <a16:creationId xmlns:a16="http://schemas.microsoft.com/office/drawing/2014/main" id="{9AFA704B-5910-4162-A003-95833254BEA9}"/>
+                <a16:creationId xmlns:a16="http://schemas.microsoft.com/office/drawing/2014/main" id="{82E1F28B-AD52-46D2-91AA-E1E5F0983C88}"/>
               </a:ext>
             </a:extLst>
           </p:cNvPr>
@@ -23319,8 +26188,8 @@
         </p:nvSpPr>
         <p:spPr>
           <a:xfrm>
-            <a:off x="3514993" y="1740163"/>
-            <a:ext cx="5365215" cy="3970318"/>
+            <a:off x="1251284" y="1884766"/>
+            <a:ext cx="9360569" cy="2862322"/>
           </a:xfrm>
           <a:prstGeom prst="rect">
             <a:avLst/>
@@ -23335,185 +26204,144 @@
           <a:p>
             <a:r>
               <a:rPr lang="es-ES" dirty="0"/>
-              <a:t>Es un término acuñado por Eric Evans en su libro, publicado en 2003. </a:t>
-            </a:r>
-          </a:p>
-          <a:p>
-            <a:endParaRPr lang="es-ES" dirty="0"/>
+              <a:t>📚</a:t>
+            </a:r>
+            <a:r>
+              <a:rPr lang="en-US" dirty="0"/>
+              <a:t>Evans, Eric. Domain-driven design: Tackling complexity in the heart of software. Addison-Wesley Professional. (2004). </a:t>
+            </a:r>
+          </a:p>
+          <a:p>
+            <a:endParaRPr lang="es-419" dirty="0"/>
           </a:p>
           <a:p>
             <a:r>
               <a:rPr lang="es-ES" dirty="0"/>
-              <a:t>Se trata de un enfoque centrado en el dominio y un conjunto de patrones, principios y prácticas.</a:t>
-            </a:r>
-          </a:p>
-          <a:p>
-            <a:endParaRPr lang="es-ES" dirty="0"/>
+              <a:t>📚 </a:t>
+            </a:r>
+            <a:r>
+              <a:rPr lang="es-419" dirty="0" err="1"/>
+              <a:t>Annegret</a:t>
+            </a:r>
+            <a:r>
+              <a:rPr lang="es-419" dirty="0"/>
+              <a:t> </a:t>
+            </a:r>
+            <a:r>
+              <a:rPr lang="es-419" dirty="0" err="1"/>
+              <a:t>Junker</a:t>
+            </a:r>
+            <a:r>
+              <a:rPr lang="es-419" dirty="0"/>
+              <a:t>. DDD </a:t>
+            </a:r>
+            <a:r>
+              <a:rPr lang="es-419" dirty="0" err="1"/>
+              <a:t>Toolbox</a:t>
+            </a:r>
+            <a:r>
+              <a:rPr lang="es-419" dirty="0"/>
+              <a:t>. </a:t>
+            </a:r>
+            <a:r>
+              <a:rPr lang="es-419" dirty="0" err="1"/>
+              <a:t>Bpb</a:t>
+            </a:r>
+            <a:r>
+              <a:rPr lang="es-419" dirty="0"/>
+              <a:t>. 2026</a:t>
+            </a:r>
+          </a:p>
+          <a:p>
+            <a:endParaRPr lang="es-419" dirty="0"/>
           </a:p>
           <a:p>
             <a:r>
               <a:rPr lang="es-ES" dirty="0"/>
-              <a:t>El DDD es muy útil para construir arquitecturas de microservicios, mallas de datos, topologías de equipo y monolitos modulares.</a:t>
-            </a:r>
-          </a:p>
-          <a:p>
-            <a:endParaRPr lang="es-ES" dirty="0"/>
+              <a:t>📚 </a:t>
+            </a:r>
+            <a:r>
+              <a:rPr lang="es-419" dirty="0"/>
+              <a:t>Percival, Harry W.  &amp; Gregory, Bob. </a:t>
+            </a:r>
+            <a:r>
+              <a:rPr lang="es-419" dirty="0" err="1"/>
+              <a:t>Architeture</a:t>
+            </a:r>
+            <a:r>
+              <a:rPr lang="es-419" dirty="0"/>
+              <a:t> </a:t>
+            </a:r>
+            <a:r>
+              <a:rPr lang="es-419" dirty="0" err="1"/>
+              <a:t>Patterns</a:t>
+            </a:r>
+            <a:r>
+              <a:rPr lang="es-419" dirty="0"/>
+              <a:t> </a:t>
+            </a:r>
+            <a:r>
+              <a:rPr lang="es-419" dirty="0" err="1"/>
+              <a:t>wih</a:t>
+            </a:r>
+            <a:r>
+              <a:rPr lang="es-419" dirty="0"/>
+              <a:t> Python. O´Reilly.  2020</a:t>
+            </a:r>
+            <a:r>
+              <a:rPr lang="es-419" sz="1800" dirty="0"/>
+              <a:t> </a:t>
+            </a:r>
+          </a:p>
+          <a:p>
+            <a:pPr marL="285750" indent="-285750">
+              <a:buBlip>
+                <a:blip r:embed="rId2">
+                  <a:extLst>
+                    <a:ext uri="{837473B0-CC2E-450A-ABE3-18F120FF3D39}">
+                      <a1611:picAttrSrcUrl xmlns:a1611="http://schemas.microsoft.com/office/drawing/2016/11/main" r:id="rId3"/>
+                    </a:ext>
+                  </a:extLst>
+                </a:blip>
+              </a:buBlip>
+            </a:pPr>
+            <a:endParaRPr lang="es-419" dirty="0">
+              <a:hlinkClick r:id="rId4"/>
+            </a:endParaRPr>
           </a:p>
           <a:p>
             <a:r>
               <a:rPr lang="es-ES" dirty="0"/>
-              <a:t>Recibió mucha atención después de que la arquitectura de microservicios se popularizara como estilo arquitectónico tras la era de los servicios web basados ​​en SOAP.</a:t>
+              <a:t>☁️ </a:t>
+            </a:r>
+            <a:r>
+              <a:rPr lang="es-419" sz="1800" dirty="0">
+                <a:hlinkClick r:id="rId4"/>
+              </a:rPr>
+              <a:t>https://kevin-van-ingen.medium.com/</a:t>
+            </a:r>
+            <a:endParaRPr lang="es-419" sz="1800" dirty="0"/>
+          </a:p>
+          <a:p>
+            <a:endParaRPr lang="es-419" sz="1800" dirty="0"/>
+          </a:p>
+          <a:p>
+            <a:r>
+              <a:rPr lang="es-ES" dirty="0"/>
+              <a:t> ☁️ </a:t>
+            </a:r>
+            <a:r>
+              <a:rPr lang="es-419" sz="1800" dirty="0"/>
+              <a:t>https://github.com/ddd-crew/</a:t>
             </a:r>
             <a:endParaRPr lang="es-419" dirty="0"/>
-          </a:p>
-        </p:txBody>
-      </p:sp>
-      <p:pic>
-        <p:nvPicPr>
-          <p:cNvPr id="7" name="Imagen 6">
-            <a:extLst>
-              <a:ext uri="{FF2B5EF4-FFF2-40B4-BE49-F238E27FC236}">
-                <a16:creationId xmlns:a16="http://schemas.microsoft.com/office/drawing/2014/main" id="{1D981D38-A1BB-4B85-9A65-1E3FC906D6E3}"/>
-              </a:ext>
-            </a:extLst>
-          </p:cNvPr>
-          <p:cNvPicPr>
-            <a:picLocks noChangeAspect="1"/>
-          </p:cNvPicPr>
-          <p:nvPr/>
-        </p:nvPicPr>
-        <p:blipFill>
-          <a:blip r:embed="rId2"/>
-          <a:stretch>
-            <a:fillRect/>
-          </a:stretch>
-        </p:blipFill>
-        <p:spPr>
-          <a:xfrm>
-            <a:off x="362219" y="2633031"/>
-            <a:ext cx="2579805" cy="1395201"/>
-          </a:xfrm>
-          <a:prstGeom prst="rect">
-            <a:avLst/>
-          </a:prstGeom>
-        </p:spPr>
-      </p:pic>
-      <p:pic>
-        <p:nvPicPr>
-          <p:cNvPr id="2050" name="Picture 2" descr="DDD Resources - Domain Language">
-            <a:extLst>
-              <a:ext uri="{FF2B5EF4-FFF2-40B4-BE49-F238E27FC236}">
-                <a16:creationId xmlns:a16="http://schemas.microsoft.com/office/drawing/2014/main" id="{E2977C15-F100-4C36-9503-C9B1604C74B6}"/>
-              </a:ext>
-            </a:extLst>
-          </p:cNvPr>
-          <p:cNvPicPr>
-            <a:picLocks noChangeAspect="1" noChangeArrowheads="1"/>
-          </p:cNvPicPr>
-          <p:nvPr/>
-        </p:nvPicPr>
-        <p:blipFill>
-          <a:blip r:embed="rId3">
-            <a:extLst>
-              <a:ext uri="{28A0092B-C50C-407E-A947-70E740481C1C}">
-                <a14:useLocalDpi xmlns:a14="http://schemas.microsoft.com/office/drawing/2010/main" val="0"/>
-              </a:ext>
-            </a:extLst>
-          </a:blip>
-          <a:srcRect/>
-          <a:stretch>
-            <a:fillRect/>
-          </a:stretch>
-        </p:blipFill>
-        <p:spPr bwMode="auto">
-          <a:xfrm>
-            <a:off x="9662497" y="2238339"/>
-            <a:ext cx="1703975" cy="2184583"/>
-          </a:xfrm>
-          <a:prstGeom prst="rect">
-            <a:avLst/>
-          </a:prstGeom>
-          <a:noFill/>
-          <a:extLst>
-            <a:ext uri="{909E8E84-426E-40DD-AFC4-6F175D3DCCD1}">
-              <a14:hiddenFill xmlns:a14="http://schemas.microsoft.com/office/drawing/2010/main">
-                <a:solidFill>
-                  <a:srgbClr val="FFFFFF"/>
-                </a:solidFill>
-              </a14:hiddenFill>
-            </a:ext>
-          </a:extLst>
-        </p:spPr>
-      </p:pic>
-      <p:sp>
-        <p:nvSpPr>
-          <p:cNvPr id="10" name="CuadroTexto 9">
-            <a:extLst>
-              <a:ext uri="{FF2B5EF4-FFF2-40B4-BE49-F238E27FC236}">
-                <a16:creationId xmlns:a16="http://schemas.microsoft.com/office/drawing/2014/main" id="{BFABEC77-6ADD-45FD-8801-B080070B70AB}"/>
-              </a:ext>
-            </a:extLst>
-          </p:cNvPr>
-          <p:cNvSpPr txBox="1"/>
-          <p:nvPr/>
-        </p:nvSpPr>
-        <p:spPr>
-          <a:xfrm>
-            <a:off x="5020937" y="5710481"/>
-            <a:ext cx="5742543" cy="523220"/>
-          </a:xfrm>
-          <a:prstGeom prst="rect">
-            <a:avLst/>
-          </a:prstGeom>
-          <a:noFill/>
-        </p:spPr>
-        <p:txBody>
-          <a:bodyPr wrap="square">
-            <a:spAutoFit/>
-          </a:bodyPr>
-          <a:lstStyle/>
-          <a:p>
-            <a:r>
-              <a:rPr lang="en-US" sz="1400" b="0" i="0" u="none" strike="noStrike" baseline="0" dirty="0">
-                <a:latin typeface="LinLibertine"/>
-              </a:rPr>
-              <a:t>Fuente: Domain-Driven Design And Microservices Explained with Examples. </a:t>
-            </a:r>
-          </a:p>
-          <a:p>
-            <a:pPr algn="r"/>
-            <a:r>
-              <a:rPr lang="es-419" sz="1400" b="0" i="0" u="none" strike="noStrike" baseline="0" dirty="0" err="1">
-                <a:latin typeface="LinLibertine"/>
-              </a:rPr>
-              <a:t>Sandeep</a:t>
-            </a:r>
-            <a:r>
-              <a:rPr lang="es-419" sz="1400" b="0" i="0" u="none" strike="noStrike" baseline="0" dirty="0">
-                <a:latin typeface="LinLibertine"/>
-              </a:rPr>
-              <a:t> </a:t>
-            </a:r>
-            <a:r>
-              <a:rPr lang="es-419" sz="1400" b="0" i="0" u="none" strike="noStrike" baseline="0" dirty="0" err="1">
-                <a:latin typeface="LinLibertine"/>
-              </a:rPr>
-              <a:t>Jagtap</a:t>
-            </a:r>
-            <a:r>
-              <a:rPr lang="es-419" sz="1400" b="0" i="0" u="none" strike="noStrike" baseline="0" dirty="0">
-                <a:latin typeface="LinLibertine"/>
-              </a:rPr>
-              <a:t>. 2023</a:t>
-            </a:r>
-            <a:endParaRPr lang="es-419" sz="1400" dirty="0"/>
           </a:p>
         </p:txBody>
       </p:sp>
     </p:spTree>
     <p:extLst>
       <p:ext uri="{BB962C8B-B14F-4D97-AF65-F5344CB8AC3E}">
-        <p14:creationId xmlns:p14="http://schemas.microsoft.com/office/powerpoint/2010/main" val="4278008779"/>
+        <p14:creationId xmlns:p14="http://schemas.microsoft.com/office/powerpoint/2010/main" val="1489446861"/>
       </p:ext>
     </p:extLst>
   </p:cSld>
@@ -24894,6 +27722,301 @@
 </a:theme>
 </file>
 
+<file path=ppt/theme/theme2.xml><?xml version="1.0" encoding="utf-8"?>
+<a:theme xmlns:a="http://schemas.openxmlformats.org/drawingml/2006/main" name="Tema de Office">
+  <a:themeElements>
+    <a:clrScheme name="Office">
+      <a:dk1>
+        <a:sysClr val="windowText" lastClr="000000"/>
+      </a:dk1>
+      <a:lt1>
+        <a:sysClr val="window" lastClr="FFFFFF"/>
+      </a:lt1>
+      <a:dk2>
+        <a:srgbClr val="44546A"/>
+      </a:dk2>
+      <a:lt2>
+        <a:srgbClr val="E7E6E6"/>
+      </a:lt2>
+      <a:accent1>
+        <a:srgbClr val="4472C4"/>
+      </a:accent1>
+      <a:accent2>
+        <a:srgbClr val="ED7D31"/>
+      </a:accent2>
+      <a:accent3>
+        <a:srgbClr val="A5A5A5"/>
+      </a:accent3>
+      <a:accent4>
+        <a:srgbClr val="FFC000"/>
+      </a:accent4>
+      <a:accent5>
+        <a:srgbClr val="5B9BD5"/>
+      </a:accent5>
+      <a:accent6>
+        <a:srgbClr val="70AD47"/>
+      </a:accent6>
+      <a:hlink>
+        <a:srgbClr val="0563C1"/>
+      </a:hlink>
+      <a:folHlink>
+        <a:srgbClr val="954F72"/>
+      </a:folHlink>
+    </a:clrScheme>
+    <a:fontScheme name="Office">
+      <a:majorFont>
+        <a:latin typeface="Calibri Light" panose="020F0302020204030204"/>
+        <a:ea typeface=""/>
+        <a:cs typeface=""/>
+        <a:font script="Jpan" typeface="游ゴシック Light"/>
+        <a:font script="Hang" typeface="맑은 고딕"/>
+        <a:font script="Hans" typeface="等线 Light"/>
+        <a:font script="Hant" typeface="新細明體"/>
+        <a:font script="Arab" typeface="Times New Roman"/>
+        <a:font script="Hebr" typeface="Times New Roman"/>
+        <a:font script="Thai" typeface="Angsana New"/>
+        <a:font script="Ethi" typeface="Nyala"/>
+        <a:font script="Beng" typeface="Vrinda"/>
+        <a:font script="Gujr" typeface="Shruti"/>
+        <a:font script="Khmr" typeface="MoolBoran"/>
+        <a:font script="Knda" typeface="Tunga"/>
+        <a:font script="Guru" typeface="Raavi"/>
+        <a:font script="Cans" typeface="Euphemia"/>
+        <a:font script="Cher" typeface="Plantagenet Cherokee"/>
+        <a:font script="Yiii" typeface="Microsoft Yi Baiti"/>
+        <a:font script="Tibt" typeface="Microsoft Himalaya"/>
+        <a:font script="Thaa" typeface="MV Boli"/>
+        <a:font script="Deva" typeface="Mangal"/>
+        <a:font script="Telu" typeface="Gautami"/>
+        <a:font script="Taml" typeface="Latha"/>
+        <a:font script="Syrc" typeface="Estrangelo Edessa"/>
+        <a:font script="Orya" typeface="Kalinga"/>
+        <a:font script="Mlym" typeface="Kartika"/>
+        <a:font script="Laoo" typeface="DokChampa"/>
+        <a:font script="Sinh" typeface="Iskoola Pota"/>
+        <a:font script="Mong" typeface="Mongolian Baiti"/>
+        <a:font script="Viet" typeface="Times New Roman"/>
+        <a:font script="Uigh" typeface="Microsoft Uighur"/>
+        <a:font script="Geor" typeface="Sylfaen"/>
+        <a:font script="Armn" typeface="Arial"/>
+        <a:font script="Bugi" typeface="Leelawadee UI"/>
+        <a:font script="Bopo" typeface="Microsoft JhengHei"/>
+        <a:font script="Java" typeface="Javanese Text"/>
+        <a:font script="Lisu" typeface="Segoe UI"/>
+        <a:font script="Mymr" typeface="Myanmar Text"/>
+        <a:font script="Nkoo" typeface="Ebrima"/>
+        <a:font script="Olck" typeface="Nirmala UI"/>
+        <a:font script="Osma" typeface="Ebrima"/>
+        <a:font script="Phag" typeface="Phagspa"/>
+        <a:font script="Syrn" typeface="Estrangelo Edessa"/>
+        <a:font script="Syrj" typeface="Estrangelo Edessa"/>
+        <a:font script="Syre" typeface="Estrangelo Edessa"/>
+        <a:font script="Sora" typeface="Nirmala UI"/>
+        <a:font script="Tale" typeface="Microsoft Tai Le"/>
+        <a:font script="Talu" typeface="Microsoft New Tai Lue"/>
+        <a:font script="Tfng" typeface="Ebrima"/>
+      </a:majorFont>
+      <a:minorFont>
+        <a:latin typeface="Calibri" panose="020F0502020204030204"/>
+        <a:ea typeface=""/>
+        <a:cs typeface=""/>
+        <a:font script="Jpan" typeface="游ゴシック"/>
+        <a:font script="Hang" typeface="맑은 고딕"/>
+        <a:font script="Hans" typeface="等线"/>
+        <a:font script="Hant" typeface="新細明體"/>
+        <a:font script="Arab" typeface="Arial"/>
+        <a:font script="Hebr" typeface="Arial"/>
+        <a:font script="Thai" typeface="Cordia New"/>
+        <a:font script="Ethi" typeface="Nyala"/>
+        <a:font script="Beng" typeface="Vrinda"/>
+        <a:font script="Gujr" typeface="Shruti"/>
+        <a:font script="Khmr" typeface="DaunPenh"/>
+        <a:font script="Knda" typeface="Tunga"/>
+        <a:font script="Guru" typeface="Raavi"/>
+        <a:font script="Cans" typeface="Euphemia"/>
+        <a:font script="Cher" typeface="Plantagenet Cherokee"/>
+        <a:font script="Yiii" typeface="Microsoft Yi Baiti"/>
+        <a:font script="Tibt" typeface="Microsoft Himalaya"/>
+        <a:font script="Thaa" typeface="MV Boli"/>
+        <a:font script="Deva" typeface="Mangal"/>
+        <a:font script="Telu" typeface="Gautami"/>
+        <a:font script="Taml" typeface="Latha"/>
+        <a:font script="Syrc" typeface="Estrangelo Edessa"/>
+        <a:font script="Orya" typeface="Kalinga"/>
+        <a:font script="Mlym" typeface="Kartika"/>
+        <a:font script="Laoo" typeface="DokChampa"/>
+        <a:font script="Sinh" typeface="Iskoola Pota"/>
+        <a:font script="Mong" typeface="Mongolian Baiti"/>
+        <a:font script="Viet" typeface="Arial"/>
+        <a:font script="Uigh" typeface="Microsoft Uighur"/>
+        <a:font script="Geor" typeface="Sylfaen"/>
+        <a:font script="Armn" typeface="Arial"/>
+        <a:font script="Bugi" typeface="Leelawadee UI"/>
+        <a:font script="Bopo" typeface="Microsoft JhengHei"/>
+        <a:font script="Java" typeface="Javanese Text"/>
+        <a:font script="Lisu" typeface="Segoe UI"/>
+        <a:font script="Mymr" typeface="Myanmar Text"/>
+        <a:font script="Nkoo" typeface="Ebrima"/>
+        <a:font script="Olck" typeface="Nirmala UI"/>
+        <a:font script="Osma" typeface="Ebrima"/>
+        <a:font script="Phag" typeface="Phagspa"/>
+        <a:font script="Syrn" typeface="Estrangelo Edessa"/>
+        <a:font script="Syrj" typeface="Estrangelo Edessa"/>
+        <a:font script="Syre" typeface="Estrangelo Edessa"/>
+        <a:font script="Sora" typeface="Nirmala UI"/>
+        <a:font script="Tale" typeface="Microsoft Tai Le"/>
+        <a:font script="Talu" typeface="Microsoft New Tai Lue"/>
+        <a:font script="Tfng" typeface="Ebrima"/>
+      </a:minorFont>
+    </a:fontScheme>
+    <a:fmtScheme name="Office">
+      <a:fillStyleLst>
+        <a:solidFill>
+          <a:schemeClr val="phClr"/>
+        </a:solidFill>
+        <a:gradFill rotWithShape="1">
+          <a:gsLst>
+            <a:gs pos="0">
+              <a:schemeClr val="phClr">
+                <a:lumMod val="110000"/>
+                <a:satMod val="105000"/>
+                <a:tint val="67000"/>
+              </a:schemeClr>
+            </a:gs>
+            <a:gs pos="50000">
+              <a:schemeClr val="phClr">
+                <a:lumMod val="105000"/>
+                <a:satMod val="103000"/>
+                <a:tint val="73000"/>
+              </a:schemeClr>
+            </a:gs>
+            <a:gs pos="100000">
+              <a:schemeClr val="phClr">
+                <a:lumMod val="105000"/>
+                <a:satMod val="109000"/>
+                <a:tint val="81000"/>
+              </a:schemeClr>
+            </a:gs>
+          </a:gsLst>
+          <a:lin ang="5400000" scaled="0"/>
+        </a:gradFill>
+        <a:gradFill rotWithShape="1">
+          <a:gsLst>
+            <a:gs pos="0">
+              <a:schemeClr val="phClr">
+                <a:satMod val="103000"/>
+                <a:lumMod val="102000"/>
+                <a:tint val="94000"/>
+              </a:schemeClr>
+            </a:gs>
+            <a:gs pos="50000">
+              <a:schemeClr val="phClr">
+                <a:satMod val="110000"/>
+                <a:lumMod val="100000"/>
+                <a:shade val="100000"/>
+              </a:schemeClr>
+            </a:gs>
+            <a:gs pos="100000">
+              <a:schemeClr val="phClr">
+                <a:lumMod val="99000"/>
+                <a:satMod val="120000"/>
+                <a:shade val="78000"/>
+              </a:schemeClr>
+            </a:gs>
+          </a:gsLst>
+          <a:lin ang="5400000" scaled="0"/>
+        </a:gradFill>
+      </a:fillStyleLst>
+      <a:lnStyleLst>
+        <a:ln w="6350" cap="flat" cmpd="sng" algn="ctr">
+          <a:solidFill>
+            <a:schemeClr val="phClr"/>
+          </a:solidFill>
+          <a:prstDash val="solid"/>
+          <a:miter lim="800000"/>
+        </a:ln>
+        <a:ln w="12700" cap="flat" cmpd="sng" algn="ctr">
+          <a:solidFill>
+            <a:schemeClr val="phClr"/>
+          </a:solidFill>
+          <a:prstDash val="solid"/>
+          <a:miter lim="800000"/>
+        </a:ln>
+        <a:ln w="19050" cap="flat" cmpd="sng" algn="ctr">
+          <a:solidFill>
+            <a:schemeClr val="phClr"/>
+          </a:solidFill>
+          <a:prstDash val="solid"/>
+          <a:miter lim="800000"/>
+        </a:ln>
+      </a:lnStyleLst>
+      <a:effectStyleLst>
+        <a:effectStyle>
+          <a:effectLst/>
+        </a:effectStyle>
+        <a:effectStyle>
+          <a:effectLst/>
+        </a:effectStyle>
+        <a:effectStyle>
+          <a:effectLst>
+            <a:outerShdw blurRad="57150" dist="19050" dir="5400000" algn="ctr" rotWithShape="0">
+              <a:srgbClr val="000000">
+                <a:alpha val="63000"/>
+              </a:srgbClr>
+            </a:outerShdw>
+          </a:effectLst>
+        </a:effectStyle>
+      </a:effectStyleLst>
+      <a:bgFillStyleLst>
+        <a:solidFill>
+          <a:schemeClr val="phClr"/>
+        </a:solidFill>
+        <a:solidFill>
+          <a:schemeClr val="phClr">
+            <a:tint val="95000"/>
+            <a:satMod val="170000"/>
+          </a:schemeClr>
+        </a:solidFill>
+        <a:gradFill rotWithShape="1">
+          <a:gsLst>
+            <a:gs pos="0">
+              <a:schemeClr val="phClr">
+                <a:tint val="93000"/>
+                <a:satMod val="150000"/>
+                <a:shade val="98000"/>
+                <a:lumMod val="102000"/>
+              </a:schemeClr>
+            </a:gs>
+            <a:gs pos="50000">
+              <a:schemeClr val="phClr">
+                <a:tint val="98000"/>
+                <a:satMod val="130000"/>
+                <a:shade val="90000"/>
+                <a:lumMod val="103000"/>
+              </a:schemeClr>
+            </a:gs>
+            <a:gs pos="100000">
+              <a:schemeClr val="phClr">
+                <a:shade val="63000"/>
+                <a:satMod val="120000"/>
+              </a:schemeClr>
+            </a:gs>
+          </a:gsLst>
+          <a:lin ang="5400000" scaled="0"/>
+        </a:gradFill>
+      </a:bgFillStyleLst>
+    </a:fmtScheme>
+  </a:themeElements>
+  <a:objectDefaults/>
+  <a:extraClrSchemeLst/>
+  <a:extLst>
+    <a:ext uri="{05A4C25C-085E-4340-85A3-A5531E510DB2}">
+      <thm15:themeFamily xmlns:thm15="http://schemas.microsoft.com/office/thememl/2012/main" name="Office Theme" id="{62F939B6-93AF-4DB8-9C6B-D6C7DFDC589F}" vid="{4A3C46E8-61CC-4603-A589-7422A47A8E4A}"/>
+    </a:ext>
+  </a:extLst>
+</a:theme>
+</file>
+
 <file path=ppt/theme/themeOverride1.xml><?xml version="1.0" encoding="utf-8"?>
 <a:themeOverride xmlns:a="http://schemas.openxmlformats.org/drawingml/2006/main">
   <a:clrScheme name="Tema de Office">
